--- a/presentation/fraud-alert-control-tower-project-journey-final.pptx
+++ b/presentation/fraud-alert-control-tower-project-journey-final.pptx
@@ -2,24 +2,25 @@
 <file path=ppt/presentation.xml><?xml version="1.0" encoding="utf-8"?>
 <p:presentation xmlns:p="http://schemas.openxmlformats.org/presentationml/2006/main">
   <p:sldMasterIdLst>
-    <p:sldMasterId xmlns:r="http://schemas.openxmlformats.org/officeDocument/2006/relationships" id="2147483648" r:id="R8b56fa70851d496d"/>
+    <p:sldMasterId xmlns:r="http://schemas.openxmlformats.org/officeDocument/2006/relationships" id="2147483648" r:id="Rbd06cb9692904f91"/>
   </p:sldMasterIdLst>
   <p:notesMasterIdLst>
-    <p:notesMasterId xmlns:r="http://schemas.openxmlformats.org/officeDocument/2006/relationships" r:id="Rba9658cb99e740e0"/>
+    <p:notesMasterId xmlns:r="http://schemas.openxmlformats.org/officeDocument/2006/relationships" r:id="R354a4830110c4791"/>
   </p:notesMasterIdLst>
   <p:sldIdLst>
-    <p:sldId xmlns:r="http://schemas.openxmlformats.org/officeDocument/2006/relationships" id="256" r:id="Rc7bea7a60b05491c"/>
-    <p:sldId xmlns:r="http://schemas.openxmlformats.org/officeDocument/2006/relationships" id="257" r:id="R3a3c000dca224350"/>
-    <p:sldId xmlns:r="http://schemas.openxmlformats.org/officeDocument/2006/relationships" id="258" r:id="Rdb95caf199524a5d"/>
-    <p:sldId xmlns:r="http://schemas.openxmlformats.org/officeDocument/2006/relationships" id="259" r:id="Rf702951614544c9e"/>
-    <p:sldId xmlns:r="http://schemas.openxmlformats.org/officeDocument/2006/relationships" id="260" r:id="R24be831657b64ba4"/>
-    <p:sldId xmlns:r="http://schemas.openxmlformats.org/officeDocument/2006/relationships" id="261" r:id="Rbb17b113a0914933"/>
-    <p:sldId xmlns:r="http://schemas.openxmlformats.org/officeDocument/2006/relationships" id="262" r:id="R6f593ac5b2f44c5c"/>
-    <p:sldId xmlns:r="http://schemas.openxmlformats.org/officeDocument/2006/relationships" id="263" r:id="Rf3fc885ce6dc4906"/>
-    <p:sldId xmlns:r="http://schemas.openxmlformats.org/officeDocument/2006/relationships" id="264" r:id="Rba852fa6273d464c"/>
-    <p:sldId xmlns:r="http://schemas.openxmlformats.org/officeDocument/2006/relationships" id="265" r:id="R55b2d8b736c84ce6"/>
-    <p:sldId xmlns:r="http://schemas.openxmlformats.org/officeDocument/2006/relationships" id="266" r:id="R83cbaeb39d6a4726"/>
-    <p:sldId xmlns:r="http://schemas.openxmlformats.org/officeDocument/2006/relationships" id="267" r:id="Re0082434dbaa4b32"/>
+    <p:sldId xmlns:r="http://schemas.openxmlformats.org/officeDocument/2006/relationships" id="256" r:id="Raab4e91fe8194bef"/>
+    <p:sldId xmlns:r="http://schemas.openxmlformats.org/officeDocument/2006/relationships" id="257" r:id="R6e3af7227fb24641"/>
+    <p:sldId xmlns:r="http://schemas.openxmlformats.org/officeDocument/2006/relationships" id="258" r:id="Re80b527c79d845ec"/>
+    <p:sldId xmlns:r="http://schemas.openxmlformats.org/officeDocument/2006/relationships" id="259" r:id="Raf1d3db9de6640b1"/>
+    <p:sldId xmlns:r="http://schemas.openxmlformats.org/officeDocument/2006/relationships" id="260" r:id="Rceb334e252e54c30"/>
+    <p:sldId xmlns:r="http://schemas.openxmlformats.org/officeDocument/2006/relationships" id="261" r:id="Rccfd2a05a5e24fe8"/>
+    <p:sldId xmlns:r="http://schemas.openxmlformats.org/officeDocument/2006/relationships" id="262" r:id="Rf240744ad82f4fef"/>
+    <p:sldId xmlns:r="http://schemas.openxmlformats.org/officeDocument/2006/relationships" id="263" r:id="Rf43b680ec8e64153"/>
+    <p:sldId xmlns:r="http://schemas.openxmlformats.org/officeDocument/2006/relationships" id="264" r:id="R9488c4eab285418b"/>
+    <p:sldId xmlns:r="http://schemas.openxmlformats.org/officeDocument/2006/relationships" id="265" r:id="R1fb698607d224f92"/>
+    <p:sldId xmlns:r="http://schemas.openxmlformats.org/officeDocument/2006/relationships" id="266" r:id="R6d1c2e0b9b2e4818"/>
+    <p:sldId xmlns:r="http://schemas.openxmlformats.org/officeDocument/2006/relationships" id="267" r:id="Rc4cc7255cb8448fc"/>
+    <p:sldId xmlns:r="http://schemas.openxmlformats.org/officeDocument/2006/relationships" id="268" r:id="R583b161f72534afa"/>
   </p:sldIdLst>
   <p:sldSz cx="12192000" cy="6858000"/>
   <p:notesSz cx="6858000" cy="9144000"/>
@@ -696,16 +697,7 @@
         <p:txBody>
           <a:bodyPr xmlns:a="http://schemas.openxmlformats.org/drawingml/2006/main"/>
           <a:lstStyle xmlns:a="http://schemas.openxmlformats.org/drawingml/2006/main"/>
-          <a:p xmlns:a="http://schemas.openxmlformats.org/drawingml/2006/main">
-            <a:r>
-              <a:t>This is where you tell your tutor what changed since last submission.</a:t>
-            </a:r>
-          </a:p>
-          <a:p xmlns:a="http://schemas.openxmlformats.org/drawingml/2006/main">
-            <a:r>
-              <a:t>Use simple language: I cleaned the story, improved the UI, made the report export useful, and added explanation support.</a:t>
-            </a:r>
-          </a:p>
+          <a:p xmlns:a="http://schemas.openxmlformats.org/drawingml/2006/main"/>
         </p:txBody>
       </p:sp>
       <p:sp>
@@ -734,6 +726,81 @@
 </file>
 
 <file path=ppt/notesSlides/notesSlide12.xml><?xml version="1.0" encoding="utf-8"?>
+<p:notes xmlns:p="http://schemas.openxmlformats.org/presentationml/2006/main">
+  <p:cSld>
+    <p:spTree>
+      <p:nvGrpSpPr>
+        <p:cNvPr id="1" name=""/>
+        <p:cNvGrpSpPr/>
+        <p:nvPr/>
+      </p:nvGrpSpPr>
+      <p:grpSpPr>
+        <a:xfrm xmlns:a="http://schemas.openxmlformats.org/drawingml/2006/main"/>
+      </p:grpSpPr>
+      <p:sp>
+        <p:nvSpPr>
+          <p:cNvPr id="2" name="Slide Image Placeholder 1"/>
+          <p:cNvSpPr>
+            <a:spLocks xmlns:a="http://schemas.openxmlformats.org/drawingml/2006/main" noGrp="1"/>
+          </p:cNvSpPr>
+          <p:nvPr>
+            <p:ph type="sldImg" idx="0"/>
+          </p:nvPr>
+        </p:nvSpPr>
+        <p:spPr/>
+      </p:sp>
+      <p:sp>
+        <p:nvSpPr>
+          <p:cNvPr id="3" name="Notes Placeholder 2"/>
+          <p:cNvSpPr>
+            <a:spLocks xmlns:a="http://schemas.openxmlformats.org/drawingml/2006/main" noGrp="1"/>
+          </p:cNvSpPr>
+          <p:nvPr>
+            <p:ph type="body" idx="1"/>
+          </p:nvPr>
+        </p:nvSpPr>
+        <p:spPr/>
+        <p:txBody>
+          <a:bodyPr xmlns:a="http://schemas.openxmlformats.org/drawingml/2006/main"/>
+          <a:lstStyle xmlns:a="http://schemas.openxmlformats.org/drawingml/2006/main"/>
+          <a:p xmlns:a="http://schemas.openxmlformats.org/drawingml/2006/main">
+            <a:r>
+              <a:t>This is where you tell your tutor what changed since last submission.</a:t>
+            </a:r>
+          </a:p>
+          <a:p xmlns:a="http://schemas.openxmlformats.org/drawingml/2006/main">
+            <a:r>
+              <a:t>Use simple language: I cleaned the story, improved the UI, made the report export useful, and added explanation support.</a:t>
+            </a:r>
+          </a:p>
+        </p:txBody>
+      </p:sp>
+      <p:sp>
+        <p:nvSpPr>
+          <p:cNvPr id="4" name="Slide Number Placeholder 3"/>
+          <p:cNvSpPr>
+            <a:spLocks xmlns:a="http://schemas.openxmlformats.org/drawingml/2006/main" noGrp="1"/>
+          </p:cNvSpPr>
+          <p:nvPr>
+            <p:ph type="sldNum" idx="5"/>
+          </p:nvPr>
+        </p:nvSpPr>
+        <p:spPr/>
+        <p:txBody>
+          <a:bodyPr xmlns:a="http://schemas.openxmlformats.org/drawingml/2006/main"/>
+          <a:lstStyle xmlns:a="http://schemas.openxmlformats.org/drawingml/2006/main"/>
+          <a:p xmlns:a="http://schemas.openxmlformats.org/drawingml/2006/main"/>
+        </p:txBody>
+      </p:sp>
+    </p:spTree>
+  </p:cSld>
+  <p:clrMapOvr>
+    <a:masterClrMapping xmlns:a="http://schemas.openxmlformats.org/drawingml/2006/main"/>
+  </p:clrMapOvr>
+</p:notes>
+</file>
+
+<file path=ppt/notesSlides/notesSlide13.xml><?xml version="1.0" encoding="utf-8"?>
 <p:notes xmlns:p="http://schemas.openxmlformats.org/presentationml/2006/main">
   <p:cSld>
     <p:spTree>
@@ -1446,7 +1513,7 @@
   </p:cSld>
   <p:clrMap bg1="lt1" tx1="dk1" bg2="lt2" tx2="dk2" accent1="accent1" accent2="accent2" accent3="accent3" accent4="accent4" accent5="accent5" accent6="accent6" hlink="hlink" folHlink="folHlink"/>
   <p:sldLayoutIdLst>
-    <p:sldLayoutId xmlns:r="http://schemas.openxmlformats.org/officeDocument/2006/relationships" id="2147483649" r:id="R34b29602c2a64448"/>
+    <p:sldLayoutId xmlns:r="http://schemas.openxmlformats.org/officeDocument/2006/relationships" id="2147483649" r:id="Ra982d88809ba4e38"/>
   </p:sldLayoutIdLst>
   <p:txStyles>
     <p:titleStyle>
@@ -2058,6 +2125,7 @@
           <a:lstStyle xmlns:a="http://schemas.openxmlformats.org/drawingml/2006/main"/>
           <a:p xmlns:a="http://schemas.openxmlformats.org/drawingml/2006/main">
             <a:pPr algn="l">
+              <a:buNone/>
               <a:defRPr sz="1200" b="1" i="0">
                 <a:solidFill>
                   <a:srgbClr val="064E49"/>
@@ -2108,6 +2176,7 @@
           <a:lstStyle xmlns:a="http://schemas.openxmlformats.org/drawingml/2006/main"/>
           <a:p xmlns:a="http://schemas.openxmlformats.org/drawingml/2006/main">
             <a:pPr algn="l">
+              <a:buNone/>
               <a:defRPr sz="4350" b="1" i="0">
                 <a:solidFill>
                   <a:srgbClr val="111827"/>
@@ -2125,6 +2194,7 @@
           </a:p>
           <a:p xmlns:a="http://schemas.openxmlformats.org/drawingml/2006/main">
             <a:pPr algn="l">
+              <a:buNone/>
               <a:defRPr sz="4350" b="1" i="0">
                 <a:solidFill>
                   <a:srgbClr val="111827"/>
@@ -2175,6 +2245,7 @@
           <a:lstStyle xmlns:a="http://schemas.openxmlformats.org/drawingml/2006/main"/>
           <a:p xmlns:a="http://schemas.openxmlformats.org/drawingml/2006/main">
             <a:pPr algn="l">
+              <a:buNone/>
               <a:defRPr sz="1650" b="0" i="0">
                 <a:solidFill>
                   <a:srgbClr val="5F6F6C"/>
@@ -2293,6 +2364,7 @@
           <a:lstStyle xmlns:a="http://schemas.openxmlformats.org/drawingml/2006/main"/>
           <a:p xmlns:a="http://schemas.openxmlformats.org/drawingml/2006/main">
             <a:pPr algn="l">
+              <a:buNone/>
               <a:defRPr sz="975" b="1" i="0">
                 <a:solidFill>
                   <a:srgbClr val="5F6F6C"/>
@@ -2343,6 +2415,7 @@
           <a:lstStyle xmlns:a="http://schemas.openxmlformats.org/drawingml/2006/main"/>
           <a:p xmlns:a="http://schemas.openxmlformats.org/drawingml/2006/main">
             <a:pPr algn="l">
+              <a:buNone/>
               <a:defRPr sz="2550" b="1" i="0">
                 <a:solidFill>
                   <a:srgbClr val="111827"/>
@@ -2461,6 +2534,7 @@
           <a:lstStyle xmlns:a="http://schemas.openxmlformats.org/drawingml/2006/main"/>
           <a:p xmlns:a="http://schemas.openxmlformats.org/drawingml/2006/main">
             <a:pPr algn="l">
+              <a:buNone/>
               <a:defRPr sz="975" b="1" i="0">
                 <a:solidFill>
                   <a:srgbClr val="5F6F6C"/>
@@ -2511,6 +2585,7 @@
           <a:lstStyle xmlns:a="http://schemas.openxmlformats.org/drawingml/2006/main"/>
           <a:p xmlns:a="http://schemas.openxmlformats.org/drawingml/2006/main">
             <a:pPr algn="l">
+              <a:buNone/>
               <a:defRPr sz="2550" b="1" i="0">
                 <a:solidFill>
                   <a:srgbClr val="111827"/>
@@ -2629,6 +2704,7 @@
           <a:lstStyle xmlns:a="http://schemas.openxmlformats.org/drawingml/2006/main"/>
           <a:p xmlns:a="http://schemas.openxmlformats.org/drawingml/2006/main">
             <a:pPr algn="l">
+              <a:buNone/>
               <a:defRPr sz="975" b="1" i="0">
                 <a:solidFill>
                   <a:srgbClr val="5F6F6C"/>
@@ -2679,6 +2755,7 @@
           <a:lstStyle xmlns:a="http://schemas.openxmlformats.org/drawingml/2006/main"/>
           <a:p xmlns:a="http://schemas.openxmlformats.org/drawingml/2006/main">
             <a:pPr algn="l">
+              <a:buNone/>
               <a:defRPr sz="2550" b="1" i="0">
                 <a:solidFill>
                   <a:srgbClr val="111827"/>
@@ -2797,6 +2874,7 @@
           <a:lstStyle xmlns:a="http://schemas.openxmlformats.org/drawingml/2006/main"/>
           <a:p xmlns:a="http://schemas.openxmlformats.org/drawingml/2006/main">
             <a:pPr algn="l">
+              <a:buNone/>
               <a:defRPr sz="975" b="1" i="0">
                 <a:solidFill>
                   <a:srgbClr val="5F6F6C"/>
@@ -2847,6 +2925,7 @@
           <a:lstStyle xmlns:a="http://schemas.openxmlformats.org/drawingml/2006/main"/>
           <a:p xmlns:a="http://schemas.openxmlformats.org/drawingml/2006/main">
             <a:pPr algn="l">
+              <a:buNone/>
               <a:defRPr sz="2550" b="1" i="0">
                 <a:solidFill>
                   <a:srgbClr val="111827"/>
@@ -2932,6 +3011,7 @@
           <a:lstStyle xmlns:a="http://schemas.openxmlformats.org/drawingml/2006/main"/>
           <a:p xmlns:a="http://schemas.openxmlformats.org/drawingml/2006/main">
             <a:pPr algn="l">
+              <a:buNone/>
               <a:defRPr sz="1350" b="1" i="0">
                 <a:solidFill>
                   <a:srgbClr val="087B73"/>
@@ -2982,6 +3062,7 @@
           <a:lstStyle xmlns:a="http://schemas.openxmlformats.org/drawingml/2006/main"/>
           <a:p xmlns:a="http://schemas.openxmlformats.org/drawingml/2006/main">
             <a:pPr algn="l">
+              <a:buNone/>
               <a:defRPr sz="1500" b="0" i="0">
                 <a:solidFill>
                   <a:srgbClr val="111827"/>
@@ -3061,6 +3142,7 @@
           <a:lstStyle xmlns:a="http://schemas.openxmlformats.org/drawingml/2006/main"/>
           <a:p xmlns:a="http://schemas.openxmlformats.org/drawingml/2006/main">
             <a:pPr algn="l">
+              <a:buNone/>
               <a:defRPr sz="1200" b="1" i="0">
                 <a:solidFill>
                   <a:srgbClr val="087B73"/>
@@ -3111,6 +3193,7 @@
           <a:lstStyle xmlns:a="http://schemas.openxmlformats.org/drawingml/2006/main"/>
           <a:p xmlns:a="http://schemas.openxmlformats.org/drawingml/2006/main">
             <a:pPr algn="l">
+              <a:buNone/>
               <a:defRPr sz="2850" b="1" i="0">
                 <a:solidFill>
                   <a:srgbClr val="111827"/>
@@ -3161,6 +3244,7 @@
           <a:lstStyle xmlns:a="http://schemas.openxmlformats.org/drawingml/2006/main"/>
           <a:p xmlns:a="http://schemas.openxmlformats.org/drawingml/2006/main">
             <a:pPr algn="l">
+              <a:buNone/>
               <a:defRPr sz="1275" b="0" i="0">
                 <a:solidFill>
                   <a:srgbClr val="5F6F6C"/>
@@ -3213,14 +3297,14 @@
       </p:sp>
       <p:pic>
         <p:nvPicPr>
-          <p:cNvPr id="25" name=""/>
+          <p:cNvPr id="26" name=""/>
           <p:cNvPicPr>
             <a:picLocks xmlns:a="http://schemas.openxmlformats.org/drawingml/2006/main" noChangeAspect="1"/>
           </p:cNvPicPr>
           <p:nvPr/>
         </p:nvPicPr>
         <p:blipFill>
-          <a:blip xmlns:r="http://schemas.openxmlformats.org/officeDocument/2006/relationships" xmlns:a="http://schemas.openxmlformats.org/drawingml/2006/main" r:embed="R291f6cae3be94858"/>
+          <a:blip xmlns:r="http://schemas.openxmlformats.org/officeDocument/2006/relationships" xmlns:a="http://schemas.openxmlformats.org/drawingml/2006/main" r:embed="Rccac33858ad94422"/>
           <a:stretch xmlns:a="http://schemas.openxmlformats.org/drawingml/2006/main"/>
         </p:blipFill>
         <p:spPr>
@@ -3229,9 +3313,7 @@
             <a:ext cx="4838007" cy="3695700"/>
           </a:xfrm>
           <a:prstGeom xmlns:a="http://schemas.openxmlformats.org/drawingml/2006/main" prst="roundRect">
-            <a:avLst>
-              <a:gd name="adj" fmla="val 2062"/>
-            </a:avLst>
+            <a:avLst/>
           </a:prstGeom>
         </p:spPr>
       </p:pic>
@@ -3303,6 +3385,7 @@
           <a:lstStyle xmlns:a="http://schemas.openxmlformats.org/drawingml/2006/main"/>
           <a:p xmlns:a="http://schemas.openxmlformats.org/drawingml/2006/main">
             <a:pPr algn="l">
+              <a:buNone/>
               <a:defRPr sz="1875" b="1" i="0">
                 <a:solidFill>
                   <a:srgbClr val="111827"/>
@@ -3353,6 +3436,7 @@
           <a:lstStyle xmlns:a="http://schemas.openxmlformats.org/drawingml/2006/main"/>
           <a:p xmlns:a="http://schemas.openxmlformats.org/drawingml/2006/main">
             <a:pPr algn="l">
+              <a:buNone/>
               <a:defRPr sz="1275" b="1" i="0">
                 <a:solidFill>
                   <a:srgbClr val="087B73"/>
@@ -3403,6 +3487,7 @@
           <a:lstStyle xmlns:a="http://schemas.openxmlformats.org/drawingml/2006/main"/>
           <a:p xmlns:a="http://schemas.openxmlformats.org/drawingml/2006/main">
             <a:pPr algn="l">
+              <a:buNone/>
               <a:defRPr sz="1275" b="0" i="0">
                 <a:solidFill>
                   <a:srgbClr val="111827"/>
@@ -3453,6 +3538,7 @@
           <a:lstStyle xmlns:a="http://schemas.openxmlformats.org/drawingml/2006/main"/>
           <a:p xmlns:a="http://schemas.openxmlformats.org/drawingml/2006/main">
             <a:pPr algn="l">
+              <a:buNone/>
               <a:defRPr sz="1275" b="1" i="0">
                 <a:solidFill>
                   <a:srgbClr val="087B73"/>
@@ -3503,6 +3589,7 @@
           <a:lstStyle xmlns:a="http://schemas.openxmlformats.org/drawingml/2006/main"/>
           <a:p xmlns:a="http://schemas.openxmlformats.org/drawingml/2006/main">
             <a:pPr algn="l">
+              <a:buNone/>
               <a:defRPr sz="1275" b="0" i="0">
                 <a:solidFill>
                   <a:srgbClr val="111827"/>
@@ -3553,6 +3640,7 @@
           <a:lstStyle xmlns:a="http://schemas.openxmlformats.org/drawingml/2006/main"/>
           <a:p xmlns:a="http://schemas.openxmlformats.org/drawingml/2006/main">
             <a:pPr algn="l">
+              <a:buNone/>
               <a:defRPr sz="1275" b="1" i="0">
                 <a:solidFill>
                   <a:srgbClr val="087B73"/>
@@ -3603,6 +3691,7 @@
           <a:lstStyle xmlns:a="http://schemas.openxmlformats.org/drawingml/2006/main"/>
           <a:p xmlns:a="http://schemas.openxmlformats.org/drawingml/2006/main">
             <a:pPr algn="l">
+              <a:buNone/>
               <a:defRPr sz="1275" b="0" i="0">
                 <a:solidFill>
                   <a:srgbClr val="111827"/>
@@ -3653,6 +3742,7 @@
           <a:lstStyle xmlns:a="http://schemas.openxmlformats.org/drawingml/2006/main"/>
           <a:p xmlns:a="http://schemas.openxmlformats.org/drawingml/2006/main">
             <a:pPr algn="l">
+              <a:buNone/>
               <a:defRPr sz="1275" b="1" i="0">
                 <a:solidFill>
                   <a:srgbClr val="087B73"/>
@@ -3703,6 +3793,7 @@
           <a:lstStyle xmlns:a="http://schemas.openxmlformats.org/drawingml/2006/main"/>
           <a:p xmlns:a="http://schemas.openxmlformats.org/drawingml/2006/main">
             <a:pPr algn="l">
+              <a:buNone/>
               <a:defRPr sz="1275" b="0" i="0">
                 <a:solidFill>
                   <a:srgbClr val="111827"/>
@@ -3753,6 +3844,7 @@
           <a:lstStyle xmlns:a="http://schemas.openxmlformats.org/drawingml/2006/main"/>
           <a:p xmlns:a="http://schemas.openxmlformats.org/drawingml/2006/main">
             <a:pPr algn="l">
+              <a:buNone/>
               <a:defRPr sz="1275" b="1" i="0">
                 <a:solidFill>
                   <a:srgbClr val="087B73"/>
@@ -3803,6 +3895,7 @@
           <a:lstStyle xmlns:a="http://schemas.openxmlformats.org/drawingml/2006/main"/>
           <a:p xmlns:a="http://schemas.openxmlformats.org/drawingml/2006/main">
             <a:pPr algn="l">
+              <a:buNone/>
               <a:defRPr sz="1275" b="0" i="0">
                 <a:solidFill>
                   <a:srgbClr val="111827"/>
@@ -3853,6 +3946,7 @@
           <a:lstStyle xmlns:a="http://schemas.openxmlformats.org/drawingml/2006/main"/>
           <a:p xmlns:a="http://schemas.openxmlformats.org/drawingml/2006/main">
             <a:pPr algn="l">
+              <a:buNone/>
               <a:defRPr sz="1275" b="1" i="0">
                 <a:solidFill>
                   <a:srgbClr val="087B73"/>
@@ -3903,6 +3997,7 @@
           <a:lstStyle xmlns:a="http://schemas.openxmlformats.org/drawingml/2006/main"/>
           <a:p xmlns:a="http://schemas.openxmlformats.org/drawingml/2006/main">
             <a:pPr algn="l">
+              <a:buNone/>
               <a:defRPr sz="1275" b="0" i="0">
                 <a:solidFill>
                   <a:srgbClr val="111827"/>
@@ -3953,6 +4048,7 @@
           <a:lstStyle xmlns:a="http://schemas.openxmlformats.org/drawingml/2006/main"/>
           <a:p xmlns:a="http://schemas.openxmlformats.org/drawingml/2006/main">
             <a:pPr algn="l">
+              <a:buNone/>
               <a:defRPr sz="1425" b="1" i="0">
                 <a:solidFill>
                   <a:srgbClr val="064E49"/>
@@ -3983,13 +4079,6 @@
 <file path=ppt/slides/slide11.xml><?xml version="1.0" encoding="utf-8"?>
 <p:sld xmlns:p="http://schemas.openxmlformats.org/presentationml/2006/main">
   <p:cSld>
-    <p:bg>
-      <p:bgPr>
-        <a:solidFill xmlns:a="http://schemas.openxmlformats.org/drawingml/2006/main">
-          <a:srgbClr val="F5FBFA"/>
-        </a:solidFill>
-      </p:bgPr>
-    </p:bg>
     <p:spTree>
       <p:nvGrpSpPr>
         <p:cNvPr id="1" name=""/>
@@ -4001,10 +4090,43 @@
       </p:grpSpPr>
       <p:sp>
         <p:nvSpPr>
-          <p:cNvPr id="1" name="">
-            <a:extLst xmlns:a="http://schemas.openxmlformats.org/drawingml/2006/main">
-              <a:ext uri="{FF2B5EF4-FFF2-40B4-BE49-F238E27FC236}">
-                <a16:creationId xmlns:a16="http://schemas.microsoft.com/office/drawing/2014/main" id="{443BDF1C-E9E1-4069-950A-92909074D3C4}"/>
+          <p:cNvPr id="1" name="roadmap-background">
+            <a:extLst xmlns:a="http://schemas.openxmlformats.org/drawingml/2006/main">
+              <a:ext uri="{FF2B5EF4-FFF2-40B4-BE49-F238E27FC236}">
+                <a16:creationId xmlns:a16="http://schemas.microsoft.com/office/drawing/2014/main" id="{E82690FA-11AD-4C15-986A-EB0E9B374A07}"/>
+              </a:ext>
+            </a:extLst>
+          </p:cNvPr>
+          <p:cNvSpPr>
+            <a:spLocks xmlns:a="http://schemas.openxmlformats.org/drawingml/2006/main" noGrp="1"/>
+          </p:cNvSpPr>
+          <p:nvPr/>
+        </p:nvSpPr>
+        <p:spPr>
+          <a:xfrm xmlns:a="http://schemas.openxmlformats.org/drawingml/2006/main">
+            <a:off x="0" y="0"/>
+            <a:ext cx="12192000" cy="6858000"/>
+          </a:xfrm>
+          <a:prstGeom xmlns:a="http://schemas.openxmlformats.org/drawingml/2006/main" prst="rect">
+            <a:avLst/>
+          </a:prstGeom>
+          <a:solidFill xmlns:a="http://schemas.openxmlformats.org/drawingml/2006/main">
+            <a:srgbClr val="F8FAFC"/>
+          </a:solidFill>
+          <a:ln xmlns:a="http://schemas.openxmlformats.org/drawingml/2006/main" w="0">
+            <a:solidFill>
+              <a:srgbClr val="F8FAFC"/>
+            </a:solidFill>
+            <a:prstDash val="solid"/>
+          </a:ln>
+        </p:spPr>
+      </p:sp>
+      <p:sp>
+        <p:nvSpPr>
+          <p:cNvPr id="2" name="slide-number">
+            <a:extLst xmlns:a="http://schemas.openxmlformats.org/drawingml/2006/main">
+              <a:ext uri="{FF2B5EF4-FFF2-40B4-BE49-F238E27FC236}">
+                <a16:creationId xmlns:a16="http://schemas.microsoft.com/office/drawing/2014/main" id="{852D3281-B9A3-4345-8358-2115084F2339}"/>
               </a:ext>
             </a:extLst>
           </p:cNvPr>
@@ -4031,17 +4153,17 @@
           <a:bodyPr xmlns:a="http://schemas.openxmlformats.org/drawingml/2006/main"/>
           <a:lstStyle xmlns:a="http://schemas.openxmlformats.org/drawingml/2006/main"/>
           <a:p xmlns:a="http://schemas.openxmlformats.org/drawingml/2006/main">
-            <a:pPr algn="l">
-              <a:defRPr sz="1200" b="1" i="0">
-                <a:solidFill>
-                  <a:srgbClr val="087B73"/>
-                </a:solidFill>
-              </a:defRPr>
-            </a:pPr>
-            <a:r>
-              <a:rPr sz="1200" b="1" i="0">
-                <a:solidFill>
-                  <a:srgbClr val="087B73"/>
+            <a:pPr algn="r">
+              <a:defRPr sz="1050" b="1">
+                <a:solidFill>
+                  <a:srgbClr val="005F5A"/>
+                </a:solidFill>
+              </a:defRPr>
+            </a:pPr>
+            <a:r>
+              <a:rPr sz="1050" b="1">
+                <a:solidFill>
+                  <a:srgbClr val="005F5A"/>
                 </a:solidFill>
               </a:rPr>
               <a:t>011</a:t>
@@ -4051,10 +4173,10 @@
       </p:sp>
       <p:sp>
         <p:nvSpPr>
-          <p:cNvPr id="2" name="">
-            <a:extLst xmlns:a="http://schemas.openxmlformats.org/drawingml/2006/main">
-              <a:ext uri="{FF2B5EF4-FFF2-40B4-BE49-F238E27FC236}">
-                <a16:creationId xmlns:a16="http://schemas.microsoft.com/office/drawing/2014/main" id="{7198A5F1-E7FF-43AF-84BB-CA4BAF9CDD26}"/>
+          <p:cNvPr id="3" name="slide-title">
+            <a:extLst xmlns:a="http://schemas.openxmlformats.org/drawingml/2006/main">
+              <a:ext uri="{FF2B5EF4-FFF2-40B4-BE49-F238E27FC236}">
+                <a16:creationId xmlns:a16="http://schemas.microsoft.com/office/drawing/2014/main" id="{31B6C26B-9598-4871-8EE8-27EB4BACB234}"/>
               </a:ext>
             </a:extLst>
           </p:cNvPr>
@@ -4066,144 +4188,111 @@
         <p:spPr>
           <a:xfrm xmlns:a="http://schemas.openxmlformats.org/drawingml/2006/main">
             <a:off x="1162050" y="323850"/>
-            <a:ext cx="8286750" cy="514350"/>
-          </a:xfrm>
-          <a:prstGeom xmlns:a="http://schemas.openxmlformats.org/drawingml/2006/main" prst="rect">
-            <a:avLst/>
-          </a:prstGeom>
-          <a:noFill xmlns:a="http://schemas.openxmlformats.org/drawingml/2006/main"/>
-          <a:ln xmlns:a="http://schemas.openxmlformats.org/drawingml/2006/main" w="0">
-            <a:noFill/>
-            <a:prstDash val="solid"/>
-          </a:ln>
-        </p:spPr>
-        <p:txBody>
-          <a:bodyPr xmlns:a="http://schemas.openxmlformats.org/drawingml/2006/main"/>
-          <a:lstStyle xmlns:a="http://schemas.openxmlformats.org/drawingml/2006/main"/>
-          <a:p xmlns:a="http://schemas.openxmlformats.org/drawingml/2006/main">
-            <a:pPr algn="l">
-              <a:defRPr sz="2850" b="1" i="0">
-                <a:solidFill>
-                  <a:srgbClr val="111827"/>
-                </a:solidFill>
-              </a:defRPr>
-            </a:pPr>
-            <a:r>
-              <a:rPr sz="2850" b="1" i="0">
-                <a:solidFill>
-                  <a:srgbClr val="111827"/>
-                </a:solidFill>
-              </a:rPr>
-              <a:t>Improvements After Feedback</a:t>
-            </a:r>
-          </a:p>
-        </p:txBody>
-      </p:sp>
-      <p:sp>
-        <p:nvSpPr>
-          <p:cNvPr id="3" name="">
-            <a:extLst xmlns:a="http://schemas.openxmlformats.org/drawingml/2006/main">
-              <a:ext uri="{FF2B5EF4-FFF2-40B4-BE49-F238E27FC236}">
-                <a16:creationId xmlns:a16="http://schemas.microsoft.com/office/drawing/2014/main" id="{E7D927F5-9360-49E3-8CE3-C402AC05E515}"/>
-              </a:ext>
-            </a:extLst>
-          </p:cNvPr>
-          <p:cNvSpPr>
-            <a:spLocks xmlns:a="http://schemas.openxmlformats.org/drawingml/2006/main" noGrp="1"/>
-          </p:cNvSpPr>
-          <p:nvPr/>
-        </p:nvSpPr>
-        <p:spPr>
-          <a:xfrm xmlns:a="http://schemas.openxmlformats.org/drawingml/2006/main">
-            <a:off x="1162050" y="838200"/>
-            <a:ext cx="8763000" cy="323850"/>
-          </a:xfrm>
-          <a:prstGeom xmlns:a="http://schemas.openxmlformats.org/drawingml/2006/main" prst="rect">
-            <a:avLst/>
-          </a:prstGeom>
-          <a:noFill xmlns:a="http://schemas.openxmlformats.org/drawingml/2006/main"/>
-          <a:ln xmlns:a="http://schemas.openxmlformats.org/drawingml/2006/main" w="0">
-            <a:noFill/>
-            <a:prstDash val="solid"/>
-          </a:ln>
-        </p:spPr>
-        <p:txBody>
-          <a:bodyPr xmlns:a="http://schemas.openxmlformats.org/drawingml/2006/main"/>
-          <a:lstStyle xmlns:a="http://schemas.openxmlformats.org/drawingml/2006/main"/>
-          <a:p xmlns:a="http://schemas.openxmlformats.org/drawingml/2006/main">
-            <a:pPr algn="l">
-              <a:defRPr sz="1275" b="0" i="0">
-                <a:solidFill>
-                  <a:srgbClr val="5F6F6C"/>
-                </a:solidFill>
-              </a:defRPr>
-            </a:pPr>
-            <a:r>
-              <a:rPr sz="1275" b="0" i="0">
-                <a:solidFill>
-                  <a:srgbClr val="5F6F6C"/>
-                </a:solidFill>
-              </a:rPr>
-              <a:t>I used review comments to move the project from demo-quality to submission-ready.</a:t>
-            </a:r>
-          </a:p>
-        </p:txBody>
-      </p:sp>
-      <p:sp>
-        <p:nvSpPr>
-          <p:cNvPr id="4" name="">
-            <a:extLst xmlns:a="http://schemas.openxmlformats.org/drawingml/2006/main">
-              <a:ext uri="{FF2B5EF4-FFF2-40B4-BE49-F238E27FC236}">
-                <a16:creationId xmlns:a16="http://schemas.microsoft.com/office/drawing/2014/main" id="{A4805749-F068-447C-ADDD-05B7873759CD}"/>
-              </a:ext>
-            </a:extLst>
-          </p:cNvPr>
-          <p:cNvSpPr>
-            <a:spLocks xmlns:a="http://schemas.openxmlformats.org/drawingml/2006/main" noGrp="1"/>
-          </p:cNvSpPr>
-          <p:nvPr/>
-        </p:nvSpPr>
-        <p:spPr>
-          <a:xfrm xmlns:a="http://schemas.openxmlformats.org/drawingml/2006/main">
-            <a:off x="666750" y="1219200"/>
-            <a:ext cx="10858500" cy="19050"/>
-          </a:xfrm>
-          <a:prstGeom xmlns:a="http://schemas.openxmlformats.org/drawingml/2006/main" prst="rect">
-            <a:avLst/>
-          </a:prstGeom>
-          <a:solidFill xmlns:a="http://schemas.openxmlformats.org/drawingml/2006/main">
-            <a:srgbClr val="E7F0EE"/>
-          </a:solidFill>
-          <a:ln xmlns:a="http://schemas.openxmlformats.org/drawingml/2006/main" w="0">
-            <a:solidFill>
-              <a:srgbClr val="E7F0EE"/>
-            </a:solidFill>
-            <a:prstDash val="solid"/>
-          </a:ln>
-        </p:spPr>
-      </p:sp>
-      <p:sp>
-        <p:nvSpPr>
-          <p:cNvPr id="5" name="">
-            <a:extLst xmlns:a="http://schemas.openxmlformats.org/drawingml/2006/main">
-              <a:ext uri="{FF2B5EF4-FFF2-40B4-BE49-F238E27FC236}">
-                <a16:creationId xmlns:a16="http://schemas.microsoft.com/office/drawing/2014/main" id="{5CFF7B15-09F9-4721-B31E-AAB612542A80}"/>
-              </a:ext>
-            </a:extLst>
-          </p:cNvPr>
-          <p:cNvSpPr>
-            <a:spLocks xmlns:a="http://schemas.openxmlformats.org/drawingml/2006/main" noGrp="1"/>
-          </p:cNvSpPr>
-          <p:nvPr/>
-        </p:nvSpPr>
-        <p:spPr>
-          <a:xfrm xmlns:a="http://schemas.openxmlformats.org/drawingml/2006/main">
-            <a:off x="914400" y="1619250"/>
-            <a:ext cx="4762500" cy="3638550"/>
+            <a:ext cx="9144000" cy="552450"/>
+          </a:xfrm>
+          <a:prstGeom xmlns:a="http://schemas.openxmlformats.org/drawingml/2006/main" prst="rect">
+            <a:avLst/>
+          </a:prstGeom>
+          <a:noFill xmlns:a="http://schemas.openxmlformats.org/drawingml/2006/main"/>
+          <a:ln xmlns:a="http://schemas.openxmlformats.org/drawingml/2006/main" w="0">
+            <a:noFill/>
+            <a:prstDash val="solid"/>
+          </a:ln>
+        </p:spPr>
+        <p:txBody>
+          <a:bodyPr xmlns:a="http://schemas.openxmlformats.org/drawingml/2006/main"/>
+          <a:lstStyle xmlns:a="http://schemas.openxmlformats.org/drawingml/2006/main"/>
+          <a:p xmlns:a="http://schemas.openxmlformats.org/drawingml/2006/main">
+            <a:pPr>
+              <a:defRPr sz="2550" b="1">
+                <a:solidFill>
+                  <a:srgbClr val="020618"/>
+                </a:solidFill>
+              </a:defRPr>
+            </a:pPr>
+            <a:r>
+              <a:rPr sz="2550" b="1">
+                <a:solidFill>
+                  <a:srgbClr val="020618"/>
+                </a:solidFill>
+              </a:rPr>
+              <a:t>How This Scales To A Bank-Grade System</a:t>
+            </a:r>
+          </a:p>
+        </p:txBody>
+      </p:sp>
+      <p:sp>
+        <p:nvSpPr>
+          <p:cNvPr id="4" name="slide-subtitle">
+            <a:extLst xmlns:a="http://schemas.openxmlformats.org/drawingml/2006/main">
+              <a:ext uri="{FF2B5EF4-FFF2-40B4-BE49-F238E27FC236}">
+                <a16:creationId xmlns:a16="http://schemas.microsoft.com/office/drawing/2014/main" id="{C3910186-5B8C-4B58-A075-F9F550B44A4D}"/>
+              </a:ext>
+            </a:extLst>
+          </p:cNvPr>
+          <p:cNvSpPr>
+            <a:spLocks xmlns:a="http://schemas.openxmlformats.org/drawingml/2006/main" noGrp="1"/>
+          </p:cNvSpPr>
+          <p:nvPr/>
+        </p:nvSpPr>
+        <p:spPr>
+          <a:xfrm xmlns:a="http://schemas.openxmlformats.org/drawingml/2006/main">
+            <a:off x="1162050" y="876300"/>
+            <a:ext cx="9429750" cy="381000"/>
+          </a:xfrm>
+          <a:prstGeom xmlns:a="http://schemas.openxmlformats.org/drawingml/2006/main" prst="rect">
+            <a:avLst/>
+          </a:prstGeom>
+          <a:noFill xmlns:a="http://schemas.openxmlformats.org/drawingml/2006/main"/>
+          <a:ln xmlns:a="http://schemas.openxmlformats.org/drawingml/2006/main" w="0">
+            <a:noFill/>
+            <a:prstDash val="solid"/>
+          </a:ln>
+        </p:spPr>
+        <p:txBody>
+          <a:bodyPr xmlns:a="http://schemas.openxmlformats.org/drawingml/2006/main"/>
+          <a:lstStyle xmlns:a="http://schemas.openxmlformats.org/drawingml/2006/main"/>
+          <a:p xmlns:a="http://schemas.openxmlformats.org/drawingml/2006/main">
+            <a:pPr>
+              <a:defRPr sz="1275">
+                <a:solidFill>
+                  <a:srgbClr val="45556C"/>
+                </a:solidFill>
+              </a:defRPr>
+            </a:pPr>
+            <a:r>
+              <a:rPr sz="1275">
+                <a:solidFill>
+                  <a:srgbClr val="45556C"/>
+                </a:solidFill>
+              </a:rPr>
+              <a:t>The prototype is complete as a decision-support demo; these are the controlled steps required before a real banking rollout.</a:t>
+            </a:r>
+          </a:p>
+        </p:txBody>
+      </p:sp>
+      <p:sp>
+        <p:nvSpPr>
+          <p:cNvPr id="5" name="roadmap-card-1">
+            <a:extLst xmlns:a="http://schemas.openxmlformats.org/drawingml/2006/main">
+              <a:ext uri="{FF2B5EF4-FFF2-40B4-BE49-F238E27FC236}">
+                <a16:creationId xmlns:a16="http://schemas.microsoft.com/office/drawing/2014/main" id="{C6D966E4-56DF-42BA-B3F8-238A73EDBFBC}"/>
+              </a:ext>
+            </a:extLst>
+          </p:cNvPr>
+          <p:cNvSpPr>
+            <a:spLocks xmlns:a="http://schemas.openxmlformats.org/drawingml/2006/main" noGrp="1"/>
+          </p:cNvSpPr>
+          <p:nvPr/>
+        </p:nvSpPr>
+        <p:spPr>
+          <a:xfrm xmlns:a="http://schemas.openxmlformats.org/drawingml/2006/main">
+            <a:off x="762000" y="1485900"/>
+            <a:ext cx="3333750" cy="1714500"/>
           </a:xfrm>
           <a:prstGeom xmlns:a="http://schemas.openxmlformats.org/drawingml/2006/main" prst="roundRect">
             <a:avLst>
-              <a:gd name="adj" fmla="val 2094"/>
+              <a:gd name="adj" fmla="val 4444"/>
             </a:avLst>
           </a:prstGeom>
           <a:solidFill xmlns:a="http://schemas.openxmlformats.org/drawingml/2006/main">
@@ -4211,7 +4300,7 @@
           </a:solidFill>
           <a:ln xmlns:a="http://schemas.openxmlformats.org/drawingml/2006/main" w="9525">
             <a:solidFill>
-              <a:srgbClr val="CBDAD7"/>
+              <a:srgbClr val="E2E8F0"/>
             </a:solidFill>
             <a:prstDash val="solid"/>
           </a:ln>
@@ -4219,484 +4308,217 @@
       </p:sp>
       <p:sp>
         <p:nvSpPr>
-          <p:cNvPr id="6" name="">
-            <a:extLst xmlns:a="http://schemas.openxmlformats.org/drawingml/2006/main">
-              <a:ext uri="{FF2B5EF4-FFF2-40B4-BE49-F238E27FC236}">
-                <a16:creationId xmlns:a16="http://schemas.microsoft.com/office/drawing/2014/main" id="{8781A8B0-8107-40BE-A426-1B1F9199C0D1}"/>
-              </a:ext>
-            </a:extLst>
-          </p:cNvPr>
-          <p:cNvSpPr>
-            <a:spLocks xmlns:a="http://schemas.openxmlformats.org/drawingml/2006/main" noGrp="1"/>
-          </p:cNvSpPr>
-          <p:nvPr/>
-        </p:nvSpPr>
-        <p:spPr>
-          <a:xfrm xmlns:a="http://schemas.openxmlformats.org/drawingml/2006/main">
-            <a:off x="1200150" y="1924050"/>
-            <a:ext cx="3810000" cy="285750"/>
-          </a:xfrm>
-          <a:prstGeom xmlns:a="http://schemas.openxmlformats.org/drawingml/2006/main" prst="rect">
-            <a:avLst/>
-          </a:prstGeom>
-          <a:noFill xmlns:a="http://schemas.openxmlformats.org/drawingml/2006/main"/>
-          <a:ln xmlns:a="http://schemas.openxmlformats.org/drawingml/2006/main" w="0">
-            <a:noFill/>
-            <a:prstDash val="solid"/>
-          </a:ln>
-        </p:spPr>
-        <p:txBody>
-          <a:bodyPr xmlns:a="http://schemas.openxmlformats.org/drawingml/2006/main"/>
-          <a:lstStyle xmlns:a="http://schemas.openxmlformats.org/drawingml/2006/main"/>
-          <a:p xmlns:a="http://schemas.openxmlformats.org/drawingml/2006/main">
-            <a:pPr algn="l">
-              <a:defRPr sz="1875" b="1" i="0">
-                <a:solidFill>
-                  <a:srgbClr val="111827"/>
-                </a:solidFill>
-              </a:defRPr>
-            </a:pPr>
-            <a:r>
-              <a:rPr sz="1875" b="1" i="0">
-                <a:solidFill>
-                  <a:srgbClr val="111827"/>
-                </a:solidFill>
-              </a:rPr>
-              <a:t>Before feedback</a:t>
-            </a:r>
-          </a:p>
-        </p:txBody>
-      </p:sp>
-      <p:sp>
-        <p:nvSpPr>
-          <p:cNvPr id="7" name="">
-            <a:extLst xmlns:a="http://schemas.openxmlformats.org/drawingml/2006/main">
-              <a:ext uri="{FF2B5EF4-FFF2-40B4-BE49-F238E27FC236}">
-                <a16:creationId xmlns:a16="http://schemas.microsoft.com/office/drawing/2014/main" id="{1F13C81D-BC97-4163-9DCC-2BB53E6A3DC2}"/>
-              </a:ext>
-            </a:extLst>
-          </p:cNvPr>
-          <p:cNvSpPr>
-            <a:spLocks xmlns:a="http://schemas.openxmlformats.org/drawingml/2006/main" noGrp="1"/>
-          </p:cNvSpPr>
-          <p:nvPr/>
-        </p:nvSpPr>
-        <p:spPr>
-          <a:xfrm xmlns:a="http://schemas.openxmlformats.org/drawingml/2006/main">
-            <a:off x="1219200" y="2476500"/>
-            <a:ext cx="171450" cy="228600"/>
-          </a:xfrm>
-          <a:prstGeom xmlns:a="http://schemas.openxmlformats.org/drawingml/2006/main" prst="rect">
-            <a:avLst/>
-          </a:prstGeom>
-          <a:noFill xmlns:a="http://schemas.openxmlformats.org/drawingml/2006/main"/>
-          <a:ln xmlns:a="http://schemas.openxmlformats.org/drawingml/2006/main" w="0">
-            <a:noFill/>
-            <a:prstDash val="solid"/>
-          </a:ln>
-        </p:spPr>
-        <p:txBody>
-          <a:bodyPr xmlns:a="http://schemas.openxmlformats.org/drawingml/2006/main"/>
-          <a:lstStyle xmlns:a="http://schemas.openxmlformats.org/drawingml/2006/main"/>
-          <a:p xmlns:a="http://schemas.openxmlformats.org/drawingml/2006/main">
-            <a:pPr algn="l">
-              <a:defRPr sz="1350" b="1" i="0">
-                <a:solidFill>
-                  <a:srgbClr val="087B73"/>
-                </a:solidFill>
-              </a:defRPr>
-            </a:pPr>
-            <a:r>
-              <a:rPr sz="1350" b="1" i="0">
-                <a:solidFill>
-                  <a:srgbClr val="087B73"/>
-                </a:solidFill>
-              </a:rPr>
-              <a:t>-</a:t>
-            </a:r>
-          </a:p>
-        </p:txBody>
-      </p:sp>
-      <p:sp>
-        <p:nvSpPr>
-          <p:cNvPr id="8" name="">
-            <a:extLst xmlns:a="http://schemas.openxmlformats.org/drawingml/2006/main">
-              <a:ext uri="{FF2B5EF4-FFF2-40B4-BE49-F238E27FC236}">
-                <a16:creationId xmlns:a16="http://schemas.microsoft.com/office/drawing/2014/main" id="{0B7D87DF-9C7D-453A-A815-785CB010473F}"/>
-              </a:ext>
-            </a:extLst>
-          </p:cNvPr>
-          <p:cNvSpPr>
-            <a:spLocks xmlns:a="http://schemas.openxmlformats.org/drawingml/2006/main" noGrp="1"/>
-          </p:cNvSpPr>
-          <p:nvPr/>
-        </p:nvSpPr>
-        <p:spPr>
-          <a:xfrm xmlns:a="http://schemas.openxmlformats.org/drawingml/2006/main">
-            <a:off x="1466850" y="2476500"/>
-            <a:ext cx="3657600" cy="419100"/>
-          </a:xfrm>
-          <a:prstGeom xmlns:a="http://schemas.openxmlformats.org/drawingml/2006/main" prst="rect">
-            <a:avLst/>
-          </a:prstGeom>
-          <a:noFill xmlns:a="http://schemas.openxmlformats.org/drawingml/2006/main"/>
-          <a:ln xmlns:a="http://schemas.openxmlformats.org/drawingml/2006/main" w="0">
-            <a:noFill/>
-            <a:prstDash val="solid"/>
-          </a:ln>
-        </p:spPr>
-        <p:txBody>
-          <a:bodyPr xmlns:a="http://schemas.openxmlformats.org/drawingml/2006/main"/>
-          <a:lstStyle xmlns:a="http://schemas.openxmlformats.org/drawingml/2006/main"/>
-          <a:p xmlns:a="http://schemas.openxmlformats.org/drawingml/2006/main">
-            <a:pPr algn="l">
-              <a:defRPr sz="1350" b="0" i="0">
-                <a:solidFill>
-                  <a:srgbClr val="111827"/>
-                </a:solidFill>
-              </a:defRPr>
-            </a:pPr>
-            <a:r>
-              <a:rPr sz="1350" b="0" i="0">
-                <a:solidFill>
-                  <a:srgbClr val="111827"/>
-                </a:solidFill>
-              </a:rPr>
-              <a:t>The model and app worked, but the story was too product-summary focused.</a:t>
-            </a:r>
-          </a:p>
-        </p:txBody>
-      </p:sp>
-      <p:sp>
-        <p:nvSpPr>
-          <p:cNvPr id="9" name="">
-            <a:extLst xmlns:a="http://schemas.openxmlformats.org/drawingml/2006/main">
-              <a:ext uri="{FF2B5EF4-FFF2-40B4-BE49-F238E27FC236}">
-                <a16:creationId xmlns:a16="http://schemas.microsoft.com/office/drawing/2014/main" id="{F34933B3-FCAC-4030-BA2D-1817E20CD46B}"/>
-              </a:ext>
-            </a:extLst>
-          </p:cNvPr>
-          <p:cNvSpPr>
-            <a:spLocks xmlns:a="http://schemas.openxmlformats.org/drawingml/2006/main" noGrp="1"/>
-          </p:cNvSpPr>
-          <p:nvPr/>
-        </p:nvSpPr>
-        <p:spPr>
-          <a:xfrm xmlns:a="http://schemas.openxmlformats.org/drawingml/2006/main">
-            <a:off x="1219200" y="2895600"/>
-            <a:ext cx="171450" cy="228600"/>
-          </a:xfrm>
-          <a:prstGeom xmlns:a="http://schemas.openxmlformats.org/drawingml/2006/main" prst="rect">
-            <a:avLst/>
-          </a:prstGeom>
-          <a:noFill xmlns:a="http://schemas.openxmlformats.org/drawingml/2006/main"/>
-          <a:ln xmlns:a="http://schemas.openxmlformats.org/drawingml/2006/main" w="0">
-            <a:noFill/>
-            <a:prstDash val="solid"/>
-          </a:ln>
-        </p:spPr>
-        <p:txBody>
-          <a:bodyPr xmlns:a="http://schemas.openxmlformats.org/drawingml/2006/main"/>
-          <a:lstStyle xmlns:a="http://schemas.openxmlformats.org/drawingml/2006/main"/>
-          <a:p xmlns:a="http://schemas.openxmlformats.org/drawingml/2006/main">
-            <a:pPr algn="l">
-              <a:defRPr sz="1350" b="1" i="0">
-                <a:solidFill>
-                  <a:srgbClr val="087B73"/>
-                </a:solidFill>
-              </a:defRPr>
-            </a:pPr>
-            <a:r>
-              <a:rPr sz="1350" b="1" i="0">
-                <a:solidFill>
-                  <a:srgbClr val="087B73"/>
-                </a:solidFill>
-              </a:rPr>
-              <a:t>-</a:t>
-            </a:r>
-          </a:p>
-        </p:txBody>
-      </p:sp>
-      <p:sp>
-        <p:nvSpPr>
-          <p:cNvPr id="10" name="">
-            <a:extLst xmlns:a="http://schemas.openxmlformats.org/drawingml/2006/main">
-              <a:ext uri="{FF2B5EF4-FFF2-40B4-BE49-F238E27FC236}">
-                <a16:creationId xmlns:a16="http://schemas.microsoft.com/office/drawing/2014/main" id="{87CDF2F8-42DE-4CDA-816B-A41B0B5DE46D}"/>
-              </a:ext>
-            </a:extLst>
-          </p:cNvPr>
-          <p:cNvSpPr>
-            <a:spLocks xmlns:a="http://schemas.openxmlformats.org/drawingml/2006/main" noGrp="1"/>
-          </p:cNvSpPr>
-          <p:nvPr/>
-        </p:nvSpPr>
-        <p:spPr>
-          <a:xfrm xmlns:a="http://schemas.openxmlformats.org/drawingml/2006/main">
-            <a:off x="1466850" y="2895600"/>
-            <a:ext cx="3657600" cy="419100"/>
-          </a:xfrm>
-          <a:prstGeom xmlns:a="http://schemas.openxmlformats.org/drawingml/2006/main" prst="rect">
-            <a:avLst/>
-          </a:prstGeom>
-          <a:noFill xmlns:a="http://schemas.openxmlformats.org/drawingml/2006/main"/>
-          <a:ln xmlns:a="http://schemas.openxmlformats.org/drawingml/2006/main" w="0">
-            <a:noFill/>
-            <a:prstDash val="solid"/>
-          </a:ln>
-        </p:spPr>
-        <p:txBody>
-          <a:bodyPr xmlns:a="http://schemas.openxmlformats.org/drawingml/2006/main"/>
-          <a:lstStyle xmlns:a="http://schemas.openxmlformats.org/drawingml/2006/main"/>
-          <a:p xmlns:a="http://schemas.openxmlformats.org/drawingml/2006/main">
-            <a:pPr algn="l">
-              <a:defRPr sz="1350" b="0" i="0">
-                <a:solidFill>
-                  <a:srgbClr val="111827"/>
-                </a:solidFill>
-              </a:defRPr>
-            </a:pPr>
-            <a:r>
-              <a:rPr sz="1350" b="0" i="0">
-                <a:solidFill>
-                  <a:srgbClr val="111827"/>
-                </a:solidFill>
-              </a:rPr>
-              <a:t>Some app labels were too technical or looked like buttons.</a:t>
-            </a:r>
-          </a:p>
-        </p:txBody>
-      </p:sp>
-      <p:sp>
-        <p:nvSpPr>
-          <p:cNvPr id="11" name="">
-            <a:extLst xmlns:a="http://schemas.openxmlformats.org/drawingml/2006/main">
-              <a:ext uri="{FF2B5EF4-FFF2-40B4-BE49-F238E27FC236}">
-                <a16:creationId xmlns:a16="http://schemas.microsoft.com/office/drawing/2014/main" id="{C45AFFC1-B873-4976-9FF1-13D6D4083BAE}"/>
-              </a:ext>
-            </a:extLst>
-          </p:cNvPr>
-          <p:cNvSpPr>
-            <a:spLocks xmlns:a="http://schemas.openxmlformats.org/drawingml/2006/main" noGrp="1"/>
-          </p:cNvSpPr>
-          <p:nvPr/>
-        </p:nvSpPr>
-        <p:spPr>
-          <a:xfrm xmlns:a="http://schemas.openxmlformats.org/drawingml/2006/main">
-            <a:off x="1219200" y="3314700"/>
-            <a:ext cx="171450" cy="228600"/>
-          </a:xfrm>
-          <a:prstGeom xmlns:a="http://schemas.openxmlformats.org/drawingml/2006/main" prst="rect">
-            <a:avLst/>
-          </a:prstGeom>
-          <a:noFill xmlns:a="http://schemas.openxmlformats.org/drawingml/2006/main"/>
-          <a:ln xmlns:a="http://schemas.openxmlformats.org/drawingml/2006/main" w="0">
-            <a:noFill/>
-            <a:prstDash val="solid"/>
-          </a:ln>
-        </p:spPr>
-        <p:txBody>
-          <a:bodyPr xmlns:a="http://schemas.openxmlformats.org/drawingml/2006/main"/>
-          <a:lstStyle xmlns:a="http://schemas.openxmlformats.org/drawingml/2006/main"/>
-          <a:p xmlns:a="http://schemas.openxmlformats.org/drawingml/2006/main">
-            <a:pPr algn="l">
-              <a:defRPr sz="1350" b="1" i="0">
-                <a:solidFill>
-                  <a:srgbClr val="087B73"/>
-                </a:solidFill>
-              </a:defRPr>
-            </a:pPr>
-            <a:r>
-              <a:rPr sz="1350" b="1" i="0">
-                <a:solidFill>
-                  <a:srgbClr val="087B73"/>
-                </a:solidFill>
-              </a:rPr>
-              <a:t>-</a:t>
-            </a:r>
-          </a:p>
-        </p:txBody>
-      </p:sp>
-      <p:sp>
-        <p:nvSpPr>
-          <p:cNvPr id="12" name="">
-            <a:extLst xmlns:a="http://schemas.openxmlformats.org/drawingml/2006/main">
-              <a:ext uri="{FF2B5EF4-FFF2-40B4-BE49-F238E27FC236}">
-                <a16:creationId xmlns:a16="http://schemas.microsoft.com/office/drawing/2014/main" id="{1CCAAD9C-ED69-4FF9-A080-B7454726C0B6}"/>
-              </a:ext>
-            </a:extLst>
-          </p:cNvPr>
-          <p:cNvSpPr>
-            <a:spLocks xmlns:a="http://schemas.openxmlformats.org/drawingml/2006/main" noGrp="1"/>
-          </p:cNvSpPr>
-          <p:nvPr/>
-        </p:nvSpPr>
-        <p:spPr>
-          <a:xfrm xmlns:a="http://schemas.openxmlformats.org/drawingml/2006/main">
-            <a:off x="1466850" y="3314700"/>
-            <a:ext cx="3657600" cy="419100"/>
-          </a:xfrm>
-          <a:prstGeom xmlns:a="http://schemas.openxmlformats.org/drawingml/2006/main" prst="rect">
-            <a:avLst/>
-          </a:prstGeom>
-          <a:noFill xmlns:a="http://schemas.openxmlformats.org/drawingml/2006/main"/>
-          <a:ln xmlns:a="http://schemas.openxmlformats.org/drawingml/2006/main" w="0">
-            <a:noFill/>
-            <a:prstDash val="solid"/>
-          </a:ln>
-        </p:spPr>
-        <p:txBody>
-          <a:bodyPr xmlns:a="http://schemas.openxmlformats.org/drawingml/2006/main"/>
-          <a:lstStyle xmlns:a="http://schemas.openxmlformats.org/drawingml/2006/main"/>
-          <a:p xmlns:a="http://schemas.openxmlformats.org/drawingml/2006/main">
-            <a:pPr algn="l">
-              <a:defRPr sz="1350" b="0" i="0">
-                <a:solidFill>
-                  <a:srgbClr val="111827"/>
-                </a:solidFill>
-              </a:defRPr>
-            </a:pPr>
-            <a:r>
-              <a:rPr sz="1350" b="0" i="0">
-                <a:solidFill>
-                  <a:srgbClr val="111827"/>
-                </a:solidFill>
-              </a:rPr>
-              <a:t>The export report was not as reviewer-friendly as it should be.</a:t>
-            </a:r>
-          </a:p>
-        </p:txBody>
-      </p:sp>
-      <p:sp>
-        <p:nvSpPr>
-          <p:cNvPr id="13" name="">
-            <a:extLst xmlns:a="http://schemas.openxmlformats.org/drawingml/2006/main">
-              <a:ext uri="{FF2B5EF4-FFF2-40B4-BE49-F238E27FC236}">
-                <a16:creationId xmlns:a16="http://schemas.microsoft.com/office/drawing/2014/main" id="{652894F0-FB2C-4973-94C2-434D1B7779EF}"/>
-              </a:ext>
-            </a:extLst>
-          </p:cNvPr>
-          <p:cNvSpPr>
-            <a:spLocks xmlns:a="http://schemas.openxmlformats.org/drawingml/2006/main" noGrp="1"/>
-          </p:cNvSpPr>
-          <p:nvPr/>
-        </p:nvSpPr>
-        <p:spPr>
-          <a:xfrm xmlns:a="http://schemas.openxmlformats.org/drawingml/2006/main">
-            <a:off x="1219200" y="3733800"/>
-            <a:ext cx="171450" cy="228600"/>
-          </a:xfrm>
-          <a:prstGeom xmlns:a="http://schemas.openxmlformats.org/drawingml/2006/main" prst="rect">
-            <a:avLst/>
-          </a:prstGeom>
-          <a:noFill xmlns:a="http://schemas.openxmlformats.org/drawingml/2006/main"/>
-          <a:ln xmlns:a="http://schemas.openxmlformats.org/drawingml/2006/main" w="0">
-            <a:noFill/>
-            <a:prstDash val="solid"/>
-          </a:ln>
-        </p:spPr>
-        <p:txBody>
-          <a:bodyPr xmlns:a="http://schemas.openxmlformats.org/drawingml/2006/main"/>
-          <a:lstStyle xmlns:a="http://schemas.openxmlformats.org/drawingml/2006/main"/>
-          <a:p xmlns:a="http://schemas.openxmlformats.org/drawingml/2006/main">
-            <a:pPr algn="l">
-              <a:defRPr sz="1350" b="1" i="0">
-                <a:solidFill>
-                  <a:srgbClr val="087B73"/>
-                </a:solidFill>
-              </a:defRPr>
-            </a:pPr>
-            <a:r>
-              <a:rPr sz="1350" b="1" i="0">
-                <a:solidFill>
-                  <a:srgbClr val="087B73"/>
-                </a:solidFill>
-              </a:rPr>
-              <a:t>-</a:t>
-            </a:r>
-          </a:p>
-        </p:txBody>
-      </p:sp>
-      <p:sp>
-        <p:nvSpPr>
-          <p:cNvPr id="14" name="">
-            <a:extLst xmlns:a="http://schemas.openxmlformats.org/drawingml/2006/main">
-              <a:ext uri="{FF2B5EF4-FFF2-40B4-BE49-F238E27FC236}">
-                <a16:creationId xmlns:a16="http://schemas.microsoft.com/office/drawing/2014/main" id="{B283CF40-0E7B-455B-9AD7-8B0796049CD1}"/>
-              </a:ext>
-            </a:extLst>
-          </p:cNvPr>
-          <p:cNvSpPr>
-            <a:spLocks xmlns:a="http://schemas.openxmlformats.org/drawingml/2006/main" noGrp="1"/>
-          </p:cNvSpPr>
-          <p:nvPr/>
-        </p:nvSpPr>
-        <p:spPr>
-          <a:xfrm xmlns:a="http://schemas.openxmlformats.org/drawingml/2006/main">
-            <a:off x="1466850" y="3733800"/>
-            <a:ext cx="3657600" cy="419100"/>
-          </a:xfrm>
-          <a:prstGeom xmlns:a="http://schemas.openxmlformats.org/drawingml/2006/main" prst="rect">
-            <a:avLst/>
-          </a:prstGeom>
-          <a:noFill xmlns:a="http://schemas.openxmlformats.org/drawingml/2006/main"/>
-          <a:ln xmlns:a="http://schemas.openxmlformats.org/drawingml/2006/main" w="0">
-            <a:noFill/>
-            <a:prstDash val="solid"/>
-          </a:ln>
-        </p:spPr>
-        <p:txBody>
-          <a:bodyPr xmlns:a="http://schemas.openxmlformats.org/drawingml/2006/main"/>
-          <a:lstStyle xmlns:a="http://schemas.openxmlformats.org/drawingml/2006/main"/>
-          <a:p xmlns:a="http://schemas.openxmlformats.org/drawingml/2006/main">
-            <a:pPr algn="l">
-              <a:defRPr sz="1350" b="0" i="0">
-                <a:solidFill>
-                  <a:srgbClr val="111827"/>
-                </a:solidFill>
-              </a:defRPr>
-            </a:pPr>
-            <a:r>
-              <a:rPr sz="1350" b="0" i="0">
-                <a:solidFill>
-                  <a:srgbClr val="111827"/>
-                </a:solidFill>
-              </a:rPr>
-              <a:t>The first PPT did not clearly explain the journey.</a:t>
-            </a:r>
-          </a:p>
-        </p:txBody>
-      </p:sp>
-      <p:sp>
-        <p:nvSpPr>
-          <p:cNvPr id="15" name="">
-            <a:extLst xmlns:a="http://schemas.openxmlformats.org/drawingml/2006/main">
-              <a:ext uri="{FF2B5EF4-FFF2-40B4-BE49-F238E27FC236}">
-                <a16:creationId xmlns:a16="http://schemas.microsoft.com/office/drawing/2014/main" id="{E0080286-402D-4C59-A1CD-A9B35F1181C5}"/>
-              </a:ext>
-            </a:extLst>
-          </p:cNvPr>
-          <p:cNvSpPr>
-            <a:spLocks xmlns:a="http://schemas.openxmlformats.org/drawingml/2006/main" noGrp="1"/>
-          </p:cNvSpPr>
-          <p:nvPr/>
-        </p:nvSpPr>
-        <p:spPr>
-          <a:xfrm xmlns:a="http://schemas.openxmlformats.org/drawingml/2006/main">
-            <a:off x="6515100" y="1619250"/>
-            <a:ext cx="4762500" cy="3638550"/>
+          <p:cNvPr id="6" name="roadmap-card-accent-1">
+            <a:extLst xmlns:a="http://schemas.openxmlformats.org/drawingml/2006/main">
+              <a:ext uri="{FF2B5EF4-FFF2-40B4-BE49-F238E27FC236}">
+                <a16:creationId xmlns:a16="http://schemas.microsoft.com/office/drawing/2014/main" id="{F6FEC6FF-54A6-431B-A51E-E31263536C05}"/>
+              </a:ext>
+            </a:extLst>
+          </p:cNvPr>
+          <p:cNvSpPr>
+            <a:spLocks xmlns:a="http://schemas.openxmlformats.org/drawingml/2006/main" noGrp="1"/>
+          </p:cNvSpPr>
+          <p:nvPr/>
+        </p:nvSpPr>
+        <p:spPr>
+          <a:xfrm xmlns:a="http://schemas.openxmlformats.org/drawingml/2006/main">
+            <a:off x="762000" y="1485900"/>
+            <a:ext cx="3333750" cy="57150"/>
+          </a:xfrm>
+          <a:prstGeom xmlns:a="http://schemas.openxmlformats.org/drawingml/2006/main" prst="rect">
+            <a:avLst/>
+          </a:prstGeom>
+          <a:solidFill xmlns:a="http://schemas.openxmlformats.org/drawingml/2006/main">
+            <a:srgbClr val="00786F"/>
+          </a:solidFill>
+          <a:ln xmlns:a="http://schemas.openxmlformats.org/drawingml/2006/main" w="0">
+            <a:solidFill>
+              <a:srgbClr val="00786F"/>
+            </a:solidFill>
+            <a:prstDash val="solid"/>
+          </a:ln>
+        </p:spPr>
+      </p:sp>
+      <p:sp>
+        <p:nvSpPr>
+          <p:cNvPr id="7" name="roadmap-card-label-1">
+            <a:extLst xmlns:a="http://schemas.openxmlformats.org/drawingml/2006/main">
+              <a:ext uri="{FF2B5EF4-FFF2-40B4-BE49-F238E27FC236}">
+                <a16:creationId xmlns:a16="http://schemas.microsoft.com/office/drawing/2014/main" id="{025D9DA1-304D-42A9-8EB5-4CE59094F2A0}"/>
+              </a:ext>
+            </a:extLst>
+          </p:cNvPr>
+          <p:cNvSpPr>
+            <a:spLocks xmlns:a="http://schemas.openxmlformats.org/drawingml/2006/main" noGrp="1"/>
+          </p:cNvSpPr>
+          <p:nvPr/>
+        </p:nvSpPr>
+        <p:spPr>
+          <a:xfrm xmlns:a="http://schemas.openxmlformats.org/drawingml/2006/main">
+            <a:off x="952500" y="1695450"/>
+            <a:ext cx="2952750" cy="228600"/>
+          </a:xfrm>
+          <a:prstGeom xmlns:a="http://schemas.openxmlformats.org/drawingml/2006/main" prst="rect">
+            <a:avLst/>
+          </a:prstGeom>
+          <a:noFill xmlns:a="http://schemas.openxmlformats.org/drawingml/2006/main"/>
+          <a:ln xmlns:a="http://schemas.openxmlformats.org/drawingml/2006/main" w="0">
+            <a:noFill/>
+            <a:prstDash val="solid"/>
+          </a:ln>
+        </p:spPr>
+        <p:txBody>
+          <a:bodyPr xmlns:a="http://schemas.openxmlformats.org/drawingml/2006/main"/>
+          <a:lstStyle xmlns:a="http://schemas.openxmlformats.org/drawingml/2006/main"/>
+          <a:p xmlns:a="http://schemas.openxmlformats.org/drawingml/2006/main">
+            <a:pPr>
+              <a:defRPr sz="900" b="1">
+                <a:solidFill>
+                  <a:srgbClr val="00786F"/>
+                </a:solidFill>
+              </a:defRPr>
+            </a:pPr>
+            <a:r>
+              <a:rPr sz="900" b="1">
+                <a:solidFill>
+                  <a:srgbClr val="00786F"/>
+                </a:solidFill>
+              </a:rPr>
+              <a:t>PROTOTYPE NOW</a:t>
+            </a:r>
+          </a:p>
+        </p:txBody>
+      </p:sp>
+      <p:sp>
+        <p:nvSpPr>
+          <p:cNvPr id="8" name="roadmap-card-title-1">
+            <a:extLst xmlns:a="http://schemas.openxmlformats.org/drawingml/2006/main">
+              <a:ext uri="{FF2B5EF4-FFF2-40B4-BE49-F238E27FC236}">
+                <a16:creationId xmlns:a16="http://schemas.microsoft.com/office/drawing/2014/main" id="{203F400E-613B-43C5-9ED4-3B797F3D5E2B}"/>
+              </a:ext>
+            </a:extLst>
+          </p:cNvPr>
+          <p:cNvSpPr>
+            <a:spLocks xmlns:a="http://schemas.openxmlformats.org/drawingml/2006/main" noGrp="1"/>
+          </p:cNvSpPr>
+          <p:nvPr/>
+        </p:nvSpPr>
+        <p:spPr>
+          <a:xfrm xmlns:a="http://schemas.openxmlformats.org/drawingml/2006/main">
+            <a:off x="952500" y="1962150"/>
+            <a:ext cx="2952750" cy="361950"/>
+          </a:xfrm>
+          <a:prstGeom xmlns:a="http://schemas.openxmlformats.org/drawingml/2006/main" prst="rect">
+            <a:avLst/>
+          </a:prstGeom>
+          <a:noFill xmlns:a="http://schemas.openxmlformats.org/drawingml/2006/main"/>
+          <a:ln xmlns:a="http://schemas.openxmlformats.org/drawingml/2006/main" w="0">
+            <a:noFill/>
+            <a:prstDash val="solid"/>
+          </a:ln>
+        </p:spPr>
+        <p:txBody>
+          <a:bodyPr xmlns:a="http://schemas.openxmlformats.org/drawingml/2006/main"/>
+          <a:lstStyle xmlns:a="http://schemas.openxmlformats.org/drawingml/2006/main"/>
+          <a:p xmlns:a="http://schemas.openxmlformats.org/drawingml/2006/main">
+            <a:pPr>
+              <a:defRPr sz="1575" b="1">
+                <a:solidFill>
+                  <a:srgbClr val="020618"/>
+                </a:solidFill>
+              </a:defRPr>
+            </a:pPr>
+            <a:r>
+              <a:rPr sz="1575" b="1">
+                <a:solidFill>
+                  <a:srgbClr val="020618"/>
+                </a:solidFill>
+              </a:rPr>
+              <a:t>Working control tower</a:t>
+            </a:r>
+          </a:p>
+        </p:txBody>
+      </p:sp>
+      <p:sp>
+        <p:nvSpPr>
+          <p:cNvPr id="9" name="roadmap-card-copy-1">
+            <a:extLst xmlns:a="http://schemas.openxmlformats.org/drawingml/2006/main">
+              <a:ext uri="{FF2B5EF4-FFF2-40B4-BE49-F238E27FC236}">
+                <a16:creationId xmlns:a16="http://schemas.microsoft.com/office/drawing/2014/main" id="{CC745F8E-AD23-42B7-B00A-11F9272C2888}"/>
+              </a:ext>
+            </a:extLst>
+          </p:cNvPr>
+          <p:cNvSpPr>
+            <a:spLocks xmlns:a="http://schemas.openxmlformats.org/drawingml/2006/main" noGrp="1"/>
+          </p:cNvSpPr>
+          <p:nvPr/>
+        </p:nvSpPr>
+        <p:spPr>
+          <a:xfrm xmlns:a="http://schemas.openxmlformats.org/drawingml/2006/main">
+            <a:off x="952500" y="2400300"/>
+            <a:ext cx="2952750" cy="647700"/>
+          </a:xfrm>
+          <a:prstGeom xmlns:a="http://schemas.openxmlformats.org/drawingml/2006/main" prst="rect">
+            <a:avLst/>
+          </a:prstGeom>
+          <a:noFill xmlns:a="http://schemas.openxmlformats.org/drawingml/2006/main"/>
+          <a:ln xmlns:a="http://schemas.openxmlformats.org/drawingml/2006/main" w="0">
+            <a:noFill/>
+            <a:prstDash val="solid"/>
+          </a:ln>
+        </p:spPr>
+        <p:txBody>
+          <a:bodyPr xmlns:a="http://schemas.openxmlformats.org/drawingml/2006/main"/>
+          <a:lstStyle xmlns:a="http://schemas.openxmlformats.org/drawingml/2006/main"/>
+          <a:p xmlns:a="http://schemas.openxmlformats.org/drawingml/2006/main">
+            <a:pPr>
+              <a:defRPr sz="1125">
+                <a:solidFill>
+                  <a:srgbClr val="45556C"/>
+                </a:solidFill>
+              </a:defRPr>
+            </a:pPr>
+            <a:r>
+              <a:rPr sz="1125">
+                <a:solidFill>
+                  <a:srgbClr val="45556C"/>
+                </a:solidFill>
+              </a:rPr>
+              <a:t>Synthetic test data, risk tiers, investigator queue, local reason codes, threshold economics, CSV case export, and governance evidence.</a:t>
+            </a:r>
+          </a:p>
+        </p:txBody>
+      </p:sp>
+      <p:sp>
+        <p:nvSpPr>
+          <p:cNvPr id="10" name="roadmap-card-2">
+            <a:extLst xmlns:a="http://schemas.openxmlformats.org/drawingml/2006/main">
+              <a:ext uri="{FF2B5EF4-FFF2-40B4-BE49-F238E27FC236}">
+                <a16:creationId xmlns:a16="http://schemas.microsoft.com/office/drawing/2014/main" id="{4CE2F0FE-9780-47F0-BDB1-E0D85580C24A}"/>
+              </a:ext>
+            </a:extLst>
+          </p:cNvPr>
+          <p:cNvSpPr>
+            <a:spLocks xmlns:a="http://schemas.openxmlformats.org/drawingml/2006/main" noGrp="1"/>
+          </p:cNvSpPr>
+          <p:nvPr/>
+        </p:nvSpPr>
+        <p:spPr>
+          <a:xfrm xmlns:a="http://schemas.openxmlformats.org/drawingml/2006/main">
+            <a:off x="4429125" y="1485900"/>
+            <a:ext cx="3333750" cy="1714500"/>
           </a:xfrm>
           <a:prstGeom xmlns:a="http://schemas.openxmlformats.org/drawingml/2006/main" prst="roundRect">
             <a:avLst>
-              <a:gd name="adj" fmla="val 2094"/>
+              <a:gd name="adj" fmla="val 4444"/>
             </a:avLst>
           </a:prstGeom>
           <a:solidFill xmlns:a="http://schemas.openxmlformats.org/drawingml/2006/main">
-            <a:srgbClr val="DFF3EF"/>
+            <a:srgbClr val="FFFFFF"/>
           </a:solidFill>
           <a:ln xmlns:a="http://schemas.openxmlformats.org/drawingml/2006/main" w="9525">
             <a:solidFill>
-              <a:srgbClr val="CBDAD7"/>
+              <a:srgbClr val="E2E8F0"/>
             </a:solidFill>
             <a:prstDash val="solid"/>
           </a:ln>
@@ -4704,472 +4526,1183 @@
       </p:sp>
       <p:sp>
         <p:nvSpPr>
-          <p:cNvPr id="16" name="">
-            <a:extLst xmlns:a="http://schemas.openxmlformats.org/drawingml/2006/main">
-              <a:ext uri="{FF2B5EF4-FFF2-40B4-BE49-F238E27FC236}">
-                <a16:creationId xmlns:a16="http://schemas.microsoft.com/office/drawing/2014/main" id="{3742BC06-EEF9-4CFC-9F8A-05E4D4D77C85}"/>
-              </a:ext>
-            </a:extLst>
-          </p:cNvPr>
-          <p:cNvSpPr>
-            <a:spLocks xmlns:a="http://schemas.openxmlformats.org/drawingml/2006/main" noGrp="1"/>
-          </p:cNvSpPr>
-          <p:nvPr/>
-        </p:nvSpPr>
-        <p:spPr>
-          <a:xfrm xmlns:a="http://schemas.openxmlformats.org/drawingml/2006/main">
-            <a:off x="6800850" y="1924050"/>
-            <a:ext cx="3810000" cy="285750"/>
-          </a:xfrm>
-          <a:prstGeom xmlns:a="http://schemas.openxmlformats.org/drawingml/2006/main" prst="rect">
-            <a:avLst/>
-          </a:prstGeom>
-          <a:noFill xmlns:a="http://schemas.openxmlformats.org/drawingml/2006/main"/>
-          <a:ln xmlns:a="http://schemas.openxmlformats.org/drawingml/2006/main" w="0">
-            <a:noFill/>
-            <a:prstDash val="solid"/>
-          </a:ln>
-        </p:spPr>
-        <p:txBody>
-          <a:bodyPr xmlns:a="http://schemas.openxmlformats.org/drawingml/2006/main"/>
-          <a:lstStyle xmlns:a="http://schemas.openxmlformats.org/drawingml/2006/main"/>
-          <a:p xmlns:a="http://schemas.openxmlformats.org/drawingml/2006/main">
-            <a:pPr algn="l">
-              <a:defRPr sz="1875" b="1" i="0">
-                <a:solidFill>
-                  <a:srgbClr val="064E49"/>
-                </a:solidFill>
-              </a:defRPr>
-            </a:pPr>
-            <a:r>
-              <a:rPr sz="1875" b="1" i="0">
-                <a:solidFill>
-                  <a:srgbClr val="064E49"/>
-                </a:solidFill>
-              </a:rPr>
-              <a:t>After feedback</a:t>
-            </a:r>
-          </a:p>
-        </p:txBody>
-      </p:sp>
-      <p:sp>
-        <p:nvSpPr>
-          <p:cNvPr id="17" name="">
-            <a:extLst xmlns:a="http://schemas.openxmlformats.org/drawingml/2006/main">
-              <a:ext uri="{FF2B5EF4-FFF2-40B4-BE49-F238E27FC236}">
-                <a16:creationId xmlns:a16="http://schemas.microsoft.com/office/drawing/2014/main" id="{E356636E-6F4A-4799-AF8C-A9EACB4B19CC}"/>
-              </a:ext>
-            </a:extLst>
-          </p:cNvPr>
-          <p:cNvSpPr>
-            <a:spLocks xmlns:a="http://schemas.openxmlformats.org/drawingml/2006/main" noGrp="1"/>
-          </p:cNvSpPr>
-          <p:nvPr/>
-        </p:nvSpPr>
-        <p:spPr>
-          <a:xfrm xmlns:a="http://schemas.openxmlformats.org/drawingml/2006/main">
-            <a:off x="6819900" y="2476500"/>
-            <a:ext cx="171450" cy="228600"/>
-          </a:xfrm>
-          <a:prstGeom xmlns:a="http://schemas.openxmlformats.org/drawingml/2006/main" prst="rect">
-            <a:avLst/>
-          </a:prstGeom>
-          <a:noFill xmlns:a="http://schemas.openxmlformats.org/drawingml/2006/main"/>
-          <a:ln xmlns:a="http://schemas.openxmlformats.org/drawingml/2006/main" w="0">
-            <a:noFill/>
-            <a:prstDash val="solid"/>
-          </a:ln>
-        </p:spPr>
-        <p:txBody>
-          <a:bodyPr xmlns:a="http://schemas.openxmlformats.org/drawingml/2006/main"/>
-          <a:lstStyle xmlns:a="http://schemas.openxmlformats.org/drawingml/2006/main"/>
-          <a:p xmlns:a="http://schemas.openxmlformats.org/drawingml/2006/main">
-            <a:pPr algn="l">
-              <a:defRPr sz="1350" b="1" i="0">
-                <a:solidFill>
-                  <a:srgbClr val="087B73"/>
-                </a:solidFill>
-              </a:defRPr>
-            </a:pPr>
-            <a:r>
-              <a:rPr sz="1350" b="1" i="0">
-                <a:solidFill>
-                  <a:srgbClr val="087B73"/>
-                </a:solidFill>
-              </a:rPr>
-              <a:t>-</a:t>
-            </a:r>
-          </a:p>
-        </p:txBody>
-      </p:sp>
-      <p:sp>
-        <p:nvSpPr>
-          <p:cNvPr id="18" name="">
-            <a:extLst xmlns:a="http://schemas.openxmlformats.org/drawingml/2006/main">
-              <a:ext uri="{FF2B5EF4-FFF2-40B4-BE49-F238E27FC236}">
-                <a16:creationId xmlns:a16="http://schemas.microsoft.com/office/drawing/2014/main" id="{E7DCD24D-F9A0-4EFB-8774-BAC7DE9E485F}"/>
-              </a:ext>
-            </a:extLst>
-          </p:cNvPr>
-          <p:cNvSpPr>
-            <a:spLocks xmlns:a="http://schemas.openxmlformats.org/drawingml/2006/main" noGrp="1"/>
-          </p:cNvSpPr>
-          <p:nvPr/>
-        </p:nvSpPr>
-        <p:spPr>
-          <a:xfrm xmlns:a="http://schemas.openxmlformats.org/drawingml/2006/main">
-            <a:off x="7067550" y="2476500"/>
-            <a:ext cx="3657600" cy="419100"/>
-          </a:xfrm>
-          <a:prstGeom xmlns:a="http://schemas.openxmlformats.org/drawingml/2006/main" prst="rect">
-            <a:avLst/>
-          </a:prstGeom>
-          <a:noFill xmlns:a="http://schemas.openxmlformats.org/drawingml/2006/main"/>
-          <a:ln xmlns:a="http://schemas.openxmlformats.org/drawingml/2006/main" w="0">
-            <a:noFill/>
-            <a:prstDash val="solid"/>
-          </a:ln>
-        </p:spPr>
-        <p:txBody>
-          <a:bodyPr xmlns:a="http://schemas.openxmlformats.org/drawingml/2006/main"/>
-          <a:lstStyle xmlns:a="http://schemas.openxmlformats.org/drawingml/2006/main"/>
-          <a:p xmlns:a="http://schemas.openxmlformats.org/drawingml/2006/main">
-            <a:pPr algn="l">
-              <a:defRPr sz="1350" b="0" i="0">
-                <a:solidFill>
-                  <a:srgbClr val="111827"/>
-                </a:solidFill>
-              </a:defRPr>
-            </a:pPr>
-            <a:r>
-              <a:rPr sz="1350" b="0" i="0">
-                <a:solidFill>
-                  <a:srgbClr val="111827"/>
-                </a:solidFill>
-              </a:rPr>
-              <a:t>Cleaner app wording and stronger analyst layout</a:t>
-            </a:r>
-          </a:p>
-        </p:txBody>
-      </p:sp>
-      <p:sp>
-        <p:nvSpPr>
-          <p:cNvPr id="19" name="">
-            <a:extLst xmlns:a="http://schemas.openxmlformats.org/drawingml/2006/main">
-              <a:ext uri="{FF2B5EF4-FFF2-40B4-BE49-F238E27FC236}">
-                <a16:creationId xmlns:a16="http://schemas.microsoft.com/office/drawing/2014/main" id="{CCBE99CD-3486-41CA-8870-410F7DE459F7}"/>
-              </a:ext>
-            </a:extLst>
-          </p:cNvPr>
-          <p:cNvSpPr>
-            <a:spLocks xmlns:a="http://schemas.openxmlformats.org/drawingml/2006/main" noGrp="1"/>
-          </p:cNvSpPr>
-          <p:nvPr/>
-        </p:nvSpPr>
-        <p:spPr>
-          <a:xfrm xmlns:a="http://schemas.openxmlformats.org/drawingml/2006/main">
-            <a:off x="6819900" y="2895600"/>
-            <a:ext cx="171450" cy="228600"/>
-          </a:xfrm>
-          <a:prstGeom xmlns:a="http://schemas.openxmlformats.org/drawingml/2006/main" prst="rect">
-            <a:avLst/>
-          </a:prstGeom>
-          <a:noFill xmlns:a="http://schemas.openxmlformats.org/drawingml/2006/main"/>
-          <a:ln xmlns:a="http://schemas.openxmlformats.org/drawingml/2006/main" w="0">
-            <a:noFill/>
-            <a:prstDash val="solid"/>
-          </a:ln>
-        </p:spPr>
-        <p:txBody>
-          <a:bodyPr xmlns:a="http://schemas.openxmlformats.org/drawingml/2006/main"/>
-          <a:lstStyle xmlns:a="http://schemas.openxmlformats.org/drawingml/2006/main"/>
-          <a:p xmlns:a="http://schemas.openxmlformats.org/drawingml/2006/main">
-            <a:pPr algn="l">
-              <a:defRPr sz="1350" b="1" i="0">
-                <a:solidFill>
-                  <a:srgbClr val="087B73"/>
-                </a:solidFill>
-              </a:defRPr>
-            </a:pPr>
-            <a:r>
-              <a:rPr sz="1350" b="1" i="0">
-                <a:solidFill>
-                  <a:srgbClr val="087B73"/>
-                </a:solidFill>
-              </a:rPr>
-              <a:t>-</a:t>
-            </a:r>
-          </a:p>
-        </p:txBody>
-      </p:sp>
-      <p:sp>
-        <p:nvSpPr>
-          <p:cNvPr id="20" name="">
-            <a:extLst xmlns:a="http://schemas.openxmlformats.org/drawingml/2006/main">
-              <a:ext uri="{FF2B5EF4-FFF2-40B4-BE49-F238E27FC236}">
-                <a16:creationId xmlns:a16="http://schemas.microsoft.com/office/drawing/2014/main" id="{4DF0AC29-43BF-4D2B-BCCC-92589DD48A82}"/>
-              </a:ext>
-            </a:extLst>
-          </p:cNvPr>
-          <p:cNvSpPr>
-            <a:spLocks xmlns:a="http://schemas.openxmlformats.org/drawingml/2006/main" noGrp="1"/>
-          </p:cNvSpPr>
-          <p:nvPr/>
-        </p:nvSpPr>
-        <p:spPr>
-          <a:xfrm xmlns:a="http://schemas.openxmlformats.org/drawingml/2006/main">
-            <a:off x="7067550" y="2895600"/>
-            <a:ext cx="3657600" cy="419100"/>
-          </a:xfrm>
-          <a:prstGeom xmlns:a="http://schemas.openxmlformats.org/drawingml/2006/main" prst="rect">
-            <a:avLst/>
-          </a:prstGeom>
-          <a:noFill xmlns:a="http://schemas.openxmlformats.org/drawingml/2006/main"/>
-          <a:ln xmlns:a="http://schemas.openxmlformats.org/drawingml/2006/main" w="0">
-            <a:noFill/>
-            <a:prstDash val="solid"/>
-          </a:ln>
-        </p:spPr>
-        <p:txBody>
-          <a:bodyPr xmlns:a="http://schemas.openxmlformats.org/drawingml/2006/main"/>
-          <a:lstStyle xmlns:a="http://schemas.openxmlformats.org/drawingml/2006/main"/>
-          <a:p xmlns:a="http://schemas.openxmlformats.org/drawingml/2006/main">
-            <a:pPr algn="l">
-              <a:defRPr sz="1350" b="0" i="0">
-                <a:solidFill>
-                  <a:srgbClr val="111827"/>
-                </a:solidFill>
-              </a:defRPr>
-            </a:pPr>
-            <a:r>
-              <a:rPr sz="1350" b="0" i="0">
-                <a:solidFill>
-                  <a:srgbClr val="111827"/>
-                </a:solidFill>
-              </a:rPr>
-              <a:t>Transaction search, drilldown, and CSV case export</a:t>
-            </a:r>
-          </a:p>
-        </p:txBody>
-      </p:sp>
-      <p:sp>
-        <p:nvSpPr>
-          <p:cNvPr id="21" name="">
-            <a:extLst xmlns:a="http://schemas.openxmlformats.org/drawingml/2006/main">
-              <a:ext uri="{FF2B5EF4-FFF2-40B4-BE49-F238E27FC236}">
-                <a16:creationId xmlns:a16="http://schemas.microsoft.com/office/drawing/2014/main" id="{086A8344-72BD-47F6-ABD8-00F3E10DCEAB}"/>
-              </a:ext>
-            </a:extLst>
-          </p:cNvPr>
-          <p:cNvSpPr>
-            <a:spLocks xmlns:a="http://schemas.openxmlformats.org/drawingml/2006/main" noGrp="1"/>
-          </p:cNvSpPr>
-          <p:nvPr/>
-        </p:nvSpPr>
-        <p:spPr>
-          <a:xfrm xmlns:a="http://schemas.openxmlformats.org/drawingml/2006/main">
-            <a:off x="6819900" y="3314700"/>
-            <a:ext cx="171450" cy="228600"/>
-          </a:xfrm>
-          <a:prstGeom xmlns:a="http://schemas.openxmlformats.org/drawingml/2006/main" prst="rect">
-            <a:avLst/>
-          </a:prstGeom>
-          <a:noFill xmlns:a="http://schemas.openxmlformats.org/drawingml/2006/main"/>
-          <a:ln xmlns:a="http://schemas.openxmlformats.org/drawingml/2006/main" w="0">
-            <a:noFill/>
-            <a:prstDash val="solid"/>
-          </a:ln>
-        </p:spPr>
-        <p:txBody>
-          <a:bodyPr xmlns:a="http://schemas.openxmlformats.org/drawingml/2006/main"/>
-          <a:lstStyle xmlns:a="http://schemas.openxmlformats.org/drawingml/2006/main"/>
-          <a:p xmlns:a="http://schemas.openxmlformats.org/drawingml/2006/main">
-            <a:pPr algn="l">
-              <a:defRPr sz="1350" b="1" i="0">
-                <a:solidFill>
-                  <a:srgbClr val="087B73"/>
-                </a:solidFill>
-              </a:defRPr>
-            </a:pPr>
-            <a:r>
-              <a:rPr sz="1350" b="1" i="0">
-                <a:solidFill>
-                  <a:srgbClr val="087B73"/>
-                </a:solidFill>
-              </a:rPr>
-              <a:t>-</a:t>
-            </a:r>
-          </a:p>
-        </p:txBody>
-      </p:sp>
-      <p:sp>
-        <p:nvSpPr>
-          <p:cNvPr id="22" name="">
-            <a:extLst xmlns:a="http://schemas.openxmlformats.org/drawingml/2006/main">
-              <a:ext uri="{FF2B5EF4-FFF2-40B4-BE49-F238E27FC236}">
-                <a16:creationId xmlns:a16="http://schemas.microsoft.com/office/drawing/2014/main" id="{E28317E0-4246-4C81-BA89-F36EE5CE0632}"/>
-              </a:ext>
-            </a:extLst>
-          </p:cNvPr>
-          <p:cNvSpPr>
-            <a:spLocks xmlns:a="http://schemas.openxmlformats.org/drawingml/2006/main" noGrp="1"/>
-          </p:cNvSpPr>
-          <p:nvPr/>
-        </p:nvSpPr>
-        <p:spPr>
-          <a:xfrm xmlns:a="http://schemas.openxmlformats.org/drawingml/2006/main">
-            <a:off x="7067550" y="3314700"/>
-            <a:ext cx="3657600" cy="419100"/>
-          </a:xfrm>
-          <a:prstGeom xmlns:a="http://schemas.openxmlformats.org/drawingml/2006/main" prst="rect">
-            <a:avLst/>
-          </a:prstGeom>
-          <a:noFill xmlns:a="http://schemas.openxmlformats.org/drawingml/2006/main"/>
-          <a:ln xmlns:a="http://schemas.openxmlformats.org/drawingml/2006/main" w="0">
-            <a:noFill/>
-            <a:prstDash val="solid"/>
-          </a:ln>
-        </p:spPr>
-        <p:txBody>
-          <a:bodyPr xmlns:a="http://schemas.openxmlformats.org/drawingml/2006/main"/>
-          <a:lstStyle xmlns:a="http://schemas.openxmlformats.org/drawingml/2006/main"/>
-          <a:p xmlns:a="http://schemas.openxmlformats.org/drawingml/2006/main">
-            <a:pPr algn="l">
-              <a:defRPr sz="1350" b="0" i="0">
-                <a:solidFill>
-                  <a:srgbClr val="111827"/>
-                </a:solidFill>
-              </a:defRPr>
-            </a:pPr>
-            <a:r>
-              <a:rPr sz="1350" b="0" i="0">
-                <a:solidFill>
-                  <a:srgbClr val="111827"/>
-                </a:solidFill>
-              </a:rPr>
-              <a:t>Presenter Mode for explaining how each section was built</a:t>
-            </a:r>
-          </a:p>
-        </p:txBody>
-      </p:sp>
-      <p:sp>
-        <p:nvSpPr>
-          <p:cNvPr id="23" name="">
-            <a:extLst xmlns:a="http://schemas.openxmlformats.org/drawingml/2006/main">
-              <a:ext uri="{FF2B5EF4-FFF2-40B4-BE49-F238E27FC236}">
-                <a16:creationId xmlns:a16="http://schemas.microsoft.com/office/drawing/2014/main" id="{F12B15FF-1DE0-426F-9B2D-7C2CF454776D}"/>
-              </a:ext>
-            </a:extLst>
-          </p:cNvPr>
-          <p:cNvSpPr>
-            <a:spLocks xmlns:a="http://schemas.openxmlformats.org/drawingml/2006/main" noGrp="1"/>
-          </p:cNvSpPr>
-          <p:nvPr/>
-        </p:nvSpPr>
-        <p:spPr>
-          <a:xfrm xmlns:a="http://schemas.openxmlformats.org/drawingml/2006/main">
-            <a:off x="6819900" y="3733800"/>
-            <a:ext cx="171450" cy="228600"/>
-          </a:xfrm>
-          <a:prstGeom xmlns:a="http://schemas.openxmlformats.org/drawingml/2006/main" prst="rect">
-            <a:avLst/>
-          </a:prstGeom>
-          <a:noFill xmlns:a="http://schemas.openxmlformats.org/drawingml/2006/main"/>
-          <a:ln xmlns:a="http://schemas.openxmlformats.org/drawingml/2006/main" w="0">
-            <a:noFill/>
-            <a:prstDash val="solid"/>
-          </a:ln>
-        </p:spPr>
-        <p:txBody>
-          <a:bodyPr xmlns:a="http://schemas.openxmlformats.org/drawingml/2006/main"/>
-          <a:lstStyle xmlns:a="http://schemas.openxmlformats.org/drawingml/2006/main"/>
-          <a:p xmlns:a="http://schemas.openxmlformats.org/drawingml/2006/main">
-            <a:pPr algn="l">
-              <a:defRPr sz="1350" b="1" i="0">
-                <a:solidFill>
-                  <a:srgbClr val="087B73"/>
-                </a:solidFill>
-              </a:defRPr>
-            </a:pPr>
-            <a:r>
-              <a:rPr sz="1350" b="1" i="0">
-                <a:solidFill>
-                  <a:srgbClr val="087B73"/>
-                </a:solidFill>
-              </a:rPr>
-              <a:t>-</a:t>
-            </a:r>
-          </a:p>
-        </p:txBody>
-      </p:sp>
-      <p:sp>
-        <p:nvSpPr>
-          <p:cNvPr id="24" name="">
-            <a:extLst xmlns:a="http://schemas.openxmlformats.org/drawingml/2006/main">
-              <a:ext uri="{FF2B5EF4-FFF2-40B4-BE49-F238E27FC236}">
-                <a16:creationId xmlns:a16="http://schemas.microsoft.com/office/drawing/2014/main" id="{7BDCB002-D0FF-4025-9EE1-0BB39A73AC1C}"/>
-              </a:ext>
-            </a:extLst>
-          </p:cNvPr>
-          <p:cNvSpPr>
-            <a:spLocks xmlns:a="http://schemas.openxmlformats.org/drawingml/2006/main" noGrp="1"/>
-          </p:cNvSpPr>
-          <p:nvPr/>
-        </p:nvSpPr>
-        <p:spPr>
-          <a:xfrm xmlns:a="http://schemas.openxmlformats.org/drawingml/2006/main">
-            <a:off x="7067550" y="3733800"/>
-            <a:ext cx="3657600" cy="419100"/>
-          </a:xfrm>
-          <a:prstGeom xmlns:a="http://schemas.openxmlformats.org/drawingml/2006/main" prst="rect">
-            <a:avLst/>
-          </a:prstGeom>
-          <a:noFill xmlns:a="http://schemas.openxmlformats.org/drawingml/2006/main"/>
-          <a:ln xmlns:a="http://schemas.openxmlformats.org/drawingml/2006/main" w="0">
-            <a:noFill/>
-            <a:prstDash val="solid"/>
-          </a:ln>
-        </p:spPr>
-        <p:txBody>
-          <a:bodyPr xmlns:a="http://schemas.openxmlformats.org/drawingml/2006/main"/>
-          <a:lstStyle xmlns:a="http://schemas.openxmlformats.org/drawingml/2006/main"/>
-          <a:p xmlns:a="http://schemas.openxmlformats.org/drawingml/2006/main">
-            <a:pPr algn="l">
-              <a:defRPr sz="1350" b="0" i="0">
-                <a:solidFill>
-                  <a:srgbClr val="111827"/>
-                </a:solidFill>
-              </a:defRPr>
-            </a:pPr>
-            <a:r>
-              <a:rPr sz="1350" b="0" i="0">
-                <a:solidFill>
-                  <a:srgbClr val="111827"/>
-                </a:solidFill>
-              </a:rPr>
-              <a:t>Journey-based PPT and professional written report</a:t>
-            </a:r>
-          </a:p>
-        </p:txBody>
-      </p:sp>
-      <p:sp>
-        <p:nvSpPr>
-          <p:cNvPr id="25" name="">
-            <a:extLst xmlns:a="http://schemas.openxmlformats.org/drawingml/2006/main">
-              <a:ext uri="{FF2B5EF4-FFF2-40B4-BE49-F238E27FC236}">
-                <a16:creationId xmlns:a16="http://schemas.microsoft.com/office/drawing/2014/main" id="{D1FF8734-7BE9-40E6-8473-2F02B3589E1C}"/>
-              </a:ext>
-            </a:extLst>
-          </p:cNvPr>
-          <p:cNvSpPr>
-            <a:spLocks xmlns:a="http://schemas.openxmlformats.org/drawingml/2006/main" noGrp="1"/>
-          </p:cNvSpPr>
-          <p:nvPr/>
-        </p:nvSpPr>
-        <p:spPr>
-          <a:xfrm xmlns:a="http://schemas.openxmlformats.org/drawingml/2006/main">
-            <a:off x="1524000" y="5753100"/>
-            <a:ext cx="9144000" cy="323850"/>
+          <p:cNvPr id="11" name="roadmap-card-accent-2">
+            <a:extLst xmlns:a="http://schemas.openxmlformats.org/drawingml/2006/main">
+              <a:ext uri="{FF2B5EF4-FFF2-40B4-BE49-F238E27FC236}">
+                <a16:creationId xmlns:a16="http://schemas.microsoft.com/office/drawing/2014/main" id="{FB8610A9-9D8B-4A10-B9BE-C2498D114E62}"/>
+              </a:ext>
+            </a:extLst>
+          </p:cNvPr>
+          <p:cNvSpPr>
+            <a:spLocks xmlns:a="http://schemas.openxmlformats.org/drawingml/2006/main" noGrp="1"/>
+          </p:cNvSpPr>
+          <p:nvPr/>
+        </p:nvSpPr>
+        <p:spPr>
+          <a:xfrm xmlns:a="http://schemas.openxmlformats.org/drawingml/2006/main">
+            <a:off x="4429125" y="1485900"/>
+            <a:ext cx="3333750" cy="57150"/>
+          </a:xfrm>
+          <a:prstGeom xmlns:a="http://schemas.openxmlformats.org/drawingml/2006/main" prst="rect">
+            <a:avLst/>
+          </a:prstGeom>
+          <a:solidFill xmlns:a="http://schemas.openxmlformats.org/drawingml/2006/main">
+            <a:srgbClr val="E17100"/>
+          </a:solidFill>
+          <a:ln xmlns:a="http://schemas.openxmlformats.org/drawingml/2006/main" w="0">
+            <a:solidFill>
+              <a:srgbClr val="E17100"/>
+            </a:solidFill>
+            <a:prstDash val="solid"/>
+          </a:ln>
+        </p:spPr>
+      </p:sp>
+      <p:sp>
+        <p:nvSpPr>
+          <p:cNvPr id="12" name="roadmap-card-label-2">
+            <a:extLst xmlns:a="http://schemas.openxmlformats.org/drawingml/2006/main">
+              <a:ext uri="{FF2B5EF4-FFF2-40B4-BE49-F238E27FC236}">
+                <a16:creationId xmlns:a16="http://schemas.microsoft.com/office/drawing/2014/main" id="{692B80B0-7CBD-4186-801E-87AE54B9110C}"/>
+              </a:ext>
+            </a:extLst>
+          </p:cNvPr>
+          <p:cNvSpPr>
+            <a:spLocks xmlns:a="http://schemas.openxmlformats.org/drawingml/2006/main" noGrp="1"/>
+          </p:cNvSpPr>
+          <p:nvPr/>
+        </p:nvSpPr>
+        <p:spPr>
+          <a:xfrm xmlns:a="http://schemas.openxmlformats.org/drawingml/2006/main">
+            <a:off x="4619625" y="1695450"/>
+            <a:ext cx="2952750" cy="228600"/>
+          </a:xfrm>
+          <a:prstGeom xmlns:a="http://schemas.openxmlformats.org/drawingml/2006/main" prst="rect">
+            <a:avLst/>
+          </a:prstGeom>
+          <a:noFill xmlns:a="http://schemas.openxmlformats.org/drawingml/2006/main"/>
+          <a:ln xmlns:a="http://schemas.openxmlformats.org/drawingml/2006/main" w="0">
+            <a:noFill/>
+            <a:prstDash val="solid"/>
+          </a:ln>
+        </p:spPr>
+        <p:txBody>
+          <a:bodyPr xmlns:a="http://schemas.openxmlformats.org/drawingml/2006/main"/>
+          <a:lstStyle xmlns:a="http://schemas.openxmlformats.org/drawingml/2006/main"/>
+          <a:p xmlns:a="http://schemas.openxmlformats.org/drawingml/2006/main">
+            <a:pPr>
+              <a:defRPr sz="900" b="1">
+                <a:solidFill>
+                  <a:srgbClr val="E17100"/>
+                </a:solidFill>
+              </a:defRPr>
+            </a:pPr>
+            <a:r>
+              <a:rPr sz="900" b="1">
+                <a:solidFill>
+                  <a:srgbClr val="E17100"/>
+                </a:solidFill>
+              </a:rPr>
+              <a:t>CONTROLLED PILOT</a:t>
+            </a:r>
+          </a:p>
+        </p:txBody>
+      </p:sp>
+      <p:sp>
+        <p:nvSpPr>
+          <p:cNvPr id="13" name="roadmap-card-title-2">
+            <a:extLst xmlns:a="http://schemas.openxmlformats.org/drawingml/2006/main">
+              <a:ext uri="{FF2B5EF4-FFF2-40B4-BE49-F238E27FC236}">
+                <a16:creationId xmlns:a16="http://schemas.microsoft.com/office/drawing/2014/main" id="{B5BB2411-8B9D-46D7-AED2-9649DFE94E0D}"/>
+              </a:ext>
+            </a:extLst>
+          </p:cNvPr>
+          <p:cNvSpPr>
+            <a:spLocks xmlns:a="http://schemas.openxmlformats.org/drawingml/2006/main" noGrp="1"/>
+          </p:cNvSpPr>
+          <p:nvPr/>
+        </p:nvSpPr>
+        <p:spPr>
+          <a:xfrm xmlns:a="http://schemas.openxmlformats.org/drawingml/2006/main">
+            <a:off x="4619625" y="1962150"/>
+            <a:ext cx="2952750" cy="361950"/>
+          </a:xfrm>
+          <a:prstGeom xmlns:a="http://schemas.openxmlformats.org/drawingml/2006/main" prst="rect">
+            <a:avLst/>
+          </a:prstGeom>
+          <a:noFill xmlns:a="http://schemas.openxmlformats.org/drawingml/2006/main"/>
+          <a:ln xmlns:a="http://schemas.openxmlformats.org/drawingml/2006/main" w="0">
+            <a:noFill/>
+            <a:prstDash val="solid"/>
+          </a:ln>
+        </p:spPr>
+        <p:txBody>
+          <a:bodyPr xmlns:a="http://schemas.openxmlformats.org/drawingml/2006/main"/>
+          <a:lstStyle xmlns:a="http://schemas.openxmlformats.org/drawingml/2006/main"/>
+          <a:p xmlns:a="http://schemas.openxmlformats.org/drawingml/2006/main">
+            <a:pPr>
+              <a:defRPr sz="1575" b="1">
+                <a:solidFill>
+                  <a:srgbClr val="020618"/>
+                </a:solidFill>
+              </a:defRPr>
+            </a:pPr>
+            <a:r>
+              <a:rPr sz="1575" b="1">
+                <a:solidFill>
+                  <a:srgbClr val="020618"/>
+                </a:solidFill>
+              </a:rPr>
+              <a:t>Validate model trust</a:t>
+            </a:r>
+          </a:p>
+        </p:txBody>
+      </p:sp>
+      <p:sp>
+        <p:nvSpPr>
+          <p:cNvPr id="14" name="roadmap-card-copy-2">
+            <a:extLst xmlns:a="http://schemas.openxmlformats.org/drawingml/2006/main">
+              <a:ext uri="{FF2B5EF4-FFF2-40B4-BE49-F238E27FC236}">
+                <a16:creationId xmlns:a16="http://schemas.microsoft.com/office/drawing/2014/main" id="{5979B12A-DD2A-47EF-A893-AD81F178B4AB}"/>
+              </a:ext>
+            </a:extLst>
+          </p:cNvPr>
+          <p:cNvSpPr>
+            <a:spLocks xmlns:a="http://schemas.openxmlformats.org/drawingml/2006/main" noGrp="1"/>
+          </p:cNvSpPr>
+          <p:nvPr/>
+        </p:nvSpPr>
+        <p:spPr>
+          <a:xfrm xmlns:a="http://schemas.openxmlformats.org/drawingml/2006/main">
+            <a:off x="4619625" y="2400300"/>
+            <a:ext cx="2952750" cy="647700"/>
+          </a:xfrm>
+          <a:prstGeom xmlns:a="http://schemas.openxmlformats.org/drawingml/2006/main" prst="rect">
+            <a:avLst/>
+          </a:prstGeom>
+          <a:noFill xmlns:a="http://schemas.openxmlformats.org/drawingml/2006/main"/>
+          <a:ln xmlns:a="http://schemas.openxmlformats.org/drawingml/2006/main" w="0">
+            <a:noFill/>
+            <a:prstDash val="solid"/>
+          </a:ln>
+        </p:spPr>
+        <p:txBody>
+          <a:bodyPr xmlns:a="http://schemas.openxmlformats.org/drawingml/2006/main"/>
+          <a:lstStyle xmlns:a="http://schemas.openxmlformats.org/drawingml/2006/main"/>
+          <a:p xmlns:a="http://schemas.openxmlformats.org/drawingml/2006/main">
+            <a:pPr>
+              <a:defRPr sz="1125">
+                <a:solidFill>
+                  <a:srgbClr val="45556C"/>
+                </a:solidFill>
+              </a:defRPr>
+            </a:pPr>
+            <a:r>
+              <a:rPr sz="1125">
+                <a:solidFill>
+                  <a:srgbClr val="45556C"/>
+                </a:solidFill>
+              </a:rPr>
+              <a:t>Calibrated probabilities, real SHAP explanations, segment validation, investigator feedback capture, and weekly drift monitoring.</a:t>
+            </a:r>
+          </a:p>
+        </p:txBody>
+      </p:sp>
+      <p:sp>
+        <p:nvSpPr>
+          <p:cNvPr id="15" name="roadmap-card-3">
+            <a:extLst xmlns:a="http://schemas.openxmlformats.org/drawingml/2006/main">
+              <a:ext uri="{FF2B5EF4-FFF2-40B4-BE49-F238E27FC236}">
+                <a16:creationId xmlns:a16="http://schemas.microsoft.com/office/drawing/2014/main" id="{2F298E4D-8002-41FA-8198-F749522FDFC5}"/>
+              </a:ext>
+            </a:extLst>
+          </p:cNvPr>
+          <p:cNvSpPr>
+            <a:spLocks xmlns:a="http://schemas.openxmlformats.org/drawingml/2006/main" noGrp="1"/>
+          </p:cNvSpPr>
+          <p:nvPr/>
+        </p:nvSpPr>
+        <p:spPr>
+          <a:xfrm xmlns:a="http://schemas.openxmlformats.org/drawingml/2006/main">
+            <a:off x="8096250" y="1485900"/>
+            <a:ext cx="3333750" cy="1714500"/>
+          </a:xfrm>
+          <a:prstGeom xmlns:a="http://schemas.openxmlformats.org/drawingml/2006/main" prst="roundRect">
+            <a:avLst>
+              <a:gd name="adj" fmla="val 4444"/>
+            </a:avLst>
+          </a:prstGeom>
+          <a:solidFill xmlns:a="http://schemas.openxmlformats.org/drawingml/2006/main">
+            <a:srgbClr val="FFFFFF"/>
+          </a:solidFill>
+          <a:ln xmlns:a="http://schemas.openxmlformats.org/drawingml/2006/main" w="9525">
+            <a:solidFill>
+              <a:srgbClr val="E2E8F0"/>
+            </a:solidFill>
+            <a:prstDash val="solid"/>
+          </a:ln>
+        </p:spPr>
+      </p:sp>
+      <p:sp>
+        <p:nvSpPr>
+          <p:cNvPr id="16" name="roadmap-card-accent-3">
+            <a:extLst xmlns:a="http://schemas.openxmlformats.org/drawingml/2006/main">
+              <a:ext uri="{FF2B5EF4-FFF2-40B4-BE49-F238E27FC236}">
+                <a16:creationId xmlns:a16="http://schemas.microsoft.com/office/drawing/2014/main" id="{978E8701-0A84-485A-A666-C79ACFB2E1F6}"/>
+              </a:ext>
+            </a:extLst>
+          </p:cNvPr>
+          <p:cNvSpPr>
+            <a:spLocks xmlns:a="http://schemas.openxmlformats.org/drawingml/2006/main" noGrp="1"/>
+          </p:cNvSpPr>
+          <p:nvPr/>
+        </p:nvSpPr>
+        <p:spPr>
+          <a:xfrm xmlns:a="http://schemas.openxmlformats.org/drawingml/2006/main">
+            <a:off x="8096250" y="1485900"/>
+            <a:ext cx="3333750" cy="57150"/>
+          </a:xfrm>
+          <a:prstGeom xmlns:a="http://schemas.openxmlformats.org/drawingml/2006/main" prst="rect">
+            <a:avLst/>
+          </a:prstGeom>
+          <a:solidFill xmlns:a="http://schemas.openxmlformats.org/drawingml/2006/main">
+            <a:srgbClr val="314158"/>
+          </a:solidFill>
+          <a:ln xmlns:a="http://schemas.openxmlformats.org/drawingml/2006/main" w="0">
+            <a:solidFill>
+              <a:srgbClr val="314158"/>
+            </a:solidFill>
+            <a:prstDash val="solid"/>
+          </a:ln>
+        </p:spPr>
+      </p:sp>
+      <p:sp>
+        <p:nvSpPr>
+          <p:cNvPr id="17" name="roadmap-card-label-3">
+            <a:extLst xmlns:a="http://schemas.openxmlformats.org/drawingml/2006/main">
+              <a:ext uri="{FF2B5EF4-FFF2-40B4-BE49-F238E27FC236}">
+                <a16:creationId xmlns:a16="http://schemas.microsoft.com/office/drawing/2014/main" id="{443E717B-B1C1-49EB-83F1-01859F541D16}"/>
+              </a:ext>
+            </a:extLst>
+          </p:cNvPr>
+          <p:cNvSpPr>
+            <a:spLocks xmlns:a="http://schemas.openxmlformats.org/drawingml/2006/main" noGrp="1"/>
+          </p:cNvSpPr>
+          <p:nvPr/>
+        </p:nvSpPr>
+        <p:spPr>
+          <a:xfrm xmlns:a="http://schemas.openxmlformats.org/drawingml/2006/main">
+            <a:off x="8286750" y="1695450"/>
+            <a:ext cx="2952750" cy="228600"/>
+          </a:xfrm>
+          <a:prstGeom xmlns:a="http://schemas.openxmlformats.org/drawingml/2006/main" prst="rect">
+            <a:avLst/>
+          </a:prstGeom>
+          <a:noFill xmlns:a="http://schemas.openxmlformats.org/drawingml/2006/main"/>
+          <a:ln xmlns:a="http://schemas.openxmlformats.org/drawingml/2006/main" w="0">
+            <a:noFill/>
+            <a:prstDash val="solid"/>
+          </a:ln>
+        </p:spPr>
+        <p:txBody>
+          <a:bodyPr xmlns:a="http://schemas.openxmlformats.org/drawingml/2006/main"/>
+          <a:lstStyle xmlns:a="http://schemas.openxmlformats.org/drawingml/2006/main"/>
+          <a:p xmlns:a="http://schemas.openxmlformats.org/drawingml/2006/main">
+            <a:pPr>
+              <a:defRPr sz="900" b="1">
+                <a:solidFill>
+                  <a:srgbClr val="314158"/>
+                </a:solidFill>
+              </a:defRPr>
+            </a:pPr>
+            <a:r>
+              <a:rPr sz="900" b="1">
+                <a:solidFill>
+                  <a:srgbClr val="314158"/>
+                </a:solidFill>
+              </a:rPr>
+              <a:t>PRODUCTION READY</a:t>
+            </a:r>
+          </a:p>
+        </p:txBody>
+      </p:sp>
+      <p:sp>
+        <p:nvSpPr>
+          <p:cNvPr id="18" name="roadmap-card-title-3">
+            <a:extLst xmlns:a="http://schemas.openxmlformats.org/drawingml/2006/main">
+              <a:ext uri="{FF2B5EF4-FFF2-40B4-BE49-F238E27FC236}">
+                <a16:creationId xmlns:a16="http://schemas.microsoft.com/office/drawing/2014/main" id="{F6557524-60BA-491E-BE37-4C74B3FB46B8}"/>
+              </a:ext>
+            </a:extLst>
+          </p:cNvPr>
+          <p:cNvSpPr>
+            <a:spLocks xmlns:a="http://schemas.openxmlformats.org/drawingml/2006/main" noGrp="1"/>
+          </p:cNvSpPr>
+          <p:nvPr/>
+        </p:nvSpPr>
+        <p:spPr>
+          <a:xfrm xmlns:a="http://schemas.openxmlformats.org/drawingml/2006/main">
+            <a:off x="8286750" y="1962150"/>
+            <a:ext cx="2952750" cy="361950"/>
+          </a:xfrm>
+          <a:prstGeom xmlns:a="http://schemas.openxmlformats.org/drawingml/2006/main" prst="rect">
+            <a:avLst/>
+          </a:prstGeom>
+          <a:noFill xmlns:a="http://schemas.openxmlformats.org/drawingml/2006/main"/>
+          <a:ln xmlns:a="http://schemas.openxmlformats.org/drawingml/2006/main" w="0">
+            <a:noFill/>
+            <a:prstDash val="solid"/>
+          </a:ln>
+        </p:spPr>
+        <p:txBody>
+          <a:bodyPr xmlns:a="http://schemas.openxmlformats.org/drawingml/2006/main"/>
+          <a:lstStyle xmlns:a="http://schemas.openxmlformats.org/drawingml/2006/main"/>
+          <a:p xmlns:a="http://schemas.openxmlformats.org/drawingml/2006/main">
+            <a:pPr>
+              <a:defRPr sz="1575" b="1">
+                <a:solidFill>
+                  <a:srgbClr val="020618"/>
+                </a:solidFill>
+              </a:defRPr>
+            </a:pPr>
+            <a:r>
+              <a:rPr sz="1575" b="1">
+                <a:solidFill>
+                  <a:srgbClr val="020618"/>
+                </a:solidFill>
+              </a:rPr>
+              <a:t>Needs bank infrastructure</a:t>
+            </a:r>
+          </a:p>
+        </p:txBody>
+      </p:sp>
+      <p:sp>
+        <p:nvSpPr>
+          <p:cNvPr id="19" name="roadmap-card-copy-3">
+            <a:extLst xmlns:a="http://schemas.openxmlformats.org/drawingml/2006/main">
+              <a:ext uri="{FF2B5EF4-FFF2-40B4-BE49-F238E27FC236}">
+                <a16:creationId xmlns:a16="http://schemas.microsoft.com/office/drawing/2014/main" id="{65B2A002-19CC-4A8E-B652-124D9488306B}"/>
+              </a:ext>
+            </a:extLst>
+          </p:cNvPr>
+          <p:cNvSpPr>
+            <a:spLocks xmlns:a="http://schemas.openxmlformats.org/drawingml/2006/main" noGrp="1"/>
+          </p:cNvSpPr>
+          <p:nvPr/>
+        </p:nvSpPr>
+        <p:spPr>
+          <a:xfrm xmlns:a="http://schemas.openxmlformats.org/drawingml/2006/main">
+            <a:off x="8286750" y="2400300"/>
+            <a:ext cx="2952750" cy="647700"/>
+          </a:xfrm>
+          <a:prstGeom xmlns:a="http://schemas.openxmlformats.org/drawingml/2006/main" prst="rect">
+            <a:avLst/>
+          </a:prstGeom>
+          <a:noFill xmlns:a="http://schemas.openxmlformats.org/drawingml/2006/main"/>
+          <a:ln xmlns:a="http://schemas.openxmlformats.org/drawingml/2006/main" w="0">
+            <a:noFill/>
+            <a:prstDash val="solid"/>
+          </a:ln>
+        </p:spPr>
+        <p:txBody>
+          <a:bodyPr xmlns:a="http://schemas.openxmlformats.org/drawingml/2006/main"/>
+          <a:lstStyle xmlns:a="http://schemas.openxmlformats.org/drawingml/2006/main"/>
+          <a:p xmlns:a="http://schemas.openxmlformats.org/drawingml/2006/main">
+            <a:pPr>
+              <a:defRPr sz="1125">
+                <a:solidFill>
+                  <a:srgbClr val="45556C"/>
+                </a:solidFill>
+              </a:defRPr>
+            </a:pPr>
+            <a:r>
+              <a:rPr sz="1125">
+                <a:solidFill>
+                  <a:srgbClr val="45556C"/>
+                </a:solidFill>
+              </a:rPr>
+              <a:t>Live transaction streams, customer and device history, graph fraud signals, role-based access, audit logs, and formal model-risk approval.</a:t>
+            </a:r>
+          </a:p>
+        </p:txBody>
+      </p:sp>
+      <p:sp>
+        <p:nvSpPr>
+          <p:cNvPr id="20" name="pillar-surface">
+            <a:extLst xmlns:a="http://schemas.openxmlformats.org/drawingml/2006/main">
+              <a:ext uri="{FF2B5EF4-FFF2-40B4-BE49-F238E27FC236}">
+                <a16:creationId xmlns:a16="http://schemas.microsoft.com/office/drawing/2014/main" id="{E9A41C84-987A-4246-A9E8-55F263E2E8AE}"/>
+              </a:ext>
+            </a:extLst>
+          </p:cNvPr>
+          <p:cNvSpPr>
+            <a:spLocks xmlns:a="http://schemas.openxmlformats.org/drawingml/2006/main" noGrp="1"/>
+          </p:cNvSpPr>
+          <p:nvPr/>
+        </p:nvSpPr>
+        <p:spPr>
+          <a:xfrm xmlns:a="http://schemas.openxmlformats.org/drawingml/2006/main">
+            <a:off x="762000" y="3581400"/>
+            <a:ext cx="10668000" cy="2076450"/>
+          </a:xfrm>
+          <a:prstGeom xmlns:a="http://schemas.openxmlformats.org/drawingml/2006/main" prst="roundRect">
+            <a:avLst>
+              <a:gd name="adj" fmla="val 3670"/>
+            </a:avLst>
+          </a:prstGeom>
+          <a:solidFill xmlns:a="http://schemas.openxmlformats.org/drawingml/2006/main">
+            <a:srgbClr val="FFFFFF"/>
+          </a:solidFill>
+          <a:ln xmlns:a="http://schemas.openxmlformats.org/drawingml/2006/main" w="9525">
+            <a:solidFill>
+              <a:srgbClr val="E2E8F0"/>
+            </a:solidFill>
+            <a:prstDash val="solid"/>
+          </a:ln>
+        </p:spPr>
+      </p:sp>
+      <p:sp>
+        <p:nvSpPr>
+          <p:cNvPr id="21" name="pillar-header">
+            <a:extLst xmlns:a="http://schemas.openxmlformats.org/drawingml/2006/main">
+              <a:ext uri="{FF2B5EF4-FFF2-40B4-BE49-F238E27FC236}">
+                <a16:creationId xmlns:a16="http://schemas.microsoft.com/office/drawing/2014/main" id="{FD8D4B49-AA94-4383-A4BF-577B48B9D39E}"/>
+              </a:ext>
+            </a:extLst>
+          </p:cNvPr>
+          <p:cNvSpPr>
+            <a:spLocks xmlns:a="http://schemas.openxmlformats.org/drawingml/2006/main" noGrp="1"/>
+          </p:cNvSpPr>
+          <p:nvPr/>
+        </p:nvSpPr>
+        <p:spPr>
+          <a:xfrm xmlns:a="http://schemas.openxmlformats.org/drawingml/2006/main">
+            <a:off x="1028700" y="3790950"/>
+            <a:ext cx="5334000" cy="304800"/>
+          </a:xfrm>
+          <a:prstGeom xmlns:a="http://schemas.openxmlformats.org/drawingml/2006/main" prst="rect">
+            <a:avLst/>
+          </a:prstGeom>
+          <a:noFill xmlns:a="http://schemas.openxmlformats.org/drawingml/2006/main"/>
+          <a:ln xmlns:a="http://schemas.openxmlformats.org/drawingml/2006/main" w="0">
+            <a:noFill/>
+            <a:prstDash val="solid"/>
+          </a:ln>
+        </p:spPr>
+        <p:txBody>
+          <a:bodyPr xmlns:a="http://schemas.openxmlformats.org/drawingml/2006/main"/>
+          <a:lstStyle xmlns:a="http://schemas.openxmlformats.org/drawingml/2006/main"/>
+          <a:p xmlns:a="http://schemas.openxmlformats.org/drawingml/2006/main">
+            <a:pPr>
+              <a:defRPr sz="1500" b="1">
+                <a:solidFill>
+                  <a:srgbClr val="020618"/>
+                </a:solidFill>
+              </a:defRPr>
+            </a:pPr>
+            <a:r>
+              <a:rPr sz="1500" b="1">
+                <a:solidFill>
+                  <a:srgbClr val="020618"/>
+                </a:solidFill>
+              </a:rPr>
+              <a:t>Scale-up pillars a reviewer should expect</a:t>
+            </a:r>
+          </a:p>
+        </p:txBody>
+      </p:sp>
+      <p:sp>
+        <p:nvSpPr>
+          <p:cNvPr id="22" name="pillar-0">
+            <a:extLst xmlns:a="http://schemas.openxmlformats.org/drawingml/2006/main">
+              <a:ext uri="{FF2B5EF4-FFF2-40B4-BE49-F238E27FC236}">
+                <a16:creationId xmlns:a16="http://schemas.microsoft.com/office/drawing/2014/main" id="{71E42FF3-CE6F-4CD0-992E-F616B1D046FB}"/>
+              </a:ext>
+            </a:extLst>
+          </p:cNvPr>
+          <p:cNvSpPr>
+            <a:spLocks xmlns:a="http://schemas.openxmlformats.org/drawingml/2006/main" noGrp="1"/>
+          </p:cNvSpPr>
+          <p:nvPr/>
+        </p:nvSpPr>
+        <p:spPr>
+          <a:xfrm xmlns:a="http://schemas.openxmlformats.org/drawingml/2006/main">
+            <a:off x="1028700" y="4248150"/>
+            <a:ext cx="1981200" cy="1162050"/>
+          </a:xfrm>
+          <a:prstGeom xmlns:a="http://schemas.openxmlformats.org/drawingml/2006/main" prst="roundRect">
+            <a:avLst>
+              <a:gd name="adj" fmla="val 6557"/>
+            </a:avLst>
+          </a:prstGeom>
+          <a:solidFill xmlns:a="http://schemas.openxmlformats.org/drawingml/2006/main">
+            <a:srgbClr val="F8FAFC"/>
+          </a:solidFill>
+          <a:ln xmlns:a="http://schemas.openxmlformats.org/drawingml/2006/main" w="9525">
+            <a:solidFill>
+              <a:srgbClr val="E2E8F0"/>
+            </a:solidFill>
+            <a:prstDash val="solid"/>
+          </a:ln>
+        </p:spPr>
+      </p:sp>
+      <p:sp>
+        <p:nvSpPr>
+          <p:cNvPr id="23" name="pillar-title-0">
+            <a:extLst xmlns:a="http://schemas.openxmlformats.org/drawingml/2006/main">
+              <a:ext uri="{FF2B5EF4-FFF2-40B4-BE49-F238E27FC236}">
+                <a16:creationId xmlns:a16="http://schemas.microsoft.com/office/drawing/2014/main" id="{8E140700-85FB-4011-B9B4-C56E0DDA92FE}"/>
+              </a:ext>
+            </a:extLst>
+          </p:cNvPr>
+          <p:cNvSpPr>
+            <a:spLocks xmlns:a="http://schemas.openxmlformats.org/drawingml/2006/main" noGrp="1"/>
+          </p:cNvSpPr>
+          <p:nvPr/>
+        </p:nvSpPr>
+        <p:spPr>
+          <a:xfrm xmlns:a="http://schemas.openxmlformats.org/drawingml/2006/main">
+            <a:off x="1162050" y="4400550"/>
+            <a:ext cx="1714500" cy="228600"/>
+          </a:xfrm>
+          <a:prstGeom xmlns:a="http://schemas.openxmlformats.org/drawingml/2006/main" prst="rect">
+            <a:avLst/>
+          </a:prstGeom>
+          <a:noFill xmlns:a="http://schemas.openxmlformats.org/drawingml/2006/main"/>
+          <a:ln xmlns:a="http://schemas.openxmlformats.org/drawingml/2006/main" w="0">
+            <a:noFill/>
+            <a:prstDash val="solid"/>
+          </a:ln>
+        </p:spPr>
+        <p:txBody>
+          <a:bodyPr xmlns:a="http://schemas.openxmlformats.org/drawingml/2006/main"/>
+          <a:lstStyle xmlns:a="http://schemas.openxmlformats.org/drawingml/2006/main"/>
+          <a:p xmlns:a="http://schemas.openxmlformats.org/drawingml/2006/main">
+            <a:pPr>
+              <a:defRPr sz="1200" b="1">
+                <a:solidFill>
+                  <a:srgbClr val="005F5A"/>
+                </a:solidFill>
+              </a:defRPr>
+            </a:pPr>
+            <a:r>
+              <a:rPr sz="1200" b="1">
+                <a:solidFill>
+                  <a:srgbClr val="005F5A"/>
+                </a:solidFill>
+              </a:rPr>
+              <a:t>Data</a:t>
+            </a:r>
+          </a:p>
+        </p:txBody>
+      </p:sp>
+      <p:sp>
+        <p:nvSpPr>
+          <p:cNvPr id="24" name="pillar-copy-0">
+            <a:extLst xmlns:a="http://schemas.openxmlformats.org/drawingml/2006/main">
+              <a:ext uri="{FF2B5EF4-FFF2-40B4-BE49-F238E27FC236}">
+                <a16:creationId xmlns:a16="http://schemas.microsoft.com/office/drawing/2014/main" id="{1BCD2CC2-E2F2-4062-9BCE-53DC8E31EBE2}"/>
+              </a:ext>
+            </a:extLst>
+          </p:cNvPr>
+          <p:cNvSpPr>
+            <a:spLocks xmlns:a="http://schemas.openxmlformats.org/drawingml/2006/main" noGrp="1"/>
+          </p:cNvSpPr>
+          <p:nvPr/>
+        </p:nvSpPr>
+        <p:spPr>
+          <a:xfrm xmlns:a="http://schemas.openxmlformats.org/drawingml/2006/main">
+            <a:off x="1162050" y="4686300"/>
+            <a:ext cx="1714500" cy="590550"/>
+          </a:xfrm>
+          <a:prstGeom xmlns:a="http://schemas.openxmlformats.org/drawingml/2006/main" prst="rect">
+            <a:avLst/>
+          </a:prstGeom>
+          <a:noFill xmlns:a="http://schemas.openxmlformats.org/drawingml/2006/main"/>
+          <a:ln xmlns:a="http://schemas.openxmlformats.org/drawingml/2006/main" w="0">
+            <a:noFill/>
+            <a:prstDash val="solid"/>
+          </a:ln>
+        </p:spPr>
+        <p:txBody>
+          <a:bodyPr xmlns:a="http://schemas.openxmlformats.org/drawingml/2006/main"/>
+          <a:lstStyle xmlns:a="http://schemas.openxmlformats.org/drawingml/2006/main"/>
+          <a:p xmlns:a="http://schemas.openxmlformats.org/drawingml/2006/main">
+            <a:pPr>
+              <a:defRPr sz="945">
+                <a:solidFill>
+                  <a:srgbClr val="45556C"/>
+                </a:solidFill>
+              </a:defRPr>
+            </a:pPr>
+            <a:r>
+              <a:rPr sz="945">
+                <a:solidFill>
+                  <a:srgbClr val="45556C"/>
+                </a:solidFill>
+              </a:rPr>
+              <a:t>Move from synthetic records to representative transaction, customer, account, and device data.</a:t>
+            </a:r>
+          </a:p>
+        </p:txBody>
+      </p:sp>
+      <p:sp>
+        <p:nvSpPr>
+          <p:cNvPr id="25" name="pillar-1">
+            <a:extLst xmlns:a="http://schemas.openxmlformats.org/drawingml/2006/main">
+              <a:ext uri="{FF2B5EF4-FFF2-40B4-BE49-F238E27FC236}">
+                <a16:creationId xmlns:a16="http://schemas.microsoft.com/office/drawing/2014/main" id="{825409B2-B703-4D06-931A-2534C47FD6F1}"/>
+              </a:ext>
+            </a:extLst>
+          </p:cNvPr>
+          <p:cNvSpPr>
+            <a:spLocks xmlns:a="http://schemas.openxmlformats.org/drawingml/2006/main" noGrp="1"/>
+          </p:cNvSpPr>
+          <p:nvPr/>
+        </p:nvSpPr>
+        <p:spPr>
+          <a:xfrm xmlns:a="http://schemas.openxmlformats.org/drawingml/2006/main">
+            <a:off x="3086100" y="4248150"/>
+            <a:ext cx="1981200" cy="1162050"/>
+          </a:xfrm>
+          <a:prstGeom xmlns:a="http://schemas.openxmlformats.org/drawingml/2006/main" prst="roundRect">
+            <a:avLst>
+              <a:gd name="adj" fmla="val 6557"/>
+            </a:avLst>
+          </a:prstGeom>
+          <a:solidFill xmlns:a="http://schemas.openxmlformats.org/drawingml/2006/main">
+            <a:srgbClr val="F8FAFC"/>
+          </a:solidFill>
+          <a:ln xmlns:a="http://schemas.openxmlformats.org/drawingml/2006/main" w="9525">
+            <a:solidFill>
+              <a:srgbClr val="E2E8F0"/>
+            </a:solidFill>
+            <a:prstDash val="solid"/>
+          </a:ln>
+        </p:spPr>
+      </p:sp>
+      <p:sp>
+        <p:nvSpPr>
+          <p:cNvPr id="26" name="pillar-title-1">
+            <a:extLst xmlns:a="http://schemas.openxmlformats.org/drawingml/2006/main">
+              <a:ext uri="{FF2B5EF4-FFF2-40B4-BE49-F238E27FC236}">
+                <a16:creationId xmlns:a16="http://schemas.microsoft.com/office/drawing/2014/main" id="{670F124A-7F9E-4B45-AB85-3B6D9B15F1C1}"/>
+              </a:ext>
+            </a:extLst>
+          </p:cNvPr>
+          <p:cNvSpPr>
+            <a:spLocks xmlns:a="http://schemas.openxmlformats.org/drawingml/2006/main" noGrp="1"/>
+          </p:cNvSpPr>
+          <p:nvPr/>
+        </p:nvSpPr>
+        <p:spPr>
+          <a:xfrm xmlns:a="http://schemas.openxmlformats.org/drawingml/2006/main">
+            <a:off x="3219450" y="4400550"/>
+            <a:ext cx="1714500" cy="228600"/>
+          </a:xfrm>
+          <a:prstGeom xmlns:a="http://schemas.openxmlformats.org/drawingml/2006/main" prst="rect">
+            <a:avLst/>
+          </a:prstGeom>
+          <a:noFill xmlns:a="http://schemas.openxmlformats.org/drawingml/2006/main"/>
+          <a:ln xmlns:a="http://schemas.openxmlformats.org/drawingml/2006/main" w="0">
+            <a:noFill/>
+            <a:prstDash val="solid"/>
+          </a:ln>
+        </p:spPr>
+        <p:txBody>
+          <a:bodyPr xmlns:a="http://schemas.openxmlformats.org/drawingml/2006/main"/>
+          <a:lstStyle xmlns:a="http://schemas.openxmlformats.org/drawingml/2006/main"/>
+          <a:p xmlns:a="http://schemas.openxmlformats.org/drawingml/2006/main">
+            <a:pPr>
+              <a:defRPr sz="1200" b="1">
+                <a:solidFill>
+                  <a:srgbClr val="005F5A"/>
+                </a:solidFill>
+              </a:defRPr>
+            </a:pPr>
+            <a:r>
+              <a:rPr sz="1200" b="1">
+                <a:solidFill>
+                  <a:srgbClr val="005F5A"/>
+                </a:solidFill>
+              </a:rPr>
+              <a:t>Model</a:t>
+            </a:r>
+          </a:p>
+        </p:txBody>
+      </p:sp>
+      <p:sp>
+        <p:nvSpPr>
+          <p:cNvPr id="27" name="pillar-copy-1">
+            <a:extLst xmlns:a="http://schemas.openxmlformats.org/drawingml/2006/main">
+              <a:ext uri="{FF2B5EF4-FFF2-40B4-BE49-F238E27FC236}">
+                <a16:creationId xmlns:a16="http://schemas.microsoft.com/office/drawing/2014/main" id="{C41038BF-D82E-485B-BC82-E07156CE4584}"/>
+              </a:ext>
+            </a:extLst>
+          </p:cNvPr>
+          <p:cNvSpPr>
+            <a:spLocks xmlns:a="http://schemas.openxmlformats.org/drawingml/2006/main" noGrp="1"/>
+          </p:cNvSpPr>
+          <p:nvPr/>
+        </p:nvSpPr>
+        <p:spPr>
+          <a:xfrm xmlns:a="http://schemas.openxmlformats.org/drawingml/2006/main">
+            <a:off x="3219450" y="4686300"/>
+            <a:ext cx="1714500" cy="590550"/>
+          </a:xfrm>
+          <a:prstGeom xmlns:a="http://schemas.openxmlformats.org/drawingml/2006/main" prst="rect">
+            <a:avLst/>
+          </a:prstGeom>
+          <a:noFill xmlns:a="http://schemas.openxmlformats.org/drawingml/2006/main"/>
+          <a:ln xmlns:a="http://schemas.openxmlformats.org/drawingml/2006/main" w="0">
+            <a:noFill/>
+            <a:prstDash val="solid"/>
+          </a:ln>
+        </p:spPr>
+        <p:txBody>
+          <a:bodyPr xmlns:a="http://schemas.openxmlformats.org/drawingml/2006/main"/>
+          <a:lstStyle xmlns:a="http://schemas.openxmlformats.org/drawingml/2006/main"/>
+          <a:p xmlns:a="http://schemas.openxmlformats.org/drawingml/2006/main">
+            <a:pPr>
+              <a:defRPr sz="945">
+                <a:solidFill>
+                  <a:srgbClr val="45556C"/>
+                </a:solidFill>
+              </a:defRPr>
+            </a:pPr>
+            <a:r>
+              <a:rPr sz="945">
+                <a:solidFill>
+                  <a:srgbClr val="45556C"/>
+                </a:solidFill>
+              </a:rPr>
+              <a:t>Add calibration, SHAP, challenger models, and graph/network fraud signals.</a:t>
+            </a:r>
+          </a:p>
+        </p:txBody>
+      </p:sp>
+      <p:sp>
+        <p:nvSpPr>
+          <p:cNvPr id="28" name="pillar-2">
+            <a:extLst xmlns:a="http://schemas.openxmlformats.org/drawingml/2006/main">
+              <a:ext uri="{FF2B5EF4-FFF2-40B4-BE49-F238E27FC236}">
+                <a16:creationId xmlns:a16="http://schemas.microsoft.com/office/drawing/2014/main" id="{A03EB47D-BCBA-4180-BC3E-5D7E3BC1786F}"/>
+              </a:ext>
+            </a:extLst>
+          </p:cNvPr>
+          <p:cNvSpPr>
+            <a:spLocks xmlns:a="http://schemas.openxmlformats.org/drawingml/2006/main" noGrp="1"/>
+          </p:cNvSpPr>
+          <p:nvPr/>
+        </p:nvSpPr>
+        <p:spPr>
+          <a:xfrm xmlns:a="http://schemas.openxmlformats.org/drawingml/2006/main">
+            <a:off x="5143500" y="4248150"/>
+            <a:ext cx="1981200" cy="1162050"/>
+          </a:xfrm>
+          <a:prstGeom xmlns:a="http://schemas.openxmlformats.org/drawingml/2006/main" prst="roundRect">
+            <a:avLst>
+              <a:gd name="adj" fmla="val 6557"/>
+            </a:avLst>
+          </a:prstGeom>
+          <a:solidFill xmlns:a="http://schemas.openxmlformats.org/drawingml/2006/main">
+            <a:srgbClr val="F8FAFC"/>
+          </a:solidFill>
+          <a:ln xmlns:a="http://schemas.openxmlformats.org/drawingml/2006/main" w="9525">
+            <a:solidFill>
+              <a:srgbClr val="E2E8F0"/>
+            </a:solidFill>
+            <a:prstDash val="solid"/>
+          </a:ln>
+        </p:spPr>
+      </p:sp>
+      <p:sp>
+        <p:nvSpPr>
+          <p:cNvPr id="29" name="pillar-title-2">
+            <a:extLst xmlns:a="http://schemas.openxmlformats.org/drawingml/2006/main">
+              <a:ext uri="{FF2B5EF4-FFF2-40B4-BE49-F238E27FC236}">
+                <a16:creationId xmlns:a16="http://schemas.microsoft.com/office/drawing/2014/main" id="{3667DB02-8569-4AE2-8276-247013026DC1}"/>
+              </a:ext>
+            </a:extLst>
+          </p:cNvPr>
+          <p:cNvSpPr>
+            <a:spLocks xmlns:a="http://schemas.openxmlformats.org/drawingml/2006/main" noGrp="1"/>
+          </p:cNvSpPr>
+          <p:nvPr/>
+        </p:nvSpPr>
+        <p:spPr>
+          <a:xfrm xmlns:a="http://schemas.openxmlformats.org/drawingml/2006/main">
+            <a:off x="5276850" y="4400550"/>
+            <a:ext cx="1714500" cy="228600"/>
+          </a:xfrm>
+          <a:prstGeom xmlns:a="http://schemas.openxmlformats.org/drawingml/2006/main" prst="rect">
+            <a:avLst/>
+          </a:prstGeom>
+          <a:noFill xmlns:a="http://schemas.openxmlformats.org/drawingml/2006/main"/>
+          <a:ln xmlns:a="http://schemas.openxmlformats.org/drawingml/2006/main" w="0">
+            <a:noFill/>
+            <a:prstDash val="solid"/>
+          </a:ln>
+        </p:spPr>
+        <p:txBody>
+          <a:bodyPr xmlns:a="http://schemas.openxmlformats.org/drawingml/2006/main"/>
+          <a:lstStyle xmlns:a="http://schemas.openxmlformats.org/drawingml/2006/main"/>
+          <a:p xmlns:a="http://schemas.openxmlformats.org/drawingml/2006/main">
+            <a:pPr>
+              <a:defRPr sz="1200" b="1">
+                <a:solidFill>
+                  <a:srgbClr val="005F5A"/>
+                </a:solidFill>
+              </a:defRPr>
+            </a:pPr>
+            <a:r>
+              <a:rPr sz="1200" b="1">
+                <a:solidFill>
+                  <a:srgbClr val="005F5A"/>
+                </a:solidFill>
+              </a:rPr>
+              <a:t>Workflow</a:t>
+            </a:r>
+          </a:p>
+        </p:txBody>
+      </p:sp>
+      <p:sp>
+        <p:nvSpPr>
+          <p:cNvPr id="30" name="pillar-copy-2">
+            <a:extLst xmlns:a="http://schemas.openxmlformats.org/drawingml/2006/main">
+              <a:ext uri="{FF2B5EF4-FFF2-40B4-BE49-F238E27FC236}">
+                <a16:creationId xmlns:a16="http://schemas.microsoft.com/office/drawing/2014/main" id="{2018EAEB-78F1-4299-B279-7CFAED27615F}"/>
+              </a:ext>
+            </a:extLst>
+          </p:cNvPr>
+          <p:cNvSpPr>
+            <a:spLocks xmlns:a="http://schemas.openxmlformats.org/drawingml/2006/main" noGrp="1"/>
+          </p:cNvSpPr>
+          <p:nvPr/>
+        </p:nvSpPr>
+        <p:spPr>
+          <a:xfrm xmlns:a="http://schemas.openxmlformats.org/drawingml/2006/main">
+            <a:off x="5276850" y="4686300"/>
+            <a:ext cx="1714500" cy="590550"/>
+          </a:xfrm>
+          <a:prstGeom xmlns:a="http://schemas.openxmlformats.org/drawingml/2006/main" prst="rect">
+            <a:avLst/>
+          </a:prstGeom>
+          <a:noFill xmlns:a="http://schemas.openxmlformats.org/drawingml/2006/main"/>
+          <a:ln xmlns:a="http://schemas.openxmlformats.org/drawingml/2006/main" w="0">
+            <a:noFill/>
+            <a:prstDash val="solid"/>
+          </a:ln>
+        </p:spPr>
+        <p:txBody>
+          <a:bodyPr xmlns:a="http://schemas.openxmlformats.org/drawingml/2006/main"/>
+          <a:lstStyle xmlns:a="http://schemas.openxmlformats.org/drawingml/2006/main"/>
+          <a:p xmlns:a="http://schemas.openxmlformats.org/drawingml/2006/main">
+            <a:pPr>
+              <a:defRPr sz="945">
+                <a:solidFill>
+                  <a:srgbClr val="45556C"/>
+                </a:solidFill>
+              </a:defRPr>
+            </a:pPr>
+            <a:r>
+              <a:rPr sz="945">
+                <a:solidFill>
+                  <a:srgbClr val="45556C"/>
+                </a:solidFill>
+              </a:rPr>
+              <a:t>Capture analyst dispositions, case lifecycle status, SLA routing, and feedback loops.</a:t>
+            </a:r>
+          </a:p>
+        </p:txBody>
+      </p:sp>
+      <p:sp>
+        <p:nvSpPr>
+          <p:cNvPr id="31" name="pillar-3">
+            <a:extLst xmlns:a="http://schemas.openxmlformats.org/drawingml/2006/main">
+              <a:ext uri="{FF2B5EF4-FFF2-40B4-BE49-F238E27FC236}">
+                <a16:creationId xmlns:a16="http://schemas.microsoft.com/office/drawing/2014/main" id="{692E86CC-3921-43EF-A85F-AEB049C74738}"/>
+              </a:ext>
+            </a:extLst>
+          </p:cNvPr>
+          <p:cNvSpPr>
+            <a:spLocks xmlns:a="http://schemas.openxmlformats.org/drawingml/2006/main" noGrp="1"/>
+          </p:cNvSpPr>
+          <p:nvPr/>
+        </p:nvSpPr>
+        <p:spPr>
+          <a:xfrm xmlns:a="http://schemas.openxmlformats.org/drawingml/2006/main">
+            <a:off x="7200900" y="4248150"/>
+            <a:ext cx="1981200" cy="1162050"/>
+          </a:xfrm>
+          <a:prstGeom xmlns:a="http://schemas.openxmlformats.org/drawingml/2006/main" prst="roundRect">
+            <a:avLst>
+              <a:gd name="adj" fmla="val 6557"/>
+            </a:avLst>
+          </a:prstGeom>
+          <a:solidFill xmlns:a="http://schemas.openxmlformats.org/drawingml/2006/main">
+            <a:srgbClr val="F8FAFC"/>
+          </a:solidFill>
+          <a:ln xmlns:a="http://schemas.openxmlformats.org/drawingml/2006/main" w="9525">
+            <a:solidFill>
+              <a:srgbClr val="E2E8F0"/>
+            </a:solidFill>
+            <a:prstDash val="solid"/>
+          </a:ln>
+        </p:spPr>
+      </p:sp>
+      <p:sp>
+        <p:nvSpPr>
+          <p:cNvPr id="32" name="pillar-title-3">
+            <a:extLst xmlns:a="http://schemas.openxmlformats.org/drawingml/2006/main">
+              <a:ext uri="{FF2B5EF4-FFF2-40B4-BE49-F238E27FC236}">
+                <a16:creationId xmlns:a16="http://schemas.microsoft.com/office/drawing/2014/main" id="{87016ED7-7A57-4336-9047-057476A577CA}"/>
+              </a:ext>
+            </a:extLst>
+          </p:cNvPr>
+          <p:cNvSpPr>
+            <a:spLocks xmlns:a="http://schemas.openxmlformats.org/drawingml/2006/main" noGrp="1"/>
+          </p:cNvSpPr>
+          <p:nvPr/>
+        </p:nvSpPr>
+        <p:spPr>
+          <a:xfrm xmlns:a="http://schemas.openxmlformats.org/drawingml/2006/main">
+            <a:off x="7334250" y="4400550"/>
+            <a:ext cx="1714500" cy="228600"/>
+          </a:xfrm>
+          <a:prstGeom xmlns:a="http://schemas.openxmlformats.org/drawingml/2006/main" prst="rect">
+            <a:avLst/>
+          </a:prstGeom>
+          <a:noFill xmlns:a="http://schemas.openxmlformats.org/drawingml/2006/main"/>
+          <a:ln xmlns:a="http://schemas.openxmlformats.org/drawingml/2006/main" w="0">
+            <a:noFill/>
+            <a:prstDash val="solid"/>
+          </a:ln>
+        </p:spPr>
+        <p:txBody>
+          <a:bodyPr xmlns:a="http://schemas.openxmlformats.org/drawingml/2006/main"/>
+          <a:lstStyle xmlns:a="http://schemas.openxmlformats.org/drawingml/2006/main"/>
+          <a:p xmlns:a="http://schemas.openxmlformats.org/drawingml/2006/main">
+            <a:pPr>
+              <a:defRPr sz="1200" b="1">
+                <a:solidFill>
+                  <a:srgbClr val="005F5A"/>
+                </a:solidFill>
+              </a:defRPr>
+            </a:pPr>
+            <a:r>
+              <a:rPr sz="1200" b="1">
+                <a:solidFill>
+                  <a:srgbClr val="005F5A"/>
+                </a:solidFill>
+              </a:rPr>
+              <a:t>Governance</a:t>
+            </a:r>
+          </a:p>
+        </p:txBody>
+      </p:sp>
+      <p:sp>
+        <p:nvSpPr>
+          <p:cNvPr id="33" name="pillar-copy-3">
+            <a:extLst xmlns:a="http://schemas.openxmlformats.org/drawingml/2006/main">
+              <a:ext uri="{FF2B5EF4-FFF2-40B4-BE49-F238E27FC236}">
+                <a16:creationId xmlns:a16="http://schemas.microsoft.com/office/drawing/2014/main" id="{43F907C7-7290-4FFA-905B-D50509354056}"/>
+              </a:ext>
+            </a:extLst>
+          </p:cNvPr>
+          <p:cNvSpPr>
+            <a:spLocks xmlns:a="http://schemas.openxmlformats.org/drawingml/2006/main" noGrp="1"/>
+          </p:cNvSpPr>
+          <p:nvPr/>
+        </p:nvSpPr>
+        <p:spPr>
+          <a:xfrm xmlns:a="http://schemas.openxmlformats.org/drawingml/2006/main">
+            <a:off x="7334250" y="4686300"/>
+            <a:ext cx="1714500" cy="590550"/>
+          </a:xfrm>
+          <a:prstGeom xmlns:a="http://schemas.openxmlformats.org/drawingml/2006/main" prst="rect">
+            <a:avLst/>
+          </a:prstGeom>
+          <a:noFill xmlns:a="http://schemas.openxmlformats.org/drawingml/2006/main"/>
+          <a:ln xmlns:a="http://schemas.openxmlformats.org/drawingml/2006/main" w="0">
+            <a:noFill/>
+            <a:prstDash val="solid"/>
+          </a:ln>
+        </p:spPr>
+        <p:txBody>
+          <a:bodyPr xmlns:a="http://schemas.openxmlformats.org/drawingml/2006/main"/>
+          <a:lstStyle xmlns:a="http://schemas.openxmlformats.org/drawingml/2006/main"/>
+          <a:p xmlns:a="http://schemas.openxmlformats.org/drawingml/2006/main">
+            <a:pPr>
+              <a:defRPr sz="945">
+                <a:solidFill>
+                  <a:srgbClr val="45556C"/>
+                </a:solidFill>
+              </a:defRPr>
+            </a:pPr>
+            <a:r>
+              <a:rPr sz="945">
+                <a:solidFill>
+                  <a:srgbClr val="45556C"/>
+                </a:solidFill>
+              </a:rPr>
+              <a:t>Run segment validation, drift monitoring, approval gates, and periodic threshold review.</a:t>
+            </a:r>
+          </a:p>
+        </p:txBody>
+      </p:sp>
+      <p:sp>
+        <p:nvSpPr>
+          <p:cNvPr id="34" name="pillar-4">
+            <a:extLst xmlns:a="http://schemas.openxmlformats.org/drawingml/2006/main">
+              <a:ext uri="{FF2B5EF4-FFF2-40B4-BE49-F238E27FC236}">
+                <a16:creationId xmlns:a16="http://schemas.microsoft.com/office/drawing/2014/main" id="{48885F23-EF3D-4277-A5F1-DC11A63A0731}"/>
+              </a:ext>
+            </a:extLst>
+          </p:cNvPr>
+          <p:cNvSpPr>
+            <a:spLocks xmlns:a="http://schemas.openxmlformats.org/drawingml/2006/main" noGrp="1"/>
+          </p:cNvSpPr>
+          <p:nvPr/>
+        </p:nvSpPr>
+        <p:spPr>
+          <a:xfrm xmlns:a="http://schemas.openxmlformats.org/drawingml/2006/main">
+            <a:off x="9258300" y="4248150"/>
+            <a:ext cx="1981200" cy="1162050"/>
+          </a:xfrm>
+          <a:prstGeom xmlns:a="http://schemas.openxmlformats.org/drawingml/2006/main" prst="roundRect">
+            <a:avLst>
+              <a:gd name="adj" fmla="val 6557"/>
+            </a:avLst>
+          </a:prstGeom>
+          <a:solidFill xmlns:a="http://schemas.openxmlformats.org/drawingml/2006/main">
+            <a:srgbClr val="F8FAFC"/>
+          </a:solidFill>
+          <a:ln xmlns:a="http://schemas.openxmlformats.org/drawingml/2006/main" w="9525">
+            <a:solidFill>
+              <a:srgbClr val="E2E8F0"/>
+            </a:solidFill>
+            <a:prstDash val="solid"/>
+          </a:ln>
+        </p:spPr>
+      </p:sp>
+      <p:sp>
+        <p:nvSpPr>
+          <p:cNvPr id="35" name="pillar-title-4">
+            <a:extLst xmlns:a="http://schemas.openxmlformats.org/drawingml/2006/main">
+              <a:ext uri="{FF2B5EF4-FFF2-40B4-BE49-F238E27FC236}">
+                <a16:creationId xmlns:a16="http://schemas.microsoft.com/office/drawing/2014/main" id="{3F93D727-8DB5-4D0B-9E7F-599AF88DDC0A}"/>
+              </a:ext>
+            </a:extLst>
+          </p:cNvPr>
+          <p:cNvSpPr>
+            <a:spLocks xmlns:a="http://schemas.openxmlformats.org/drawingml/2006/main" noGrp="1"/>
+          </p:cNvSpPr>
+          <p:nvPr/>
+        </p:nvSpPr>
+        <p:spPr>
+          <a:xfrm xmlns:a="http://schemas.openxmlformats.org/drawingml/2006/main">
+            <a:off x="9391650" y="4400550"/>
+            <a:ext cx="1714500" cy="228600"/>
+          </a:xfrm>
+          <a:prstGeom xmlns:a="http://schemas.openxmlformats.org/drawingml/2006/main" prst="rect">
+            <a:avLst/>
+          </a:prstGeom>
+          <a:noFill xmlns:a="http://schemas.openxmlformats.org/drawingml/2006/main"/>
+          <a:ln xmlns:a="http://schemas.openxmlformats.org/drawingml/2006/main" w="0">
+            <a:noFill/>
+            <a:prstDash val="solid"/>
+          </a:ln>
+        </p:spPr>
+        <p:txBody>
+          <a:bodyPr xmlns:a="http://schemas.openxmlformats.org/drawingml/2006/main"/>
+          <a:lstStyle xmlns:a="http://schemas.openxmlformats.org/drawingml/2006/main"/>
+          <a:p xmlns:a="http://schemas.openxmlformats.org/drawingml/2006/main">
+            <a:pPr>
+              <a:defRPr sz="1200" b="1">
+                <a:solidFill>
+                  <a:srgbClr val="005F5A"/>
+                </a:solidFill>
+              </a:defRPr>
+            </a:pPr>
+            <a:r>
+              <a:rPr sz="1200" b="1">
+                <a:solidFill>
+                  <a:srgbClr val="005F5A"/>
+                </a:solidFill>
+              </a:rPr>
+              <a:t>Security</a:t>
+            </a:r>
+          </a:p>
+        </p:txBody>
+      </p:sp>
+      <p:sp>
+        <p:nvSpPr>
+          <p:cNvPr id="36" name="pillar-copy-4">
+            <a:extLst xmlns:a="http://schemas.openxmlformats.org/drawingml/2006/main">
+              <a:ext uri="{FF2B5EF4-FFF2-40B4-BE49-F238E27FC236}">
+                <a16:creationId xmlns:a16="http://schemas.microsoft.com/office/drawing/2014/main" id="{0D11EDA4-7474-41E1-937C-EEDDBF28AE75}"/>
+              </a:ext>
+            </a:extLst>
+          </p:cNvPr>
+          <p:cNvSpPr>
+            <a:spLocks xmlns:a="http://schemas.openxmlformats.org/drawingml/2006/main" noGrp="1"/>
+          </p:cNvSpPr>
+          <p:nvPr/>
+        </p:nvSpPr>
+        <p:spPr>
+          <a:xfrm xmlns:a="http://schemas.openxmlformats.org/drawingml/2006/main">
+            <a:off x="9391650" y="4686300"/>
+            <a:ext cx="1714500" cy="590550"/>
+          </a:xfrm>
+          <a:prstGeom xmlns:a="http://schemas.openxmlformats.org/drawingml/2006/main" prst="rect">
+            <a:avLst/>
+          </a:prstGeom>
+          <a:noFill xmlns:a="http://schemas.openxmlformats.org/drawingml/2006/main"/>
+          <a:ln xmlns:a="http://schemas.openxmlformats.org/drawingml/2006/main" w="0">
+            <a:noFill/>
+            <a:prstDash val="solid"/>
+          </a:ln>
+        </p:spPr>
+        <p:txBody>
+          <a:bodyPr xmlns:a="http://schemas.openxmlformats.org/drawingml/2006/main"/>
+          <a:lstStyle xmlns:a="http://schemas.openxmlformats.org/drawingml/2006/main"/>
+          <a:p xmlns:a="http://schemas.openxmlformats.org/drawingml/2006/main">
+            <a:pPr>
+              <a:defRPr sz="945">
+                <a:solidFill>
+                  <a:srgbClr val="45556C"/>
+                </a:solidFill>
+              </a:defRPr>
+            </a:pPr>
+            <a:r>
+              <a:rPr sz="945">
+                <a:solidFill>
+                  <a:srgbClr val="45556C"/>
+                </a:solidFill>
+              </a:rPr>
+              <a:t>Add role-based access, audit logs, privacy controls, and controlled deployment review.</a:t>
+            </a:r>
+          </a:p>
+        </p:txBody>
+      </p:sp>
+      <p:sp>
+        <p:nvSpPr>
+          <p:cNvPr id="37" name="roadmap-footer">
+            <a:extLst xmlns:a="http://schemas.openxmlformats.org/drawingml/2006/main">
+              <a:ext uri="{FF2B5EF4-FFF2-40B4-BE49-F238E27FC236}">
+                <a16:creationId xmlns:a16="http://schemas.microsoft.com/office/drawing/2014/main" id="{AADBD1D6-1A69-4CC5-902C-AB9F813175C7}"/>
+              </a:ext>
+            </a:extLst>
+          </p:cNvPr>
+          <p:cNvSpPr>
+            <a:spLocks xmlns:a="http://schemas.openxmlformats.org/drawingml/2006/main" noGrp="1"/>
+          </p:cNvSpPr>
+          <p:nvPr/>
+        </p:nvSpPr>
+        <p:spPr>
+          <a:xfrm xmlns:a="http://schemas.openxmlformats.org/drawingml/2006/main">
+            <a:off x="762000" y="5981700"/>
+            <a:ext cx="10668000" cy="400050"/>
           </a:xfrm>
           <a:prstGeom xmlns:a="http://schemas.openxmlformats.org/drawingml/2006/main" prst="rect">
             <a:avLst/>
@@ -5185,19 +5718,19 @@
           <a:lstStyle xmlns:a="http://schemas.openxmlformats.org/drawingml/2006/main"/>
           <a:p xmlns:a="http://schemas.openxmlformats.org/drawingml/2006/main">
             <a:pPr algn="ctr">
-              <a:defRPr sz="1650" b="1" i="0">
-                <a:solidFill>
-                  <a:srgbClr val="064E49"/>
-                </a:solidFill>
-              </a:defRPr>
-            </a:pPr>
-            <a:r>
-              <a:rPr sz="1650" b="1" i="0">
-                <a:solidFill>
-                  <a:srgbClr val="064E49"/>
-                </a:solidFill>
-              </a:rPr>
-              <a:t>This shows improvement, ownership, and the ability to respond to stakeholder feedback.</a:t>
+              <a:defRPr sz="1200" b="1">
+                <a:solidFill>
+                  <a:srgbClr val="314158"/>
+                </a:solidFill>
+              </a:defRPr>
+            </a:pPr>
+            <a:r>
+              <a:rPr sz="1200" b="1">
+                <a:solidFill>
+                  <a:srgbClr val="314158"/>
+                </a:solidFill>
+              </a:rPr>
+              <a:t>Positioning: this project is a strong prototype, not a production fraud engine. The roadmap shows exactly what would be needed to make it bank-grade.</a:t>
             </a:r>
           </a:p>
         </p:txBody>
@@ -5205,7 +5738,7 @@
     </p:spTree>
     <p:extLst>
       <p:ext uri="{BB962C8B-B14F-4D97-AF65-F5344CB8AC3E}">
-        <p14:creationId xmlns:p14="http://schemas.microsoft.com/office/powerpoint/2010/main" val="667184420"/>
+        <p14:creationId xmlns:p14="http://schemas.microsoft.com/office/powerpoint/2010/main" val="1959052225"/>
       </p:ext>
     </p:extLst>
   </p:cSld>
@@ -5236,7 +5769,7 @@
           <p:cNvPr id="1" name="">
             <a:extLst xmlns:a="http://schemas.openxmlformats.org/drawingml/2006/main">
               <a:ext uri="{FF2B5EF4-FFF2-40B4-BE49-F238E27FC236}">
-                <a16:creationId xmlns:a16="http://schemas.microsoft.com/office/drawing/2014/main" id="{33468402-2F43-470E-AC59-F87931562AE8}"/>
+                <a16:creationId xmlns:a16="http://schemas.microsoft.com/office/drawing/2014/main" id="{443BDF1C-E9E1-4069-950A-92909074D3C4}"/>
               </a:ext>
             </a:extLst>
           </p:cNvPr>
@@ -5264,6 +5797,7 @@
           <a:lstStyle xmlns:a="http://schemas.openxmlformats.org/drawingml/2006/main"/>
           <a:p xmlns:a="http://schemas.openxmlformats.org/drawingml/2006/main">
             <a:pPr algn="l">
+              <a:buNone/>
               <a:defRPr sz="1200" b="1" i="0">
                 <a:solidFill>
                   <a:srgbClr val="087B73"/>
@@ -5286,7 +5820,7 @@
           <p:cNvPr id="2" name="">
             <a:extLst xmlns:a="http://schemas.openxmlformats.org/drawingml/2006/main">
               <a:ext uri="{FF2B5EF4-FFF2-40B4-BE49-F238E27FC236}">
-                <a16:creationId xmlns:a16="http://schemas.microsoft.com/office/drawing/2014/main" id="{585A4E96-C27C-4395-9064-EFAE1DE7A2E6}"/>
+                <a16:creationId xmlns:a16="http://schemas.microsoft.com/office/drawing/2014/main" id="{7198A5F1-E7FF-43AF-84BB-CA4BAF9CDD26}"/>
               </a:ext>
             </a:extLst>
           </p:cNvPr>
@@ -5314,6 +5848,7 @@
           <a:lstStyle xmlns:a="http://schemas.openxmlformats.org/drawingml/2006/main"/>
           <a:p xmlns:a="http://schemas.openxmlformats.org/drawingml/2006/main">
             <a:pPr algn="l">
+              <a:buNone/>
               <a:defRPr sz="2850" b="1" i="0">
                 <a:solidFill>
                   <a:srgbClr val="111827"/>
@@ -5326,7 +5861,7 @@
                   <a:srgbClr val="111827"/>
                 </a:solidFill>
               </a:rPr>
-              <a:t>Final Conclusion</a:t>
+              <a:t>Improvements After Feedback</a:t>
             </a:r>
           </a:p>
         </p:txBody>
@@ -5336,7 +5871,7 @@
           <p:cNvPr id="3" name="">
             <a:extLst xmlns:a="http://schemas.openxmlformats.org/drawingml/2006/main">
               <a:ext uri="{FF2B5EF4-FFF2-40B4-BE49-F238E27FC236}">
-                <a16:creationId xmlns:a16="http://schemas.microsoft.com/office/drawing/2014/main" id="{B776F098-7EFB-450D-877B-78F942C775BE}"/>
+                <a16:creationId xmlns:a16="http://schemas.microsoft.com/office/drawing/2014/main" id="{E7D927F5-9360-49E3-8CE3-C402AC05E515}"/>
               </a:ext>
             </a:extLst>
           </p:cNvPr>
@@ -5364,6 +5899,7 @@
           <a:lstStyle xmlns:a="http://schemas.openxmlformats.org/drawingml/2006/main"/>
           <a:p xmlns:a="http://schemas.openxmlformats.org/drawingml/2006/main">
             <a:pPr algn="l">
+              <a:buNone/>
               <a:defRPr sz="1275" b="0" i="0">
                 <a:solidFill>
                   <a:srgbClr val="5F6F6C"/>
@@ -5376,7 +5912,7 @@
                   <a:srgbClr val="5F6F6C"/>
                 </a:solidFill>
               </a:rPr>
-              <a:t>The finished project demonstrates analytics, business judgement, deployment, and governance.</a:t>
+              <a:t>I used review comments to move the project from demo-quality to submission-ready.</a:t>
             </a:r>
           </a:p>
         </p:txBody>
@@ -5386,7 +5922,7 @@
           <p:cNvPr id="4" name="">
             <a:extLst xmlns:a="http://schemas.openxmlformats.org/drawingml/2006/main">
               <a:ext uri="{FF2B5EF4-FFF2-40B4-BE49-F238E27FC236}">
-                <a16:creationId xmlns:a16="http://schemas.microsoft.com/office/drawing/2014/main" id="{28A2B54F-4B5C-4AA8-8184-E66919B05EDC}"/>
+                <a16:creationId xmlns:a16="http://schemas.microsoft.com/office/drawing/2014/main" id="{A4805749-F068-447C-ADDD-05B7873759CD}"/>
               </a:ext>
             </a:extLst>
           </p:cNvPr>
@@ -5419,23 +5955,23 @@
           <p:cNvPr id="5" name="">
             <a:extLst xmlns:a="http://schemas.openxmlformats.org/drawingml/2006/main">
               <a:ext uri="{FF2B5EF4-FFF2-40B4-BE49-F238E27FC236}">
-                <a16:creationId xmlns:a16="http://schemas.microsoft.com/office/drawing/2014/main" id="{15E7A1B0-AE2B-4CE4-A089-BDF337491549}"/>
-              </a:ext>
-            </a:extLst>
-          </p:cNvPr>
-          <p:cNvSpPr>
-            <a:spLocks xmlns:a="http://schemas.openxmlformats.org/drawingml/2006/main" noGrp="1"/>
-          </p:cNvSpPr>
-          <p:nvPr/>
-        </p:nvSpPr>
-        <p:spPr>
-          <a:xfrm xmlns:a="http://schemas.openxmlformats.org/drawingml/2006/main">
-            <a:off x="914400" y="1600200"/>
-            <a:ext cx="4953000" cy="3390900"/>
+                <a16:creationId xmlns:a16="http://schemas.microsoft.com/office/drawing/2014/main" id="{5CFF7B15-09F9-4721-B31E-AAB612542A80}"/>
+              </a:ext>
+            </a:extLst>
+          </p:cNvPr>
+          <p:cNvSpPr>
+            <a:spLocks xmlns:a="http://schemas.openxmlformats.org/drawingml/2006/main" noGrp="1"/>
+          </p:cNvSpPr>
+          <p:nvPr/>
+        </p:nvSpPr>
+        <p:spPr>
+          <a:xfrm xmlns:a="http://schemas.openxmlformats.org/drawingml/2006/main">
+            <a:off x="914400" y="1619250"/>
+            <a:ext cx="4762500" cy="3638550"/>
           </a:xfrm>
           <a:prstGeom xmlns:a="http://schemas.openxmlformats.org/drawingml/2006/main" prst="roundRect">
             <a:avLst>
-              <a:gd name="adj" fmla="val 2247"/>
+              <a:gd name="adj" fmla="val 2094"/>
             </a:avLst>
           </a:prstGeom>
           <a:solidFill xmlns:a="http://schemas.openxmlformats.org/drawingml/2006/main">
@@ -5454,47 +5990,48 @@
           <p:cNvPr id="6" name="">
             <a:extLst xmlns:a="http://schemas.openxmlformats.org/drawingml/2006/main">
               <a:ext uri="{FF2B5EF4-FFF2-40B4-BE49-F238E27FC236}">
-                <a16:creationId xmlns:a16="http://schemas.microsoft.com/office/drawing/2014/main" id="{FB3F5675-51E8-45AD-A7A4-E428210212E1}"/>
-              </a:ext>
-            </a:extLst>
-          </p:cNvPr>
-          <p:cNvSpPr>
-            <a:spLocks xmlns:a="http://schemas.openxmlformats.org/drawingml/2006/main" noGrp="1"/>
-          </p:cNvSpPr>
-          <p:nvPr/>
-        </p:nvSpPr>
-        <p:spPr>
-          <a:xfrm xmlns:a="http://schemas.openxmlformats.org/drawingml/2006/main">
-            <a:off x="1200150" y="1905000"/>
-            <a:ext cx="4000500" cy="285750"/>
-          </a:xfrm>
-          <a:prstGeom xmlns:a="http://schemas.openxmlformats.org/drawingml/2006/main" prst="rect">
-            <a:avLst/>
-          </a:prstGeom>
-          <a:noFill xmlns:a="http://schemas.openxmlformats.org/drawingml/2006/main"/>
-          <a:ln xmlns:a="http://schemas.openxmlformats.org/drawingml/2006/main" w="0">
-            <a:noFill/>
-            <a:prstDash val="solid"/>
-          </a:ln>
-        </p:spPr>
-        <p:txBody>
-          <a:bodyPr xmlns:a="http://schemas.openxmlformats.org/drawingml/2006/main"/>
-          <a:lstStyle xmlns:a="http://schemas.openxmlformats.org/drawingml/2006/main"/>
-          <a:p xmlns:a="http://schemas.openxmlformats.org/drawingml/2006/main">
-            <a:pPr algn="l">
-              <a:defRPr sz="1950" b="1" i="0">
-                <a:solidFill>
-                  <a:srgbClr val="111827"/>
-                </a:solidFill>
-              </a:defRPr>
-            </a:pPr>
-            <a:r>
-              <a:rPr sz="1950" b="1" i="0">
-                <a:solidFill>
-                  <a:srgbClr val="111827"/>
-                </a:solidFill>
-              </a:rPr>
-              <a:t>What I concluded</a:t>
+                <a16:creationId xmlns:a16="http://schemas.microsoft.com/office/drawing/2014/main" id="{8781A8B0-8107-40BE-A426-1B1F9199C0D1}"/>
+              </a:ext>
+            </a:extLst>
+          </p:cNvPr>
+          <p:cNvSpPr>
+            <a:spLocks xmlns:a="http://schemas.openxmlformats.org/drawingml/2006/main" noGrp="1"/>
+          </p:cNvSpPr>
+          <p:nvPr/>
+        </p:nvSpPr>
+        <p:spPr>
+          <a:xfrm xmlns:a="http://schemas.openxmlformats.org/drawingml/2006/main">
+            <a:off x="1200150" y="1924050"/>
+            <a:ext cx="3810000" cy="285750"/>
+          </a:xfrm>
+          <a:prstGeom xmlns:a="http://schemas.openxmlformats.org/drawingml/2006/main" prst="rect">
+            <a:avLst/>
+          </a:prstGeom>
+          <a:noFill xmlns:a="http://schemas.openxmlformats.org/drawingml/2006/main"/>
+          <a:ln xmlns:a="http://schemas.openxmlformats.org/drawingml/2006/main" w="0">
+            <a:noFill/>
+            <a:prstDash val="solid"/>
+          </a:ln>
+        </p:spPr>
+        <p:txBody>
+          <a:bodyPr xmlns:a="http://schemas.openxmlformats.org/drawingml/2006/main"/>
+          <a:lstStyle xmlns:a="http://schemas.openxmlformats.org/drawingml/2006/main"/>
+          <a:p xmlns:a="http://schemas.openxmlformats.org/drawingml/2006/main">
+            <a:pPr algn="l">
+              <a:buNone/>
+              <a:defRPr sz="1875" b="1" i="0">
+                <a:solidFill>
+                  <a:srgbClr val="111827"/>
+                </a:solidFill>
+              </a:defRPr>
+            </a:pPr>
+            <a:r>
+              <a:rPr sz="1875" b="1" i="0">
+                <a:solidFill>
+                  <a:srgbClr val="111827"/>
+                </a:solidFill>
+              </a:rPr>
+              <a:t>Before feedback</a:t>
             </a:r>
           </a:p>
         </p:txBody>
@@ -5504,47 +6041,48 @@
           <p:cNvPr id="7" name="">
             <a:extLst xmlns:a="http://schemas.openxmlformats.org/drawingml/2006/main">
               <a:ext uri="{FF2B5EF4-FFF2-40B4-BE49-F238E27FC236}">
-                <a16:creationId xmlns:a16="http://schemas.microsoft.com/office/drawing/2014/main" id="{18C032F5-46E4-4A6C-9459-70B707A8A1EB}"/>
-              </a:ext>
-            </a:extLst>
-          </p:cNvPr>
-          <p:cNvSpPr>
-            <a:spLocks xmlns:a="http://schemas.openxmlformats.org/drawingml/2006/main" noGrp="1"/>
-          </p:cNvSpPr>
-          <p:nvPr/>
-        </p:nvSpPr>
-        <p:spPr>
-          <a:xfrm xmlns:a="http://schemas.openxmlformats.org/drawingml/2006/main">
-            <a:off x="1200150" y="2419350"/>
-            <a:ext cx="4286250" cy="1009650"/>
-          </a:xfrm>
-          <a:prstGeom xmlns:a="http://schemas.openxmlformats.org/drawingml/2006/main" prst="rect">
-            <a:avLst/>
-          </a:prstGeom>
-          <a:noFill xmlns:a="http://schemas.openxmlformats.org/drawingml/2006/main"/>
-          <a:ln xmlns:a="http://schemas.openxmlformats.org/drawingml/2006/main" w="0">
-            <a:noFill/>
-            <a:prstDash val="solid"/>
-          </a:ln>
-        </p:spPr>
-        <p:txBody>
-          <a:bodyPr xmlns:a="http://schemas.openxmlformats.org/drawingml/2006/main"/>
-          <a:lstStyle xmlns:a="http://schemas.openxmlformats.org/drawingml/2006/main"/>
-          <a:p xmlns:a="http://schemas.openxmlformats.org/drawingml/2006/main">
-            <a:pPr algn="l">
-              <a:defRPr sz="1650" b="0" i="0">
-                <a:solidFill>
-                  <a:srgbClr val="111827"/>
-                </a:solidFill>
-              </a:defRPr>
-            </a:pPr>
-            <a:r>
-              <a:rPr sz="1650" b="0" i="0">
-                <a:solidFill>
-                  <a:srgbClr val="111827"/>
-                </a:solidFill>
-              </a:rPr>
-              <a:t>A fraud model is most valuable when it helps a bank answer: which cases should be reviewed first, why are they risky, how many false positives will we create, and what controls are needed before use?</a:t>
+                <a16:creationId xmlns:a16="http://schemas.microsoft.com/office/drawing/2014/main" id="{1F13C81D-BC97-4163-9DCC-2BB53E6A3DC2}"/>
+              </a:ext>
+            </a:extLst>
+          </p:cNvPr>
+          <p:cNvSpPr>
+            <a:spLocks xmlns:a="http://schemas.openxmlformats.org/drawingml/2006/main" noGrp="1"/>
+          </p:cNvSpPr>
+          <p:nvPr/>
+        </p:nvSpPr>
+        <p:spPr>
+          <a:xfrm xmlns:a="http://schemas.openxmlformats.org/drawingml/2006/main">
+            <a:off x="1219200" y="2476500"/>
+            <a:ext cx="171450" cy="228600"/>
+          </a:xfrm>
+          <a:prstGeom xmlns:a="http://schemas.openxmlformats.org/drawingml/2006/main" prst="rect">
+            <a:avLst/>
+          </a:prstGeom>
+          <a:noFill xmlns:a="http://schemas.openxmlformats.org/drawingml/2006/main"/>
+          <a:ln xmlns:a="http://schemas.openxmlformats.org/drawingml/2006/main" w="0">
+            <a:noFill/>
+            <a:prstDash val="solid"/>
+          </a:ln>
+        </p:spPr>
+        <p:txBody>
+          <a:bodyPr xmlns:a="http://schemas.openxmlformats.org/drawingml/2006/main"/>
+          <a:lstStyle xmlns:a="http://schemas.openxmlformats.org/drawingml/2006/main"/>
+          <a:p xmlns:a="http://schemas.openxmlformats.org/drawingml/2006/main">
+            <a:pPr algn="l">
+              <a:buNone/>
+              <a:defRPr sz="1350" b="1" i="0">
+                <a:solidFill>
+                  <a:srgbClr val="087B73"/>
+                </a:solidFill>
+              </a:defRPr>
+            </a:pPr>
+            <a:r>
+              <a:rPr sz="1350" b="1" i="0">
+                <a:solidFill>
+                  <a:srgbClr val="087B73"/>
+                </a:solidFill>
+              </a:rPr>
+              <a:t>-</a:t>
             </a:r>
           </a:p>
         </p:txBody>
@@ -5554,47 +6092,48 @@
           <p:cNvPr id="8" name="">
             <a:extLst xmlns:a="http://schemas.openxmlformats.org/drawingml/2006/main">
               <a:ext uri="{FF2B5EF4-FFF2-40B4-BE49-F238E27FC236}">
-                <a16:creationId xmlns:a16="http://schemas.microsoft.com/office/drawing/2014/main" id="{17356620-132C-450E-912D-57B4AE0FEDB6}"/>
-              </a:ext>
-            </a:extLst>
-          </p:cNvPr>
-          <p:cNvSpPr>
-            <a:spLocks xmlns:a="http://schemas.openxmlformats.org/drawingml/2006/main" noGrp="1"/>
-          </p:cNvSpPr>
-          <p:nvPr/>
-        </p:nvSpPr>
-        <p:spPr>
-          <a:xfrm xmlns:a="http://schemas.openxmlformats.org/drawingml/2006/main">
-            <a:off x="1200150" y="3867150"/>
-            <a:ext cx="4286250" cy="571500"/>
-          </a:xfrm>
-          <a:prstGeom xmlns:a="http://schemas.openxmlformats.org/drawingml/2006/main" prst="rect">
-            <a:avLst/>
-          </a:prstGeom>
-          <a:noFill xmlns:a="http://schemas.openxmlformats.org/drawingml/2006/main"/>
-          <a:ln xmlns:a="http://schemas.openxmlformats.org/drawingml/2006/main" w="0">
-            <a:noFill/>
-            <a:prstDash val="solid"/>
-          </a:ln>
-        </p:spPr>
-        <p:txBody>
-          <a:bodyPr xmlns:a="http://schemas.openxmlformats.org/drawingml/2006/main"/>
-          <a:lstStyle xmlns:a="http://schemas.openxmlformats.org/drawingml/2006/main"/>
-          <a:p xmlns:a="http://schemas.openxmlformats.org/drawingml/2006/main">
-            <a:pPr algn="l">
-              <a:defRPr sz="1800" b="1" i="0">
-                <a:solidFill>
-                  <a:srgbClr val="064E49"/>
-                </a:solidFill>
-              </a:defRPr>
-            </a:pPr>
-            <a:r>
-              <a:rPr sz="1800" b="1" i="0">
-                <a:solidFill>
-                  <a:srgbClr val="064E49"/>
-                </a:solidFill>
-              </a:rPr>
-              <a:t>That is why my final output is a control tower, not only a prediction notebook.</a:t>
+                <a16:creationId xmlns:a16="http://schemas.microsoft.com/office/drawing/2014/main" id="{0B7D87DF-9C7D-453A-A815-785CB010473F}"/>
+              </a:ext>
+            </a:extLst>
+          </p:cNvPr>
+          <p:cNvSpPr>
+            <a:spLocks xmlns:a="http://schemas.openxmlformats.org/drawingml/2006/main" noGrp="1"/>
+          </p:cNvSpPr>
+          <p:nvPr/>
+        </p:nvSpPr>
+        <p:spPr>
+          <a:xfrm xmlns:a="http://schemas.openxmlformats.org/drawingml/2006/main">
+            <a:off x="1466850" y="2476500"/>
+            <a:ext cx="3657600" cy="419100"/>
+          </a:xfrm>
+          <a:prstGeom xmlns:a="http://schemas.openxmlformats.org/drawingml/2006/main" prst="rect">
+            <a:avLst/>
+          </a:prstGeom>
+          <a:noFill xmlns:a="http://schemas.openxmlformats.org/drawingml/2006/main"/>
+          <a:ln xmlns:a="http://schemas.openxmlformats.org/drawingml/2006/main" w="0">
+            <a:noFill/>
+            <a:prstDash val="solid"/>
+          </a:ln>
+        </p:spPr>
+        <p:txBody>
+          <a:bodyPr xmlns:a="http://schemas.openxmlformats.org/drawingml/2006/main"/>
+          <a:lstStyle xmlns:a="http://schemas.openxmlformats.org/drawingml/2006/main"/>
+          <a:p xmlns:a="http://schemas.openxmlformats.org/drawingml/2006/main">
+            <a:pPr algn="l">
+              <a:buNone/>
+              <a:defRPr sz="1350" b="0" i="0">
+                <a:solidFill>
+                  <a:srgbClr val="111827"/>
+                </a:solidFill>
+              </a:defRPr>
+            </a:pPr>
+            <a:r>
+              <a:rPr sz="1350" b="0" i="0">
+                <a:solidFill>
+                  <a:srgbClr val="111827"/>
+                </a:solidFill>
+              </a:rPr>
+              <a:t>The model and app worked, but the story was too product-summary focused.</a:t>
             </a:r>
           </a:p>
         </p:txBody>
@@ -5604,23 +6143,329 @@
           <p:cNvPr id="9" name="">
             <a:extLst xmlns:a="http://schemas.openxmlformats.org/drawingml/2006/main">
               <a:ext uri="{FF2B5EF4-FFF2-40B4-BE49-F238E27FC236}">
-                <a16:creationId xmlns:a16="http://schemas.microsoft.com/office/drawing/2014/main" id="{2A71F6D5-AE64-4265-8D01-D3ACA5814E00}"/>
-              </a:ext>
-            </a:extLst>
-          </p:cNvPr>
-          <p:cNvSpPr>
-            <a:spLocks xmlns:a="http://schemas.openxmlformats.org/drawingml/2006/main" noGrp="1"/>
-          </p:cNvSpPr>
-          <p:nvPr/>
-        </p:nvSpPr>
-        <p:spPr>
-          <a:xfrm xmlns:a="http://schemas.openxmlformats.org/drawingml/2006/main">
-            <a:off x="6534150" y="1600200"/>
-            <a:ext cx="4762500" cy="3390900"/>
+                <a16:creationId xmlns:a16="http://schemas.microsoft.com/office/drawing/2014/main" id="{F34933B3-FCAC-4030-BA2D-1817E20CD46B}"/>
+              </a:ext>
+            </a:extLst>
+          </p:cNvPr>
+          <p:cNvSpPr>
+            <a:spLocks xmlns:a="http://schemas.openxmlformats.org/drawingml/2006/main" noGrp="1"/>
+          </p:cNvSpPr>
+          <p:nvPr/>
+        </p:nvSpPr>
+        <p:spPr>
+          <a:xfrm xmlns:a="http://schemas.openxmlformats.org/drawingml/2006/main">
+            <a:off x="1219200" y="2895600"/>
+            <a:ext cx="171450" cy="228600"/>
+          </a:xfrm>
+          <a:prstGeom xmlns:a="http://schemas.openxmlformats.org/drawingml/2006/main" prst="rect">
+            <a:avLst/>
+          </a:prstGeom>
+          <a:noFill xmlns:a="http://schemas.openxmlformats.org/drawingml/2006/main"/>
+          <a:ln xmlns:a="http://schemas.openxmlformats.org/drawingml/2006/main" w="0">
+            <a:noFill/>
+            <a:prstDash val="solid"/>
+          </a:ln>
+        </p:spPr>
+        <p:txBody>
+          <a:bodyPr xmlns:a="http://schemas.openxmlformats.org/drawingml/2006/main"/>
+          <a:lstStyle xmlns:a="http://schemas.openxmlformats.org/drawingml/2006/main"/>
+          <a:p xmlns:a="http://schemas.openxmlformats.org/drawingml/2006/main">
+            <a:pPr algn="l">
+              <a:buNone/>
+              <a:defRPr sz="1350" b="1" i="0">
+                <a:solidFill>
+                  <a:srgbClr val="087B73"/>
+                </a:solidFill>
+              </a:defRPr>
+            </a:pPr>
+            <a:r>
+              <a:rPr sz="1350" b="1" i="0">
+                <a:solidFill>
+                  <a:srgbClr val="087B73"/>
+                </a:solidFill>
+              </a:rPr>
+              <a:t>-</a:t>
+            </a:r>
+          </a:p>
+        </p:txBody>
+      </p:sp>
+      <p:sp>
+        <p:nvSpPr>
+          <p:cNvPr id="10" name="">
+            <a:extLst xmlns:a="http://schemas.openxmlformats.org/drawingml/2006/main">
+              <a:ext uri="{FF2B5EF4-FFF2-40B4-BE49-F238E27FC236}">
+                <a16:creationId xmlns:a16="http://schemas.microsoft.com/office/drawing/2014/main" id="{87CDF2F8-42DE-4CDA-816B-A41B0B5DE46D}"/>
+              </a:ext>
+            </a:extLst>
+          </p:cNvPr>
+          <p:cNvSpPr>
+            <a:spLocks xmlns:a="http://schemas.openxmlformats.org/drawingml/2006/main" noGrp="1"/>
+          </p:cNvSpPr>
+          <p:nvPr/>
+        </p:nvSpPr>
+        <p:spPr>
+          <a:xfrm xmlns:a="http://schemas.openxmlformats.org/drawingml/2006/main">
+            <a:off x="1466850" y="2895600"/>
+            <a:ext cx="3657600" cy="419100"/>
+          </a:xfrm>
+          <a:prstGeom xmlns:a="http://schemas.openxmlformats.org/drawingml/2006/main" prst="rect">
+            <a:avLst/>
+          </a:prstGeom>
+          <a:noFill xmlns:a="http://schemas.openxmlformats.org/drawingml/2006/main"/>
+          <a:ln xmlns:a="http://schemas.openxmlformats.org/drawingml/2006/main" w="0">
+            <a:noFill/>
+            <a:prstDash val="solid"/>
+          </a:ln>
+        </p:spPr>
+        <p:txBody>
+          <a:bodyPr xmlns:a="http://schemas.openxmlformats.org/drawingml/2006/main"/>
+          <a:lstStyle xmlns:a="http://schemas.openxmlformats.org/drawingml/2006/main"/>
+          <a:p xmlns:a="http://schemas.openxmlformats.org/drawingml/2006/main">
+            <a:pPr algn="l">
+              <a:buNone/>
+              <a:defRPr sz="1350" b="0" i="0">
+                <a:solidFill>
+                  <a:srgbClr val="111827"/>
+                </a:solidFill>
+              </a:defRPr>
+            </a:pPr>
+            <a:r>
+              <a:rPr sz="1350" b="0" i="0">
+                <a:solidFill>
+                  <a:srgbClr val="111827"/>
+                </a:solidFill>
+              </a:rPr>
+              <a:t>Some app labels were too technical or looked like buttons.</a:t>
+            </a:r>
+          </a:p>
+        </p:txBody>
+      </p:sp>
+      <p:sp>
+        <p:nvSpPr>
+          <p:cNvPr id="11" name="">
+            <a:extLst xmlns:a="http://schemas.openxmlformats.org/drawingml/2006/main">
+              <a:ext uri="{FF2B5EF4-FFF2-40B4-BE49-F238E27FC236}">
+                <a16:creationId xmlns:a16="http://schemas.microsoft.com/office/drawing/2014/main" id="{C45AFFC1-B873-4976-9FF1-13D6D4083BAE}"/>
+              </a:ext>
+            </a:extLst>
+          </p:cNvPr>
+          <p:cNvSpPr>
+            <a:spLocks xmlns:a="http://schemas.openxmlformats.org/drawingml/2006/main" noGrp="1"/>
+          </p:cNvSpPr>
+          <p:nvPr/>
+        </p:nvSpPr>
+        <p:spPr>
+          <a:xfrm xmlns:a="http://schemas.openxmlformats.org/drawingml/2006/main">
+            <a:off x="1219200" y="3314700"/>
+            <a:ext cx="171450" cy="228600"/>
+          </a:xfrm>
+          <a:prstGeom xmlns:a="http://schemas.openxmlformats.org/drawingml/2006/main" prst="rect">
+            <a:avLst/>
+          </a:prstGeom>
+          <a:noFill xmlns:a="http://schemas.openxmlformats.org/drawingml/2006/main"/>
+          <a:ln xmlns:a="http://schemas.openxmlformats.org/drawingml/2006/main" w="0">
+            <a:noFill/>
+            <a:prstDash val="solid"/>
+          </a:ln>
+        </p:spPr>
+        <p:txBody>
+          <a:bodyPr xmlns:a="http://schemas.openxmlformats.org/drawingml/2006/main"/>
+          <a:lstStyle xmlns:a="http://schemas.openxmlformats.org/drawingml/2006/main"/>
+          <a:p xmlns:a="http://schemas.openxmlformats.org/drawingml/2006/main">
+            <a:pPr algn="l">
+              <a:buNone/>
+              <a:defRPr sz="1350" b="1" i="0">
+                <a:solidFill>
+                  <a:srgbClr val="087B73"/>
+                </a:solidFill>
+              </a:defRPr>
+            </a:pPr>
+            <a:r>
+              <a:rPr sz="1350" b="1" i="0">
+                <a:solidFill>
+                  <a:srgbClr val="087B73"/>
+                </a:solidFill>
+              </a:rPr>
+              <a:t>-</a:t>
+            </a:r>
+          </a:p>
+        </p:txBody>
+      </p:sp>
+      <p:sp>
+        <p:nvSpPr>
+          <p:cNvPr id="12" name="">
+            <a:extLst xmlns:a="http://schemas.openxmlformats.org/drawingml/2006/main">
+              <a:ext uri="{FF2B5EF4-FFF2-40B4-BE49-F238E27FC236}">
+                <a16:creationId xmlns:a16="http://schemas.microsoft.com/office/drawing/2014/main" id="{1CCAAD9C-ED69-4FF9-A080-B7454726C0B6}"/>
+              </a:ext>
+            </a:extLst>
+          </p:cNvPr>
+          <p:cNvSpPr>
+            <a:spLocks xmlns:a="http://schemas.openxmlformats.org/drawingml/2006/main" noGrp="1"/>
+          </p:cNvSpPr>
+          <p:nvPr/>
+        </p:nvSpPr>
+        <p:spPr>
+          <a:xfrm xmlns:a="http://schemas.openxmlformats.org/drawingml/2006/main">
+            <a:off x="1466850" y="3314700"/>
+            <a:ext cx="3657600" cy="419100"/>
+          </a:xfrm>
+          <a:prstGeom xmlns:a="http://schemas.openxmlformats.org/drawingml/2006/main" prst="rect">
+            <a:avLst/>
+          </a:prstGeom>
+          <a:noFill xmlns:a="http://schemas.openxmlformats.org/drawingml/2006/main"/>
+          <a:ln xmlns:a="http://schemas.openxmlformats.org/drawingml/2006/main" w="0">
+            <a:noFill/>
+            <a:prstDash val="solid"/>
+          </a:ln>
+        </p:spPr>
+        <p:txBody>
+          <a:bodyPr xmlns:a="http://schemas.openxmlformats.org/drawingml/2006/main"/>
+          <a:lstStyle xmlns:a="http://schemas.openxmlformats.org/drawingml/2006/main"/>
+          <a:p xmlns:a="http://schemas.openxmlformats.org/drawingml/2006/main">
+            <a:pPr algn="l">
+              <a:buNone/>
+              <a:defRPr sz="1350" b="0" i="0">
+                <a:solidFill>
+                  <a:srgbClr val="111827"/>
+                </a:solidFill>
+              </a:defRPr>
+            </a:pPr>
+            <a:r>
+              <a:rPr sz="1350" b="0" i="0">
+                <a:solidFill>
+                  <a:srgbClr val="111827"/>
+                </a:solidFill>
+              </a:rPr>
+              <a:t>The export report was not as reviewer-friendly as it should be.</a:t>
+            </a:r>
+          </a:p>
+        </p:txBody>
+      </p:sp>
+      <p:sp>
+        <p:nvSpPr>
+          <p:cNvPr id="13" name="">
+            <a:extLst xmlns:a="http://schemas.openxmlformats.org/drawingml/2006/main">
+              <a:ext uri="{FF2B5EF4-FFF2-40B4-BE49-F238E27FC236}">
+                <a16:creationId xmlns:a16="http://schemas.microsoft.com/office/drawing/2014/main" id="{652894F0-FB2C-4973-94C2-434D1B7779EF}"/>
+              </a:ext>
+            </a:extLst>
+          </p:cNvPr>
+          <p:cNvSpPr>
+            <a:spLocks xmlns:a="http://schemas.openxmlformats.org/drawingml/2006/main" noGrp="1"/>
+          </p:cNvSpPr>
+          <p:nvPr/>
+        </p:nvSpPr>
+        <p:spPr>
+          <a:xfrm xmlns:a="http://schemas.openxmlformats.org/drawingml/2006/main">
+            <a:off x="1219200" y="3733800"/>
+            <a:ext cx="171450" cy="228600"/>
+          </a:xfrm>
+          <a:prstGeom xmlns:a="http://schemas.openxmlformats.org/drawingml/2006/main" prst="rect">
+            <a:avLst/>
+          </a:prstGeom>
+          <a:noFill xmlns:a="http://schemas.openxmlformats.org/drawingml/2006/main"/>
+          <a:ln xmlns:a="http://schemas.openxmlformats.org/drawingml/2006/main" w="0">
+            <a:noFill/>
+            <a:prstDash val="solid"/>
+          </a:ln>
+        </p:spPr>
+        <p:txBody>
+          <a:bodyPr xmlns:a="http://schemas.openxmlformats.org/drawingml/2006/main"/>
+          <a:lstStyle xmlns:a="http://schemas.openxmlformats.org/drawingml/2006/main"/>
+          <a:p xmlns:a="http://schemas.openxmlformats.org/drawingml/2006/main">
+            <a:pPr algn="l">
+              <a:buNone/>
+              <a:defRPr sz="1350" b="1" i="0">
+                <a:solidFill>
+                  <a:srgbClr val="087B73"/>
+                </a:solidFill>
+              </a:defRPr>
+            </a:pPr>
+            <a:r>
+              <a:rPr sz="1350" b="1" i="0">
+                <a:solidFill>
+                  <a:srgbClr val="087B73"/>
+                </a:solidFill>
+              </a:rPr>
+              <a:t>-</a:t>
+            </a:r>
+          </a:p>
+        </p:txBody>
+      </p:sp>
+      <p:sp>
+        <p:nvSpPr>
+          <p:cNvPr id="14" name="">
+            <a:extLst xmlns:a="http://schemas.openxmlformats.org/drawingml/2006/main">
+              <a:ext uri="{FF2B5EF4-FFF2-40B4-BE49-F238E27FC236}">
+                <a16:creationId xmlns:a16="http://schemas.microsoft.com/office/drawing/2014/main" id="{B283CF40-0E7B-455B-9AD7-8B0796049CD1}"/>
+              </a:ext>
+            </a:extLst>
+          </p:cNvPr>
+          <p:cNvSpPr>
+            <a:spLocks xmlns:a="http://schemas.openxmlformats.org/drawingml/2006/main" noGrp="1"/>
+          </p:cNvSpPr>
+          <p:nvPr/>
+        </p:nvSpPr>
+        <p:spPr>
+          <a:xfrm xmlns:a="http://schemas.openxmlformats.org/drawingml/2006/main">
+            <a:off x="1466850" y="3733800"/>
+            <a:ext cx="3657600" cy="419100"/>
+          </a:xfrm>
+          <a:prstGeom xmlns:a="http://schemas.openxmlformats.org/drawingml/2006/main" prst="rect">
+            <a:avLst/>
+          </a:prstGeom>
+          <a:noFill xmlns:a="http://schemas.openxmlformats.org/drawingml/2006/main"/>
+          <a:ln xmlns:a="http://schemas.openxmlformats.org/drawingml/2006/main" w="0">
+            <a:noFill/>
+            <a:prstDash val="solid"/>
+          </a:ln>
+        </p:spPr>
+        <p:txBody>
+          <a:bodyPr xmlns:a="http://schemas.openxmlformats.org/drawingml/2006/main"/>
+          <a:lstStyle xmlns:a="http://schemas.openxmlformats.org/drawingml/2006/main"/>
+          <a:p xmlns:a="http://schemas.openxmlformats.org/drawingml/2006/main">
+            <a:pPr algn="l">
+              <a:buNone/>
+              <a:defRPr sz="1350" b="0" i="0">
+                <a:solidFill>
+                  <a:srgbClr val="111827"/>
+                </a:solidFill>
+              </a:defRPr>
+            </a:pPr>
+            <a:r>
+              <a:rPr sz="1350" b="0" i="0">
+                <a:solidFill>
+                  <a:srgbClr val="111827"/>
+                </a:solidFill>
+              </a:rPr>
+              <a:t>The first PPT did not clearly explain the journey.</a:t>
+            </a:r>
+          </a:p>
+        </p:txBody>
+      </p:sp>
+      <p:sp>
+        <p:nvSpPr>
+          <p:cNvPr id="15" name="">
+            <a:extLst xmlns:a="http://schemas.openxmlformats.org/drawingml/2006/main">
+              <a:ext uri="{FF2B5EF4-FFF2-40B4-BE49-F238E27FC236}">
+                <a16:creationId xmlns:a16="http://schemas.microsoft.com/office/drawing/2014/main" id="{E0080286-402D-4C59-A1CD-A9B35F1181C5}"/>
+              </a:ext>
+            </a:extLst>
+          </p:cNvPr>
+          <p:cNvSpPr>
+            <a:spLocks xmlns:a="http://schemas.openxmlformats.org/drawingml/2006/main" noGrp="1"/>
+          </p:cNvSpPr>
+          <p:nvPr/>
+        </p:nvSpPr>
+        <p:spPr>
+          <a:xfrm xmlns:a="http://schemas.openxmlformats.org/drawingml/2006/main">
+            <a:off x="6515100" y="1619250"/>
+            <a:ext cx="4762500" cy="3638550"/>
           </a:xfrm>
           <a:prstGeom xmlns:a="http://schemas.openxmlformats.org/drawingml/2006/main" prst="roundRect">
             <a:avLst>
-              <a:gd name="adj" fmla="val 2247"/>
+              <a:gd name="adj" fmla="val 2094"/>
             </a:avLst>
           </a:prstGeom>
           <a:solidFill xmlns:a="http://schemas.openxmlformats.org/drawingml/2006/main">
@@ -5636,6 +6481,954 @@
       </p:sp>
       <p:sp>
         <p:nvSpPr>
+          <p:cNvPr id="16" name="">
+            <a:extLst xmlns:a="http://schemas.openxmlformats.org/drawingml/2006/main">
+              <a:ext uri="{FF2B5EF4-FFF2-40B4-BE49-F238E27FC236}">
+                <a16:creationId xmlns:a16="http://schemas.microsoft.com/office/drawing/2014/main" id="{3742BC06-EEF9-4CFC-9F8A-05E4D4D77C85}"/>
+              </a:ext>
+            </a:extLst>
+          </p:cNvPr>
+          <p:cNvSpPr>
+            <a:spLocks xmlns:a="http://schemas.openxmlformats.org/drawingml/2006/main" noGrp="1"/>
+          </p:cNvSpPr>
+          <p:nvPr/>
+        </p:nvSpPr>
+        <p:spPr>
+          <a:xfrm xmlns:a="http://schemas.openxmlformats.org/drawingml/2006/main">
+            <a:off x="6800850" y="1924050"/>
+            <a:ext cx="3810000" cy="285750"/>
+          </a:xfrm>
+          <a:prstGeom xmlns:a="http://schemas.openxmlformats.org/drawingml/2006/main" prst="rect">
+            <a:avLst/>
+          </a:prstGeom>
+          <a:noFill xmlns:a="http://schemas.openxmlformats.org/drawingml/2006/main"/>
+          <a:ln xmlns:a="http://schemas.openxmlformats.org/drawingml/2006/main" w="0">
+            <a:noFill/>
+            <a:prstDash val="solid"/>
+          </a:ln>
+        </p:spPr>
+        <p:txBody>
+          <a:bodyPr xmlns:a="http://schemas.openxmlformats.org/drawingml/2006/main"/>
+          <a:lstStyle xmlns:a="http://schemas.openxmlformats.org/drawingml/2006/main"/>
+          <a:p xmlns:a="http://schemas.openxmlformats.org/drawingml/2006/main">
+            <a:pPr algn="l">
+              <a:buNone/>
+              <a:defRPr sz="1875" b="1" i="0">
+                <a:solidFill>
+                  <a:srgbClr val="064E49"/>
+                </a:solidFill>
+              </a:defRPr>
+            </a:pPr>
+            <a:r>
+              <a:rPr sz="1875" b="1" i="0">
+                <a:solidFill>
+                  <a:srgbClr val="064E49"/>
+                </a:solidFill>
+              </a:rPr>
+              <a:t>After feedback</a:t>
+            </a:r>
+          </a:p>
+        </p:txBody>
+      </p:sp>
+      <p:sp>
+        <p:nvSpPr>
+          <p:cNvPr id="17" name="">
+            <a:extLst xmlns:a="http://schemas.openxmlformats.org/drawingml/2006/main">
+              <a:ext uri="{FF2B5EF4-FFF2-40B4-BE49-F238E27FC236}">
+                <a16:creationId xmlns:a16="http://schemas.microsoft.com/office/drawing/2014/main" id="{E356636E-6F4A-4799-AF8C-A9EACB4B19CC}"/>
+              </a:ext>
+            </a:extLst>
+          </p:cNvPr>
+          <p:cNvSpPr>
+            <a:spLocks xmlns:a="http://schemas.openxmlformats.org/drawingml/2006/main" noGrp="1"/>
+          </p:cNvSpPr>
+          <p:nvPr/>
+        </p:nvSpPr>
+        <p:spPr>
+          <a:xfrm xmlns:a="http://schemas.openxmlformats.org/drawingml/2006/main">
+            <a:off x="6819900" y="2476500"/>
+            <a:ext cx="171450" cy="228600"/>
+          </a:xfrm>
+          <a:prstGeom xmlns:a="http://schemas.openxmlformats.org/drawingml/2006/main" prst="rect">
+            <a:avLst/>
+          </a:prstGeom>
+          <a:noFill xmlns:a="http://schemas.openxmlformats.org/drawingml/2006/main"/>
+          <a:ln xmlns:a="http://schemas.openxmlformats.org/drawingml/2006/main" w="0">
+            <a:noFill/>
+            <a:prstDash val="solid"/>
+          </a:ln>
+        </p:spPr>
+        <p:txBody>
+          <a:bodyPr xmlns:a="http://schemas.openxmlformats.org/drawingml/2006/main"/>
+          <a:lstStyle xmlns:a="http://schemas.openxmlformats.org/drawingml/2006/main"/>
+          <a:p xmlns:a="http://schemas.openxmlformats.org/drawingml/2006/main">
+            <a:pPr algn="l">
+              <a:buNone/>
+              <a:defRPr sz="1350" b="1" i="0">
+                <a:solidFill>
+                  <a:srgbClr val="087B73"/>
+                </a:solidFill>
+              </a:defRPr>
+            </a:pPr>
+            <a:r>
+              <a:rPr sz="1350" b="1" i="0">
+                <a:solidFill>
+                  <a:srgbClr val="087B73"/>
+                </a:solidFill>
+              </a:rPr>
+              <a:t>-</a:t>
+            </a:r>
+          </a:p>
+        </p:txBody>
+      </p:sp>
+      <p:sp>
+        <p:nvSpPr>
+          <p:cNvPr id="18" name="">
+            <a:extLst xmlns:a="http://schemas.openxmlformats.org/drawingml/2006/main">
+              <a:ext uri="{FF2B5EF4-FFF2-40B4-BE49-F238E27FC236}">
+                <a16:creationId xmlns:a16="http://schemas.microsoft.com/office/drawing/2014/main" id="{E7DCD24D-F9A0-4EFB-8774-BAC7DE9E485F}"/>
+              </a:ext>
+            </a:extLst>
+          </p:cNvPr>
+          <p:cNvSpPr>
+            <a:spLocks xmlns:a="http://schemas.openxmlformats.org/drawingml/2006/main" noGrp="1"/>
+          </p:cNvSpPr>
+          <p:nvPr/>
+        </p:nvSpPr>
+        <p:spPr>
+          <a:xfrm xmlns:a="http://schemas.openxmlformats.org/drawingml/2006/main">
+            <a:off x="7067550" y="2476500"/>
+            <a:ext cx="3657600" cy="419100"/>
+          </a:xfrm>
+          <a:prstGeom xmlns:a="http://schemas.openxmlformats.org/drawingml/2006/main" prst="rect">
+            <a:avLst/>
+          </a:prstGeom>
+          <a:noFill xmlns:a="http://schemas.openxmlformats.org/drawingml/2006/main"/>
+          <a:ln xmlns:a="http://schemas.openxmlformats.org/drawingml/2006/main" w="0">
+            <a:noFill/>
+            <a:prstDash val="solid"/>
+          </a:ln>
+        </p:spPr>
+        <p:txBody>
+          <a:bodyPr xmlns:a="http://schemas.openxmlformats.org/drawingml/2006/main"/>
+          <a:lstStyle xmlns:a="http://schemas.openxmlformats.org/drawingml/2006/main"/>
+          <a:p xmlns:a="http://schemas.openxmlformats.org/drawingml/2006/main">
+            <a:pPr algn="l">
+              <a:buNone/>
+              <a:defRPr sz="1350" b="0" i="0">
+                <a:solidFill>
+                  <a:srgbClr val="111827"/>
+                </a:solidFill>
+              </a:defRPr>
+            </a:pPr>
+            <a:r>
+              <a:rPr sz="1350" b="0" i="0">
+                <a:solidFill>
+                  <a:srgbClr val="111827"/>
+                </a:solidFill>
+              </a:rPr>
+              <a:t>Cleaner app wording and stronger analyst layout</a:t>
+            </a:r>
+          </a:p>
+        </p:txBody>
+      </p:sp>
+      <p:sp>
+        <p:nvSpPr>
+          <p:cNvPr id="19" name="">
+            <a:extLst xmlns:a="http://schemas.openxmlformats.org/drawingml/2006/main">
+              <a:ext uri="{FF2B5EF4-FFF2-40B4-BE49-F238E27FC236}">
+                <a16:creationId xmlns:a16="http://schemas.microsoft.com/office/drawing/2014/main" id="{CCBE99CD-3486-41CA-8870-410F7DE459F7}"/>
+              </a:ext>
+            </a:extLst>
+          </p:cNvPr>
+          <p:cNvSpPr>
+            <a:spLocks xmlns:a="http://schemas.openxmlformats.org/drawingml/2006/main" noGrp="1"/>
+          </p:cNvSpPr>
+          <p:nvPr/>
+        </p:nvSpPr>
+        <p:spPr>
+          <a:xfrm xmlns:a="http://schemas.openxmlformats.org/drawingml/2006/main">
+            <a:off x="6819900" y="2895600"/>
+            <a:ext cx="171450" cy="228600"/>
+          </a:xfrm>
+          <a:prstGeom xmlns:a="http://schemas.openxmlformats.org/drawingml/2006/main" prst="rect">
+            <a:avLst/>
+          </a:prstGeom>
+          <a:noFill xmlns:a="http://schemas.openxmlformats.org/drawingml/2006/main"/>
+          <a:ln xmlns:a="http://schemas.openxmlformats.org/drawingml/2006/main" w="0">
+            <a:noFill/>
+            <a:prstDash val="solid"/>
+          </a:ln>
+        </p:spPr>
+        <p:txBody>
+          <a:bodyPr xmlns:a="http://schemas.openxmlformats.org/drawingml/2006/main"/>
+          <a:lstStyle xmlns:a="http://schemas.openxmlformats.org/drawingml/2006/main"/>
+          <a:p xmlns:a="http://schemas.openxmlformats.org/drawingml/2006/main">
+            <a:pPr algn="l">
+              <a:buNone/>
+              <a:defRPr sz="1350" b="1" i="0">
+                <a:solidFill>
+                  <a:srgbClr val="087B73"/>
+                </a:solidFill>
+              </a:defRPr>
+            </a:pPr>
+            <a:r>
+              <a:rPr sz="1350" b="1" i="0">
+                <a:solidFill>
+                  <a:srgbClr val="087B73"/>
+                </a:solidFill>
+              </a:rPr>
+              <a:t>-</a:t>
+            </a:r>
+          </a:p>
+        </p:txBody>
+      </p:sp>
+      <p:sp>
+        <p:nvSpPr>
+          <p:cNvPr id="20" name="">
+            <a:extLst xmlns:a="http://schemas.openxmlformats.org/drawingml/2006/main">
+              <a:ext uri="{FF2B5EF4-FFF2-40B4-BE49-F238E27FC236}">
+                <a16:creationId xmlns:a16="http://schemas.microsoft.com/office/drawing/2014/main" id="{4DF0AC29-43BF-4D2B-BCCC-92589DD48A82}"/>
+              </a:ext>
+            </a:extLst>
+          </p:cNvPr>
+          <p:cNvSpPr>
+            <a:spLocks xmlns:a="http://schemas.openxmlformats.org/drawingml/2006/main" noGrp="1"/>
+          </p:cNvSpPr>
+          <p:nvPr/>
+        </p:nvSpPr>
+        <p:spPr>
+          <a:xfrm xmlns:a="http://schemas.openxmlformats.org/drawingml/2006/main">
+            <a:off x="7067550" y="2895600"/>
+            <a:ext cx="3657600" cy="419100"/>
+          </a:xfrm>
+          <a:prstGeom xmlns:a="http://schemas.openxmlformats.org/drawingml/2006/main" prst="rect">
+            <a:avLst/>
+          </a:prstGeom>
+          <a:noFill xmlns:a="http://schemas.openxmlformats.org/drawingml/2006/main"/>
+          <a:ln xmlns:a="http://schemas.openxmlformats.org/drawingml/2006/main" w="0">
+            <a:noFill/>
+            <a:prstDash val="solid"/>
+          </a:ln>
+        </p:spPr>
+        <p:txBody>
+          <a:bodyPr xmlns:a="http://schemas.openxmlformats.org/drawingml/2006/main"/>
+          <a:lstStyle xmlns:a="http://schemas.openxmlformats.org/drawingml/2006/main"/>
+          <a:p xmlns:a="http://schemas.openxmlformats.org/drawingml/2006/main">
+            <a:pPr algn="l">
+              <a:buNone/>
+              <a:defRPr sz="1350" b="0" i="0">
+                <a:solidFill>
+                  <a:srgbClr val="111827"/>
+                </a:solidFill>
+              </a:defRPr>
+            </a:pPr>
+            <a:r>
+              <a:rPr sz="1350" b="0" i="0">
+                <a:solidFill>
+                  <a:srgbClr val="111827"/>
+                </a:solidFill>
+              </a:rPr>
+              <a:t>Transaction search, drilldown, and CSV case export</a:t>
+            </a:r>
+          </a:p>
+        </p:txBody>
+      </p:sp>
+      <p:sp>
+        <p:nvSpPr>
+          <p:cNvPr id="21" name="">
+            <a:extLst xmlns:a="http://schemas.openxmlformats.org/drawingml/2006/main">
+              <a:ext uri="{FF2B5EF4-FFF2-40B4-BE49-F238E27FC236}">
+                <a16:creationId xmlns:a16="http://schemas.microsoft.com/office/drawing/2014/main" id="{086A8344-72BD-47F6-ABD8-00F3E10DCEAB}"/>
+              </a:ext>
+            </a:extLst>
+          </p:cNvPr>
+          <p:cNvSpPr>
+            <a:spLocks xmlns:a="http://schemas.openxmlformats.org/drawingml/2006/main" noGrp="1"/>
+          </p:cNvSpPr>
+          <p:nvPr/>
+        </p:nvSpPr>
+        <p:spPr>
+          <a:xfrm xmlns:a="http://schemas.openxmlformats.org/drawingml/2006/main">
+            <a:off x="6819900" y="3314700"/>
+            <a:ext cx="171450" cy="228600"/>
+          </a:xfrm>
+          <a:prstGeom xmlns:a="http://schemas.openxmlformats.org/drawingml/2006/main" prst="rect">
+            <a:avLst/>
+          </a:prstGeom>
+          <a:noFill xmlns:a="http://schemas.openxmlformats.org/drawingml/2006/main"/>
+          <a:ln xmlns:a="http://schemas.openxmlformats.org/drawingml/2006/main" w="0">
+            <a:noFill/>
+            <a:prstDash val="solid"/>
+          </a:ln>
+        </p:spPr>
+        <p:txBody>
+          <a:bodyPr xmlns:a="http://schemas.openxmlformats.org/drawingml/2006/main"/>
+          <a:lstStyle xmlns:a="http://schemas.openxmlformats.org/drawingml/2006/main"/>
+          <a:p xmlns:a="http://schemas.openxmlformats.org/drawingml/2006/main">
+            <a:pPr algn="l">
+              <a:buNone/>
+              <a:defRPr sz="1350" b="1" i="0">
+                <a:solidFill>
+                  <a:srgbClr val="087B73"/>
+                </a:solidFill>
+              </a:defRPr>
+            </a:pPr>
+            <a:r>
+              <a:rPr sz="1350" b="1" i="0">
+                <a:solidFill>
+                  <a:srgbClr val="087B73"/>
+                </a:solidFill>
+              </a:rPr>
+              <a:t>-</a:t>
+            </a:r>
+          </a:p>
+        </p:txBody>
+      </p:sp>
+      <p:sp>
+        <p:nvSpPr>
+          <p:cNvPr id="22" name="">
+            <a:extLst xmlns:a="http://schemas.openxmlformats.org/drawingml/2006/main">
+              <a:ext uri="{FF2B5EF4-FFF2-40B4-BE49-F238E27FC236}">
+                <a16:creationId xmlns:a16="http://schemas.microsoft.com/office/drawing/2014/main" id="{E28317E0-4246-4C81-BA89-F36EE5CE0632}"/>
+              </a:ext>
+            </a:extLst>
+          </p:cNvPr>
+          <p:cNvSpPr>
+            <a:spLocks xmlns:a="http://schemas.openxmlformats.org/drawingml/2006/main" noGrp="1"/>
+          </p:cNvSpPr>
+          <p:nvPr/>
+        </p:nvSpPr>
+        <p:spPr>
+          <a:xfrm xmlns:a="http://schemas.openxmlformats.org/drawingml/2006/main">
+            <a:off x="7067550" y="3314700"/>
+            <a:ext cx="3657600" cy="419100"/>
+          </a:xfrm>
+          <a:prstGeom xmlns:a="http://schemas.openxmlformats.org/drawingml/2006/main" prst="rect">
+            <a:avLst/>
+          </a:prstGeom>
+          <a:noFill xmlns:a="http://schemas.openxmlformats.org/drawingml/2006/main"/>
+          <a:ln xmlns:a="http://schemas.openxmlformats.org/drawingml/2006/main" w="0">
+            <a:noFill/>
+            <a:prstDash val="solid"/>
+          </a:ln>
+        </p:spPr>
+        <p:txBody>
+          <a:bodyPr xmlns:a="http://schemas.openxmlformats.org/drawingml/2006/main"/>
+          <a:lstStyle xmlns:a="http://schemas.openxmlformats.org/drawingml/2006/main"/>
+          <a:p xmlns:a="http://schemas.openxmlformats.org/drawingml/2006/main">
+            <a:pPr algn="l">
+              <a:buNone/>
+              <a:defRPr sz="1350" b="0" i="0">
+                <a:solidFill>
+                  <a:srgbClr val="111827"/>
+                </a:solidFill>
+              </a:defRPr>
+            </a:pPr>
+            <a:r>
+              <a:rPr sz="1350" b="0" i="0">
+                <a:solidFill>
+                  <a:srgbClr val="111827"/>
+                </a:solidFill>
+              </a:rPr>
+              <a:t>Presenter Mode for explaining how each section was built</a:t>
+            </a:r>
+          </a:p>
+        </p:txBody>
+      </p:sp>
+      <p:sp>
+        <p:nvSpPr>
+          <p:cNvPr id="23" name="">
+            <a:extLst xmlns:a="http://schemas.openxmlformats.org/drawingml/2006/main">
+              <a:ext uri="{FF2B5EF4-FFF2-40B4-BE49-F238E27FC236}">
+                <a16:creationId xmlns:a16="http://schemas.microsoft.com/office/drawing/2014/main" id="{F12B15FF-1DE0-426F-9B2D-7C2CF454776D}"/>
+              </a:ext>
+            </a:extLst>
+          </p:cNvPr>
+          <p:cNvSpPr>
+            <a:spLocks xmlns:a="http://schemas.openxmlformats.org/drawingml/2006/main" noGrp="1"/>
+          </p:cNvSpPr>
+          <p:nvPr/>
+        </p:nvSpPr>
+        <p:spPr>
+          <a:xfrm xmlns:a="http://schemas.openxmlformats.org/drawingml/2006/main">
+            <a:off x="6819900" y="3733800"/>
+            <a:ext cx="171450" cy="228600"/>
+          </a:xfrm>
+          <a:prstGeom xmlns:a="http://schemas.openxmlformats.org/drawingml/2006/main" prst="rect">
+            <a:avLst/>
+          </a:prstGeom>
+          <a:noFill xmlns:a="http://schemas.openxmlformats.org/drawingml/2006/main"/>
+          <a:ln xmlns:a="http://schemas.openxmlformats.org/drawingml/2006/main" w="0">
+            <a:noFill/>
+            <a:prstDash val="solid"/>
+          </a:ln>
+        </p:spPr>
+        <p:txBody>
+          <a:bodyPr xmlns:a="http://schemas.openxmlformats.org/drawingml/2006/main"/>
+          <a:lstStyle xmlns:a="http://schemas.openxmlformats.org/drawingml/2006/main"/>
+          <a:p xmlns:a="http://schemas.openxmlformats.org/drawingml/2006/main">
+            <a:pPr algn="l">
+              <a:buNone/>
+              <a:defRPr sz="1350" b="1" i="0">
+                <a:solidFill>
+                  <a:srgbClr val="087B73"/>
+                </a:solidFill>
+              </a:defRPr>
+            </a:pPr>
+            <a:r>
+              <a:rPr sz="1350" b="1" i="0">
+                <a:solidFill>
+                  <a:srgbClr val="087B73"/>
+                </a:solidFill>
+              </a:rPr>
+              <a:t>-</a:t>
+            </a:r>
+          </a:p>
+        </p:txBody>
+      </p:sp>
+      <p:sp>
+        <p:nvSpPr>
+          <p:cNvPr id="24" name="">
+            <a:extLst xmlns:a="http://schemas.openxmlformats.org/drawingml/2006/main">
+              <a:ext uri="{FF2B5EF4-FFF2-40B4-BE49-F238E27FC236}">
+                <a16:creationId xmlns:a16="http://schemas.microsoft.com/office/drawing/2014/main" id="{7BDCB002-D0FF-4025-9EE1-0BB39A73AC1C}"/>
+              </a:ext>
+            </a:extLst>
+          </p:cNvPr>
+          <p:cNvSpPr>
+            <a:spLocks xmlns:a="http://schemas.openxmlformats.org/drawingml/2006/main" noGrp="1"/>
+          </p:cNvSpPr>
+          <p:nvPr/>
+        </p:nvSpPr>
+        <p:spPr>
+          <a:xfrm xmlns:a="http://schemas.openxmlformats.org/drawingml/2006/main">
+            <a:off x="7067550" y="3733800"/>
+            <a:ext cx="3657600" cy="419100"/>
+          </a:xfrm>
+          <a:prstGeom xmlns:a="http://schemas.openxmlformats.org/drawingml/2006/main" prst="rect">
+            <a:avLst/>
+          </a:prstGeom>
+          <a:noFill xmlns:a="http://schemas.openxmlformats.org/drawingml/2006/main"/>
+          <a:ln xmlns:a="http://schemas.openxmlformats.org/drawingml/2006/main" w="0">
+            <a:noFill/>
+            <a:prstDash val="solid"/>
+          </a:ln>
+        </p:spPr>
+        <p:txBody>
+          <a:bodyPr xmlns:a="http://schemas.openxmlformats.org/drawingml/2006/main"/>
+          <a:lstStyle xmlns:a="http://schemas.openxmlformats.org/drawingml/2006/main"/>
+          <a:p xmlns:a="http://schemas.openxmlformats.org/drawingml/2006/main">
+            <a:pPr algn="l">
+              <a:buNone/>
+              <a:defRPr sz="1350" b="0" i="0">
+                <a:solidFill>
+                  <a:srgbClr val="111827"/>
+                </a:solidFill>
+              </a:defRPr>
+            </a:pPr>
+            <a:r>
+              <a:rPr sz="1350" b="0" i="0">
+                <a:solidFill>
+                  <a:srgbClr val="111827"/>
+                </a:solidFill>
+              </a:rPr>
+              <a:t>Journey-based PPT and professional written report</a:t>
+            </a:r>
+          </a:p>
+        </p:txBody>
+      </p:sp>
+      <p:sp>
+        <p:nvSpPr>
+          <p:cNvPr id="25" name="">
+            <a:extLst xmlns:a="http://schemas.openxmlformats.org/drawingml/2006/main">
+              <a:ext uri="{FF2B5EF4-FFF2-40B4-BE49-F238E27FC236}">
+                <a16:creationId xmlns:a16="http://schemas.microsoft.com/office/drawing/2014/main" id="{D1FF8734-7BE9-40E6-8473-2F02B3589E1C}"/>
+              </a:ext>
+            </a:extLst>
+          </p:cNvPr>
+          <p:cNvSpPr>
+            <a:spLocks xmlns:a="http://schemas.openxmlformats.org/drawingml/2006/main" noGrp="1"/>
+          </p:cNvSpPr>
+          <p:nvPr/>
+        </p:nvSpPr>
+        <p:spPr>
+          <a:xfrm xmlns:a="http://schemas.openxmlformats.org/drawingml/2006/main">
+            <a:off x="1524000" y="5753100"/>
+            <a:ext cx="9144000" cy="323850"/>
+          </a:xfrm>
+          <a:prstGeom xmlns:a="http://schemas.openxmlformats.org/drawingml/2006/main" prst="rect">
+            <a:avLst/>
+          </a:prstGeom>
+          <a:noFill xmlns:a="http://schemas.openxmlformats.org/drawingml/2006/main"/>
+          <a:ln xmlns:a="http://schemas.openxmlformats.org/drawingml/2006/main" w="0">
+            <a:noFill/>
+            <a:prstDash val="solid"/>
+          </a:ln>
+        </p:spPr>
+        <p:txBody>
+          <a:bodyPr xmlns:a="http://schemas.openxmlformats.org/drawingml/2006/main"/>
+          <a:lstStyle xmlns:a="http://schemas.openxmlformats.org/drawingml/2006/main"/>
+          <a:p xmlns:a="http://schemas.openxmlformats.org/drawingml/2006/main">
+            <a:pPr algn="ctr">
+              <a:buNone/>
+              <a:defRPr sz="1650" b="1" i="0">
+                <a:solidFill>
+                  <a:srgbClr val="064E49"/>
+                </a:solidFill>
+              </a:defRPr>
+            </a:pPr>
+            <a:r>
+              <a:rPr sz="1650" b="1" i="0">
+                <a:solidFill>
+                  <a:srgbClr val="064E49"/>
+                </a:solidFill>
+              </a:rPr>
+              <a:t>This shows improvement, ownership, and the ability to respond to stakeholder feedback.</a:t>
+            </a:r>
+          </a:p>
+        </p:txBody>
+      </p:sp>
+    </p:spTree>
+    <p:extLst>
+      <p:ext uri="{BB962C8B-B14F-4D97-AF65-F5344CB8AC3E}">
+        <p14:creationId xmlns:p14="http://schemas.microsoft.com/office/powerpoint/2010/main" val="667184420"/>
+      </p:ext>
+    </p:extLst>
+  </p:cSld>
+</p:sld>
+</file>
+
+<file path=ppt/slides/slide13.xml><?xml version="1.0" encoding="utf-8"?>
+<p:sld xmlns:p="http://schemas.openxmlformats.org/presentationml/2006/main">
+  <p:cSld>
+    <p:bg>
+      <p:bgPr>
+        <a:solidFill xmlns:a="http://schemas.openxmlformats.org/drawingml/2006/main">
+          <a:srgbClr val="F5FBFA"/>
+        </a:solidFill>
+      </p:bgPr>
+    </p:bg>
+    <p:spTree>
+      <p:nvGrpSpPr>
+        <p:cNvPr id="1" name=""/>
+        <p:cNvGrpSpPr/>
+        <p:nvPr/>
+      </p:nvGrpSpPr>
+      <p:grpSpPr>
+        <a:xfrm xmlns:a="http://schemas.openxmlformats.org/drawingml/2006/main"/>
+      </p:grpSpPr>
+      <p:sp>
+        <p:nvSpPr>
+          <p:cNvPr id="1" name="">
+            <a:extLst xmlns:a="http://schemas.openxmlformats.org/drawingml/2006/main">
+              <a:ext uri="{FF2B5EF4-FFF2-40B4-BE49-F238E27FC236}">
+                <a16:creationId xmlns:a16="http://schemas.microsoft.com/office/drawing/2014/main" id="{33468402-2F43-470E-AC59-F87931562AE8}"/>
+              </a:ext>
+            </a:extLst>
+          </p:cNvPr>
+          <p:cNvSpPr>
+            <a:spLocks xmlns:a="http://schemas.openxmlformats.org/drawingml/2006/main" noGrp="1"/>
+          </p:cNvSpPr>
+          <p:nvPr/>
+        </p:nvSpPr>
+        <p:spPr>
+          <a:xfrm xmlns:a="http://schemas.openxmlformats.org/drawingml/2006/main">
+            <a:off x="666750" y="400050"/>
+            <a:ext cx="495300" cy="266700"/>
+          </a:xfrm>
+          <a:prstGeom xmlns:a="http://schemas.openxmlformats.org/drawingml/2006/main" prst="rect">
+            <a:avLst/>
+          </a:prstGeom>
+          <a:noFill xmlns:a="http://schemas.openxmlformats.org/drawingml/2006/main"/>
+          <a:ln xmlns:a="http://schemas.openxmlformats.org/drawingml/2006/main" w="0">
+            <a:noFill/>
+            <a:prstDash val="solid"/>
+          </a:ln>
+        </p:spPr>
+        <p:txBody>
+          <a:bodyPr xmlns:a="http://schemas.openxmlformats.org/drawingml/2006/main"/>
+          <a:lstStyle xmlns:a="http://schemas.openxmlformats.org/drawingml/2006/main"/>
+          <a:p xmlns:a="http://schemas.openxmlformats.org/drawingml/2006/main">
+            <a:pPr algn="l">
+              <a:buNone/>
+              <a:defRPr sz="1200" b="1" i="0">
+                <a:solidFill>
+                  <a:srgbClr val="087B73"/>
+                </a:solidFill>
+              </a:defRPr>
+            </a:pPr>
+            <a:r>
+              <a:rPr sz="1200" b="1" i="0">
+                <a:solidFill>
+                  <a:srgbClr val="087B73"/>
+                </a:solidFill>
+              </a:rPr>
+              <a:t>013</a:t>
+            </a:r>
+          </a:p>
+        </p:txBody>
+      </p:sp>
+      <p:sp>
+        <p:nvSpPr>
+          <p:cNvPr id="2" name="">
+            <a:extLst xmlns:a="http://schemas.openxmlformats.org/drawingml/2006/main">
+              <a:ext uri="{FF2B5EF4-FFF2-40B4-BE49-F238E27FC236}">
+                <a16:creationId xmlns:a16="http://schemas.microsoft.com/office/drawing/2014/main" id="{585A4E96-C27C-4395-9064-EFAE1DE7A2E6}"/>
+              </a:ext>
+            </a:extLst>
+          </p:cNvPr>
+          <p:cNvSpPr>
+            <a:spLocks xmlns:a="http://schemas.openxmlformats.org/drawingml/2006/main" noGrp="1"/>
+          </p:cNvSpPr>
+          <p:nvPr/>
+        </p:nvSpPr>
+        <p:spPr>
+          <a:xfrm xmlns:a="http://schemas.openxmlformats.org/drawingml/2006/main">
+            <a:off x="1162050" y="323850"/>
+            <a:ext cx="8286750" cy="514350"/>
+          </a:xfrm>
+          <a:prstGeom xmlns:a="http://schemas.openxmlformats.org/drawingml/2006/main" prst="rect">
+            <a:avLst/>
+          </a:prstGeom>
+          <a:noFill xmlns:a="http://schemas.openxmlformats.org/drawingml/2006/main"/>
+          <a:ln xmlns:a="http://schemas.openxmlformats.org/drawingml/2006/main" w="0">
+            <a:noFill/>
+            <a:prstDash val="solid"/>
+          </a:ln>
+        </p:spPr>
+        <p:txBody>
+          <a:bodyPr xmlns:a="http://schemas.openxmlformats.org/drawingml/2006/main"/>
+          <a:lstStyle xmlns:a="http://schemas.openxmlformats.org/drawingml/2006/main"/>
+          <a:p xmlns:a="http://schemas.openxmlformats.org/drawingml/2006/main">
+            <a:pPr algn="l">
+              <a:buNone/>
+              <a:defRPr sz="2850" b="1" i="0">
+                <a:solidFill>
+                  <a:srgbClr val="111827"/>
+                </a:solidFill>
+              </a:defRPr>
+            </a:pPr>
+            <a:r>
+              <a:rPr sz="2850" b="1" i="0">
+                <a:solidFill>
+                  <a:srgbClr val="111827"/>
+                </a:solidFill>
+              </a:rPr>
+              <a:t>Final Conclusion</a:t>
+            </a:r>
+          </a:p>
+        </p:txBody>
+      </p:sp>
+      <p:sp>
+        <p:nvSpPr>
+          <p:cNvPr id="3" name="">
+            <a:extLst xmlns:a="http://schemas.openxmlformats.org/drawingml/2006/main">
+              <a:ext uri="{FF2B5EF4-FFF2-40B4-BE49-F238E27FC236}">
+                <a16:creationId xmlns:a16="http://schemas.microsoft.com/office/drawing/2014/main" id="{B776F098-7EFB-450D-877B-78F942C775BE}"/>
+              </a:ext>
+            </a:extLst>
+          </p:cNvPr>
+          <p:cNvSpPr>
+            <a:spLocks xmlns:a="http://schemas.openxmlformats.org/drawingml/2006/main" noGrp="1"/>
+          </p:cNvSpPr>
+          <p:nvPr/>
+        </p:nvSpPr>
+        <p:spPr>
+          <a:xfrm xmlns:a="http://schemas.openxmlformats.org/drawingml/2006/main">
+            <a:off x="1162050" y="838200"/>
+            <a:ext cx="8763000" cy="323850"/>
+          </a:xfrm>
+          <a:prstGeom xmlns:a="http://schemas.openxmlformats.org/drawingml/2006/main" prst="rect">
+            <a:avLst/>
+          </a:prstGeom>
+          <a:noFill xmlns:a="http://schemas.openxmlformats.org/drawingml/2006/main"/>
+          <a:ln xmlns:a="http://schemas.openxmlformats.org/drawingml/2006/main" w="0">
+            <a:noFill/>
+            <a:prstDash val="solid"/>
+          </a:ln>
+        </p:spPr>
+        <p:txBody>
+          <a:bodyPr xmlns:a="http://schemas.openxmlformats.org/drawingml/2006/main"/>
+          <a:lstStyle xmlns:a="http://schemas.openxmlformats.org/drawingml/2006/main"/>
+          <a:p xmlns:a="http://schemas.openxmlformats.org/drawingml/2006/main">
+            <a:pPr algn="l">
+              <a:buNone/>
+              <a:defRPr sz="1275" b="0" i="0">
+                <a:solidFill>
+                  <a:srgbClr val="5F6F6C"/>
+                </a:solidFill>
+              </a:defRPr>
+            </a:pPr>
+            <a:r>
+              <a:rPr sz="1275" b="0" i="0">
+                <a:solidFill>
+                  <a:srgbClr val="5F6F6C"/>
+                </a:solidFill>
+              </a:rPr>
+              <a:t>The finished project demonstrates analytics, business judgement, deployment, and governance.</a:t>
+            </a:r>
+          </a:p>
+        </p:txBody>
+      </p:sp>
+      <p:sp>
+        <p:nvSpPr>
+          <p:cNvPr id="4" name="">
+            <a:extLst xmlns:a="http://schemas.openxmlformats.org/drawingml/2006/main">
+              <a:ext uri="{FF2B5EF4-FFF2-40B4-BE49-F238E27FC236}">
+                <a16:creationId xmlns:a16="http://schemas.microsoft.com/office/drawing/2014/main" id="{28A2B54F-4B5C-4AA8-8184-E66919B05EDC}"/>
+              </a:ext>
+            </a:extLst>
+          </p:cNvPr>
+          <p:cNvSpPr>
+            <a:spLocks xmlns:a="http://schemas.openxmlformats.org/drawingml/2006/main" noGrp="1"/>
+          </p:cNvSpPr>
+          <p:nvPr/>
+        </p:nvSpPr>
+        <p:spPr>
+          <a:xfrm xmlns:a="http://schemas.openxmlformats.org/drawingml/2006/main">
+            <a:off x="666750" y="1219200"/>
+            <a:ext cx="10858500" cy="19050"/>
+          </a:xfrm>
+          <a:prstGeom xmlns:a="http://schemas.openxmlformats.org/drawingml/2006/main" prst="rect">
+            <a:avLst/>
+          </a:prstGeom>
+          <a:solidFill xmlns:a="http://schemas.openxmlformats.org/drawingml/2006/main">
+            <a:srgbClr val="E7F0EE"/>
+          </a:solidFill>
+          <a:ln xmlns:a="http://schemas.openxmlformats.org/drawingml/2006/main" w="0">
+            <a:solidFill>
+              <a:srgbClr val="E7F0EE"/>
+            </a:solidFill>
+            <a:prstDash val="solid"/>
+          </a:ln>
+        </p:spPr>
+      </p:sp>
+      <p:sp>
+        <p:nvSpPr>
+          <p:cNvPr id="5" name="">
+            <a:extLst xmlns:a="http://schemas.openxmlformats.org/drawingml/2006/main">
+              <a:ext uri="{FF2B5EF4-FFF2-40B4-BE49-F238E27FC236}">
+                <a16:creationId xmlns:a16="http://schemas.microsoft.com/office/drawing/2014/main" id="{15E7A1B0-AE2B-4CE4-A089-BDF337491549}"/>
+              </a:ext>
+            </a:extLst>
+          </p:cNvPr>
+          <p:cNvSpPr>
+            <a:spLocks xmlns:a="http://schemas.openxmlformats.org/drawingml/2006/main" noGrp="1"/>
+          </p:cNvSpPr>
+          <p:nvPr/>
+        </p:nvSpPr>
+        <p:spPr>
+          <a:xfrm xmlns:a="http://schemas.openxmlformats.org/drawingml/2006/main">
+            <a:off x="914400" y="1600200"/>
+            <a:ext cx="4953000" cy="3390900"/>
+          </a:xfrm>
+          <a:prstGeom xmlns:a="http://schemas.openxmlformats.org/drawingml/2006/main" prst="roundRect">
+            <a:avLst>
+              <a:gd name="adj" fmla="val 2247"/>
+            </a:avLst>
+          </a:prstGeom>
+          <a:solidFill xmlns:a="http://schemas.openxmlformats.org/drawingml/2006/main">
+            <a:srgbClr val="FFFFFF"/>
+          </a:solidFill>
+          <a:ln xmlns:a="http://schemas.openxmlformats.org/drawingml/2006/main" w="9525">
+            <a:solidFill>
+              <a:srgbClr val="CBDAD7"/>
+            </a:solidFill>
+            <a:prstDash val="solid"/>
+          </a:ln>
+        </p:spPr>
+      </p:sp>
+      <p:sp>
+        <p:nvSpPr>
+          <p:cNvPr id="6" name="">
+            <a:extLst xmlns:a="http://schemas.openxmlformats.org/drawingml/2006/main">
+              <a:ext uri="{FF2B5EF4-FFF2-40B4-BE49-F238E27FC236}">
+                <a16:creationId xmlns:a16="http://schemas.microsoft.com/office/drawing/2014/main" id="{FB3F5675-51E8-45AD-A7A4-E428210212E1}"/>
+              </a:ext>
+            </a:extLst>
+          </p:cNvPr>
+          <p:cNvSpPr>
+            <a:spLocks xmlns:a="http://schemas.openxmlformats.org/drawingml/2006/main" noGrp="1"/>
+          </p:cNvSpPr>
+          <p:nvPr/>
+        </p:nvSpPr>
+        <p:spPr>
+          <a:xfrm xmlns:a="http://schemas.openxmlformats.org/drawingml/2006/main">
+            <a:off x="1200150" y="1905000"/>
+            <a:ext cx="4000500" cy="285750"/>
+          </a:xfrm>
+          <a:prstGeom xmlns:a="http://schemas.openxmlformats.org/drawingml/2006/main" prst="rect">
+            <a:avLst/>
+          </a:prstGeom>
+          <a:noFill xmlns:a="http://schemas.openxmlformats.org/drawingml/2006/main"/>
+          <a:ln xmlns:a="http://schemas.openxmlformats.org/drawingml/2006/main" w="0">
+            <a:noFill/>
+            <a:prstDash val="solid"/>
+          </a:ln>
+        </p:spPr>
+        <p:txBody>
+          <a:bodyPr xmlns:a="http://schemas.openxmlformats.org/drawingml/2006/main"/>
+          <a:lstStyle xmlns:a="http://schemas.openxmlformats.org/drawingml/2006/main"/>
+          <a:p xmlns:a="http://schemas.openxmlformats.org/drawingml/2006/main">
+            <a:pPr algn="l">
+              <a:buNone/>
+              <a:defRPr sz="1950" b="1" i="0">
+                <a:solidFill>
+                  <a:srgbClr val="111827"/>
+                </a:solidFill>
+              </a:defRPr>
+            </a:pPr>
+            <a:r>
+              <a:rPr sz="1950" b="1" i="0">
+                <a:solidFill>
+                  <a:srgbClr val="111827"/>
+                </a:solidFill>
+              </a:rPr>
+              <a:t>What I concluded</a:t>
+            </a:r>
+          </a:p>
+        </p:txBody>
+      </p:sp>
+      <p:sp>
+        <p:nvSpPr>
+          <p:cNvPr id="7" name="">
+            <a:extLst xmlns:a="http://schemas.openxmlformats.org/drawingml/2006/main">
+              <a:ext uri="{FF2B5EF4-FFF2-40B4-BE49-F238E27FC236}">
+                <a16:creationId xmlns:a16="http://schemas.microsoft.com/office/drawing/2014/main" id="{18C032F5-46E4-4A6C-9459-70B707A8A1EB}"/>
+              </a:ext>
+            </a:extLst>
+          </p:cNvPr>
+          <p:cNvSpPr>
+            <a:spLocks xmlns:a="http://schemas.openxmlformats.org/drawingml/2006/main" noGrp="1"/>
+          </p:cNvSpPr>
+          <p:nvPr/>
+        </p:nvSpPr>
+        <p:spPr>
+          <a:xfrm xmlns:a="http://schemas.openxmlformats.org/drawingml/2006/main">
+            <a:off x="1200150" y="2419350"/>
+            <a:ext cx="4286250" cy="1009650"/>
+          </a:xfrm>
+          <a:prstGeom xmlns:a="http://schemas.openxmlformats.org/drawingml/2006/main" prst="rect">
+            <a:avLst/>
+          </a:prstGeom>
+          <a:noFill xmlns:a="http://schemas.openxmlformats.org/drawingml/2006/main"/>
+          <a:ln xmlns:a="http://schemas.openxmlformats.org/drawingml/2006/main" w="0">
+            <a:noFill/>
+            <a:prstDash val="solid"/>
+          </a:ln>
+        </p:spPr>
+        <p:txBody>
+          <a:bodyPr xmlns:a="http://schemas.openxmlformats.org/drawingml/2006/main"/>
+          <a:lstStyle xmlns:a="http://schemas.openxmlformats.org/drawingml/2006/main"/>
+          <a:p xmlns:a="http://schemas.openxmlformats.org/drawingml/2006/main">
+            <a:pPr algn="l">
+              <a:buNone/>
+              <a:defRPr sz="1650" b="0" i="0">
+                <a:solidFill>
+                  <a:srgbClr val="111827"/>
+                </a:solidFill>
+              </a:defRPr>
+            </a:pPr>
+            <a:r>
+              <a:rPr sz="1650" b="0" i="0">
+                <a:solidFill>
+                  <a:srgbClr val="111827"/>
+                </a:solidFill>
+              </a:rPr>
+              <a:t>A fraud model is most valuable when it helps a bank answer: which cases should be reviewed first, why are they risky, how many false positives will we create, and what controls are needed before use?</a:t>
+            </a:r>
+          </a:p>
+        </p:txBody>
+      </p:sp>
+      <p:sp>
+        <p:nvSpPr>
+          <p:cNvPr id="8" name="">
+            <a:extLst xmlns:a="http://schemas.openxmlformats.org/drawingml/2006/main">
+              <a:ext uri="{FF2B5EF4-FFF2-40B4-BE49-F238E27FC236}">
+                <a16:creationId xmlns:a16="http://schemas.microsoft.com/office/drawing/2014/main" id="{17356620-132C-450E-912D-57B4AE0FEDB6}"/>
+              </a:ext>
+            </a:extLst>
+          </p:cNvPr>
+          <p:cNvSpPr>
+            <a:spLocks xmlns:a="http://schemas.openxmlformats.org/drawingml/2006/main" noGrp="1"/>
+          </p:cNvSpPr>
+          <p:nvPr/>
+        </p:nvSpPr>
+        <p:spPr>
+          <a:xfrm xmlns:a="http://schemas.openxmlformats.org/drawingml/2006/main">
+            <a:off x="1200150" y="3867150"/>
+            <a:ext cx="4286250" cy="571500"/>
+          </a:xfrm>
+          <a:prstGeom xmlns:a="http://schemas.openxmlformats.org/drawingml/2006/main" prst="rect">
+            <a:avLst/>
+          </a:prstGeom>
+          <a:noFill xmlns:a="http://schemas.openxmlformats.org/drawingml/2006/main"/>
+          <a:ln xmlns:a="http://schemas.openxmlformats.org/drawingml/2006/main" w="0">
+            <a:noFill/>
+            <a:prstDash val="solid"/>
+          </a:ln>
+        </p:spPr>
+        <p:txBody>
+          <a:bodyPr xmlns:a="http://schemas.openxmlformats.org/drawingml/2006/main"/>
+          <a:lstStyle xmlns:a="http://schemas.openxmlformats.org/drawingml/2006/main"/>
+          <a:p xmlns:a="http://schemas.openxmlformats.org/drawingml/2006/main">
+            <a:pPr algn="l">
+              <a:buNone/>
+              <a:defRPr sz="1800" b="1" i="0">
+                <a:solidFill>
+                  <a:srgbClr val="064E49"/>
+                </a:solidFill>
+              </a:defRPr>
+            </a:pPr>
+            <a:r>
+              <a:rPr sz="1800" b="1" i="0">
+                <a:solidFill>
+                  <a:srgbClr val="064E49"/>
+                </a:solidFill>
+              </a:rPr>
+              <a:t>That is why my final output is a control tower, not only a prediction notebook.</a:t>
+            </a:r>
+          </a:p>
+        </p:txBody>
+      </p:sp>
+      <p:sp>
+        <p:nvSpPr>
+          <p:cNvPr id="9" name="">
+            <a:extLst xmlns:a="http://schemas.openxmlformats.org/drawingml/2006/main">
+              <a:ext uri="{FF2B5EF4-FFF2-40B4-BE49-F238E27FC236}">
+                <a16:creationId xmlns:a16="http://schemas.microsoft.com/office/drawing/2014/main" id="{2A71F6D5-AE64-4265-8D01-D3ACA5814E00}"/>
+              </a:ext>
+            </a:extLst>
+          </p:cNvPr>
+          <p:cNvSpPr>
+            <a:spLocks xmlns:a="http://schemas.openxmlformats.org/drawingml/2006/main" noGrp="1"/>
+          </p:cNvSpPr>
+          <p:nvPr/>
+        </p:nvSpPr>
+        <p:spPr>
+          <a:xfrm xmlns:a="http://schemas.openxmlformats.org/drawingml/2006/main">
+            <a:off x="6534150" y="1600200"/>
+            <a:ext cx="4762500" cy="3390900"/>
+          </a:xfrm>
+          <a:prstGeom xmlns:a="http://schemas.openxmlformats.org/drawingml/2006/main" prst="roundRect">
+            <a:avLst>
+              <a:gd name="adj" fmla="val 2247"/>
+            </a:avLst>
+          </a:prstGeom>
+          <a:solidFill xmlns:a="http://schemas.openxmlformats.org/drawingml/2006/main">
+            <a:srgbClr val="DFF3EF"/>
+          </a:solidFill>
+          <a:ln xmlns:a="http://schemas.openxmlformats.org/drawingml/2006/main" w="9525">
+            <a:solidFill>
+              <a:srgbClr val="CBDAD7"/>
+            </a:solidFill>
+            <a:prstDash val="solid"/>
+          </a:ln>
+        </p:spPr>
+      </p:sp>
+      <p:sp>
+        <p:nvSpPr>
           <p:cNvPr id="10" name="">
             <a:extLst xmlns:a="http://schemas.openxmlformats.org/drawingml/2006/main">
               <a:ext uri="{FF2B5EF4-FFF2-40B4-BE49-F238E27FC236}">
@@ -5667,6 +7460,7 @@
           <a:lstStyle xmlns:a="http://schemas.openxmlformats.org/drawingml/2006/main"/>
           <a:p xmlns:a="http://schemas.openxmlformats.org/drawingml/2006/main">
             <a:pPr algn="l">
+              <a:buNone/>
               <a:defRPr sz="1950" b="1" i="0">
                 <a:solidFill>
                   <a:srgbClr val="064E49"/>
@@ -5717,6 +7511,7 @@
           <a:lstStyle xmlns:a="http://schemas.openxmlformats.org/drawingml/2006/main"/>
           <a:p xmlns:a="http://schemas.openxmlformats.org/drawingml/2006/main">
             <a:pPr algn="l">
+              <a:buNone/>
               <a:defRPr sz="1275" b="1" i="0">
                 <a:solidFill>
                   <a:srgbClr val="087B73"/>
@@ -5767,6 +7562,7 @@
           <a:lstStyle xmlns:a="http://schemas.openxmlformats.org/drawingml/2006/main"/>
           <a:p xmlns:a="http://schemas.openxmlformats.org/drawingml/2006/main">
             <a:pPr algn="l">
+              <a:buNone/>
               <a:defRPr sz="1275" b="0" i="0">
                 <a:solidFill>
                   <a:srgbClr val="111827"/>
@@ -5817,6 +7613,7 @@
           <a:lstStyle xmlns:a="http://schemas.openxmlformats.org/drawingml/2006/main"/>
           <a:p xmlns:a="http://schemas.openxmlformats.org/drawingml/2006/main">
             <a:pPr algn="l">
+              <a:buNone/>
               <a:defRPr sz="1275" b="1" i="0">
                 <a:solidFill>
                   <a:srgbClr val="087B73"/>
@@ -5867,6 +7664,7 @@
           <a:lstStyle xmlns:a="http://schemas.openxmlformats.org/drawingml/2006/main"/>
           <a:p xmlns:a="http://schemas.openxmlformats.org/drawingml/2006/main">
             <a:pPr algn="l">
+              <a:buNone/>
               <a:defRPr sz="1275" b="0" i="0">
                 <a:solidFill>
                   <a:srgbClr val="111827"/>
@@ -5917,6 +7715,7 @@
           <a:lstStyle xmlns:a="http://schemas.openxmlformats.org/drawingml/2006/main"/>
           <a:p xmlns:a="http://schemas.openxmlformats.org/drawingml/2006/main">
             <a:pPr algn="l">
+              <a:buNone/>
               <a:defRPr sz="1275" b="1" i="0">
                 <a:solidFill>
                   <a:srgbClr val="087B73"/>
@@ -5967,6 +7766,7 @@
           <a:lstStyle xmlns:a="http://schemas.openxmlformats.org/drawingml/2006/main"/>
           <a:p xmlns:a="http://schemas.openxmlformats.org/drawingml/2006/main">
             <a:pPr algn="l">
+              <a:buNone/>
               <a:defRPr sz="1275" b="0" i="0">
                 <a:solidFill>
                   <a:srgbClr val="111827"/>
@@ -6017,6 +7817,7 @@
           <a:lstStyle xmlns:a="http://schemas.openxmlformats.org/drawingml/2006/main"/>
           <a:p xmlns:a="http://schemas.openxmlformats.org/drawingml/2006/main">
             <a:pPr algn="l">
+              <a:buNone/>
               <a:defRPr sz="1275" b="1" i="0">
                 <a:solidFill>
                   <a:srgbClr val="087B73"/>
@@ -6067,6 +7868,7 @@
           <a:lstStyle xmlns:a="http://schemas.openxmlformats.org/drawingml/2006/main"/>
           <a:p xmlns:a="http://schemas.openxmlformats.org/drawingml/2006/main">
             <a:pPr algn="l">
+              <a:buNone/>
               <a:defRPr sz="1275" b="0" i="0">
                 <a:solidFill>
                   <a:srgbClr val="111827"/>
@@ -6117,6 +7919,7 @@
           <a:lstStyle xmlns:a="http://schemas.openxmlformats.org/drawingml/2006/main"/>
           <a:p xmlns:a="http://schemas.openxmlformats.org/drawingml/2006/main">
             <a:pPr algn="l">
+              <a:buNone/>
               <a:defRPr sz="1275" b="1" i="0">
                 <a:solidFill>
                   <a:srgbClr val="087B73"/>
@@ -6167,6 +7970,7 @@
           <a:lstStyle xmlns:a="http://schemas.openxmlformats.org/drawingml/2006/main"/>
           <a:p xmlns:a="http://schemas.openxmlformats.org/drawingml/2006/main">
             <a:pPr algn="l">
+              <a:buNone/>
               <a:defRPr sz="1275" b="0" i="0">
                 <a:solidFill>
                   <a:srgbClr val="111827"/>
@@ -6252,6 +8056,7 @@
           <a:lstStyle xmlns:a="http://schemas.openxmlformats.org/drawingml/2006/main"/>
           <a:p xmlns:a="http://schemas.openxmlformats.org/drawingml/2006/main">
             <a:pPr algn="ctr">
+              <a:buNone/>
               <a:defRPr sz="1500" b="1" i="0">
                 <a:solidFill>
                   <a:srgbClr val="FFFFFF"/>
@@ -6331,6 +8136,7 @@
           <a:lstStyle xmlns:a="http://schemas.openxmlformats.org/drawingml/2006/main"/>
           <a:p xmlns:a="http://schemas.openxmlformats.org/drawingml/2006/main">
             <a:pPr algn="l">
+              <a:buNone/>
               <a:defRPr sz="1200" b="1" i="0">
                 <a:solidFill>
                   <a:srgbClr val="087B73"/>
@@ -6381,6 +8187,7 @@
           <a:lstStyle xmlns:a="http://schemas.openxmlformats.org/drawingml/2006/main"/>
           <a:p xmlns:a="http://schemas.openxmlformats.org/drawingml/2006/main">
             <a:pPr algn="l">
+              <a:buNone/>
               <a:defRPr sz="2850" b="1" i="0">
                 <a:solidFill>
                   <a:srgbClr val="111827"/>
@@ -6431,6 +8238,7 @@
           <a:lstStyle xmlns:a="http://schemas.openxmlformats.org/drawingml/2006/main"/>
           <a:p xmlns:a="http://schemas.openxmlformats.org/drawingml/2006/main">
             <a:pPr algn="l">
+              <a:buNone/>
               <a:defRPr sz="1275" b="0" i="0">
                 <a:solidFill>
                   <a:srgbClr val="5F6F6C"/>
@@ -6582,6 +8390,7 @@
           <a:lstStyle xmlns:a="http://schemas.openxmlformats.org/drawingml/2006/main"/>
           <a:p xmlns:a="http://schemas.openxmlformats.org/drawingml/2006/main">
             <a:pPr algn="ctr">
+              <a:buNone/>
               <a:defRPr sz="1350" b="1" i="0">
                 <a:solidFill>
                   <a:srgbClr val="FFFFFF"/>
@@ -6632,6 +8441,7 @@
           <a:lstStyle xmlns:a="http://schemas.openxmlformats.org/drawingml/2006/main"/>
           <a:p xmlns:a="http://schemas.openxmlformats.org/drawingml/2006/main">
             <a:pPr algn="l">
+              <a:buNone/>
               <a:defRPr sz="1425" b="1" i="0">
                 <a:solidFill>
                   <a:srgbClr val="111827"/>
@@ -6682,6 +8492,7 @@
           <a:lstStyle xmlns:a="http://schemas.openxmlformats.org/drawingml/2006/main"/>
           <a:p xmlns:a="http://schemas.openxmlformats.org/drawingml/2006/main">
             <a:pPr algn="l">
+              <a:buNone/>
               <a:defRPr sz="1125" b="0" i="0">
                 <a:solidFill>
                   <a:srgbClr val="5F6F6C"/>
@@ -6800,6 +8611,7 @@
           <a:lstStyle xmlns:a="http://schemas.openxmlformats.org/drawingml/2006/main"/>
           <a:p xmlns:a="http://schemas.openxmlformats.org/drawingml/2006/main">
             <a:pPr algn="ctr">
+              <a:buNone/>
               <a:defRPr sz="1350" b="1" i="0">
                 <a:solidFill>
                   <a:srgbClr val="FFFFFF"/>
@@ -6850,6 +8662,7 @@
           <a:lstStyle xmlns:a="http://schemas.openxmlformats.org/drawingml/2006/main"/>
           <a:p xmlns:a="http://schemas.openxmlformats.org/drawingml/2006/main">
             <a:pPr algn="l">
+              <a:buNone/>
               <a:defRPr sz="1425" b="1" i="0">
                 <a:solidFill>
                   <a:srgbClr val="111827"/>
@@ -6900,6 +8713,7 @@
           <a:lstStyle xmlns:a="http://schemas.openxmlformats.org/drawingml/2006/main"/>
           <a:p xmlns:a="http://schemas.openxmlformats.org/drawingml/2006/main">
             <a:pPr algn="l">
+              <a:buNone/>
               <a:defRPr sz="1125" b="0" i="0">
                 <a:solidFill>
                   <a:srgbClr val="5F6F6C"/>
@@ -7018,6 +8832,7 @@
           <a:lstStyle xmlns:a="http://schemas.openxmlformats.org/drawingml/2006/main"/>
           <a:p xmlns:a="http://schemas.openxmlformats.org/drawingml/2006/main">
             <a:pPr algn="ctr">
+              <a:buNone/>
               <a:defRPr sz="1350" b="1" i="0">
                 <a:solidFill>
                   <a:srgbClr val="FFFFFF"/>
@@ -7068,6 +8883,7 @@
           <a:lstStyle xmlns:a="http://schemas.openxmlformats.org/drawingml/2006/main"/>
           <a:p xmlns:a="http://schemas.openxmlformats.org/drawingml/2006/main">
             <a:pPr algn="l">
+              <a:buNone/>
               <a:defRPr sz="1425" b="1" i="0">
                 <a:solidFill>
                   <a:srgbClr val="111827"/>
@@ -7118,6 +8934,7 @@
           <a:lstStyle xmlns:a="http://schemas.openxmlformats.org/drawingml/2006/main"/>
           <a:p xmlns:a="http://schemas.openxmlformats.org/drawingml/2006/main">
             <a:pPr algn="l">
+              <a:buNone/>
               <a:defRPr sz="1125" b="0" i="0">
                 <a:solidFill>
                   <a:srgbClr val="5F6F6C"/>
@@ -7203,6 +9020,7 @@
           <a:lstStyle xmlns:a="http://schemas.openxmlformats.org/drawingml/2006/main"/>
           <a:p xmlns:a="http://schemas.openxmlformats.org/drawingml/2006/main">
             <a:pPr algn="l">
+              <a:buNone/>
               <a:defRPr sz="1650" b="1" i="0">
                 <a:solidFill>
                   <a:srgbClr val="111827"/>
@@ -7253,6 +9071,7 @@
           <a:lstStyle xmlns:a="http://schemas.openxmlformats.org/drawingml/2006/main"/>
           <a:p xmlns:a="http://schemas.openxmlformats.org/drawingml/2006/main">
             <a:pPr algn="l">
+              <a:buNone/>
               <a:defRPr sz="1275" b="1" i="0">
                 <a:solidFill>
                   <a:srgbClr val="087B73"/>
@@ -7303,6 +9122,7 @@
           <a:lstStyle xmlns:a="http://schemas.openxmlformats.org/drawingml/2006/main"/>
           <a:p xmlns:a="http://schemas.openxmlformats.org/drawingml/2006/main">
             <a:pPr algn="l">
+              <a:buNone/>
               <a:defRPr sz="1275" b="0" i="0">
                 <a:solidFill>
                   <a:srgbClr val="111827"/>
@@ -7353,6 +9173,7 @@
           <a:lstStyle xmlns:a="http://schemas.openxmlformats.org/drawingml/2006/main"/>
           <a:p xmlns:a="http://schemas.openxmlformats.org/drawingml/2006/main">
             <a:pPr algn="l">
+              <a:buNone/>
               <a:defRPr sz="1275" b="1" i="0">
                 <a:solidFill>
                   <a:srgbClr val="087B73"/>
@@ -7403,6 +9224,7 @@
           <a:lstStyle xmlns:a="http://schemas.openxmlformats.org/drawingml/2006/main"/>
           <a:p xmlns:a="http://schemas.openxmlformats.org/drawingml/2006/main">
             <a:pPr algn="l">
+              <a:buNone/>
               <a:defRPr sz="1275" b="0" i="0">
                 <a:solidFill>
                   <a:srgbClr val="111827"/>
@@ -7453,6 +9275,7 @@
           <a:lstStyle xmlns:a="http://schemas.openxmlformats.org/drawingml/2006/main"/>
           <a:p xmlns:a="http://schemas.openxmlformats.org/drawingml/2006/main">
             <a:pPr algn="l">
+              <a:buNone/>
               <a:defRPr sz="1275" b="1" i="0">
                 <a:solidFill>
                   <a:srgbClr val="087B73"/>
@@ -7503,6 +9326,7 @@
           <a:lstStyle xmlns:a="http://schemas.openxmlformats.org/drawingml/2006/main"/>
           <a:p xmlns:a="http://schemas.openxmlformats.org/drawingml/2006/main">
             <a:pPr algn="l">
+              <a:buNone/>
               <a:defRPr sz="1275" b="0" i="0">
                 <a:solidFill>
                   <a:srgbClr val="111827"/>
@@ -7588,6 +9412,7 @@
           <a:lstStyle xmlns:a="http://schemas.openxmlformats.org/drawingml/2006/main"/>
           <a:p xmlns:a="http://schemas.openxmlformats.org/drawingml/2006/main">
             <a:pPr algn="l">
+              <a:buNone/>
               <a:defRPr sz="1650" b="1" i="0">
                 <a:solidFill>
                   <a:srgbClr val="064E49"/>
@@ -7638,6 +9463,7 @@
           <a:lstStyle xmlns:a="http://schemas.openxmlformats.org/drawingml/2006/main"/>
           <a:p xmlns:a="http://schemas.openxmlformats.org/drawingml/2006/main">
             <a:pPr algn="l">
+              <a:buNone/>
               <a:defRPr sz="1425" b="0" i="0">
                 <a:solidFill>
                   <a:srgbClr val="111827"/>
@@ -7717,6 +9543,7 @@
           <a:lstStyle xmlns:a="http://schemas.openxmlformats.org/drawingml/2006/main"/>
           <a:p xmlns:a="http://schemas.openxmlformats.org/drawingml/2006/main">
             <a:pPr algn="l">
+              <a:buNone/>
               <a:defRPr sz="1200" b="1" i="0">
                 <a:solidFill>
                   <a:srgbClr val="087B73"/>
@@ -7767,6 +9594,7 @@
           <a:lstStyle xmlns:a="http://schemas.openxmlformats.org/drawingml/2006/main"/>
           <a:p xmlns:a="http://schemas.openxmlformats.org/drawingml/2006/main">
             <a:pPr algn="l">
+              <a:buNone/>
               <a:defRPr sz="2850" b="1" i="0">
                 <a:solidFill>
                   <a:srgbClr val="111827"/>
@@ -7817,6 +9645,7 @@
           <a:lstStyle xmlns:a="http://schemas.openxmlformats.org/drawingml/2006/main"/>
           <a:p xmlns:a="http://schemas.openxmlformats.org/drawingml/2006/main">
             <a:pPr algn="l">
+              <a:buNone/>
               <a:defRPr sz="1275" b="0" i="0">
                 <a:solidFill>
                   <a:srgbClr val="5F6F6C"/>
@@ -7935,6 +9764,7 @@
           <a:lstStyle xmlns:a="http://schemas.openxmlformats.org/drawingml/2006/main"/>
           <a:p xmlns:a="http://schemas.openxmlformats.org/drawingml/2006/main">
             <a:pPr algn="l">
+              <a:buNone/>
               <a:defRPr sz="1800" b="1" i="0">
                 <a:solidFill>
                   <a:srgbClr val="111827"/>
@@ -7985,6 +9815,7 @@
           <a:lstStyle xmlns:a="http://schemas.openxmlformats.org/drawingml/2006/main"/>
           <a:p xmlns:a="http://schemas.openxmlformats.org/drawingml/2006/main">
             <a:pPr algn="l">
+              <a:buNone/>
               <a:defRPr sz="1200" b="1" i="0">
                 <a:solidFill>
                   <a:srgbClr val="087B73"/>
@@ -8035,6 +9866,7 @@
           <a:lstStyle xmlns:a="http://schemas.openxmlformats.org/drawingml/2006/main"/>
           <a:p xmlns:a="http://schemas.openxmlformats.org/drawingml/2006/main">
             <a:pPr algn="l">
+              <a:buNone/>
               <a:defRPr sz="1200" b="0" i="0">
                 <a:solidFill>
                   <a:srgbClr val="111827"/>
@@ -8085,6 +9917,7 @@
           <a:lstStyle xmlns:a="http://schemas.openxmlformats.org/drawingml/2006/main"/>
           <a:p xmlns:a="http://schemas.openxmlformats.org/drawingml/2006/main">
             <a:pPr algn="l">
+              <a:buNone/>
               <a:defRPr sz="1200" b="1" i="0">
                 <a:solidFill>
                   <a:srgbClr val="087B73"/>
@@ -8135,6 +9968,7 @@
           <a:lstStyle xmlns:a="http://schemas.openxmlformats.org/drawingml/2006/main"/>
           <a:p xmlns:a="http://schemas.openxmlformats.org/drawingml/2006/main">
             <a:pPr algn="l">
+              <a:buNone/>
               <a:defRPr sz="1200" b="0" i="0">
                 <a:solidFill>
                   <a:srgbClr val="111827"/>
@@ -8185,6 +10019,7 @@
           <a:lstStyle xmlns:a="http://schemas.openxmlformats.org/drawingml/2006/main"/>
           <a:p xmlns:a="http://schemas.openxmlformats.org/drawingml/2006/main">
             <a:pPr algn="l">
+              <a:buNone/>
               <a:defRPr sz="1200" b="1" i="0">
                 <a:solidFill>
                   <a:srgbClr val="087B73"/>
@@ -8235,6 +10070,7 @@
           <a:lstStyle xmlns:a="http://schemas.openxmlformats.org/drawingml/2006/main"/>
           <a:p xmlns:a="http://schemas.openxmlformats.org/drawingml/2006/main">
             <a:pPr algn="l">
+              <a:buNone/>
               <a:defRPr sz="1200" b="0" i="0">
                 <a:solidFill>
                   <a:srgbClr val="111827"/>
@@ -8320,6 +10156,7 @@
           <a:lstStyle xmlns:a="http://schemas.openxmlformats.org/drawingml/2006/main"/>
           <a:p xmlns:a="http://schemas.openxmlformats.org/drawingml/2006/main">
             <a:pPr algn="l">
+              <a:buNone/>
               <a:defRPr sz="1800" b="1" i="0">
                 <a:solidFill>
                   <a:srgbClr val="111827"/>
@@ -8370,6 +10207,7 @@
           <a:lstStyle xmlns:a="http://schemas.openxmlformats.org/drawingml/2006/main"/>
           <a:p xmlns:a="http://schemas.openxmlformats.org/drawingml/2006/main">
             <a:pPr algn="l">
+              <a:buNone/>
               <a:defRPr sz="1200" b="1" i="0">
                 <a:solidFill>
                   <a:srgbClr val="087B73"/>
@@ -8420,6 +10258,7 @@
           <a:lstStyle xmlns:a="http://schemas.openxmlformats.org/drawingml/2006/main"/>
           <a:p xmlns:a="http://schemas.openxmlformats.org/drawingml/2006/main">
             <a:pPr algn="l">
+              <a:buNone/>
               <a:defRPr sz="1200" b="0" i="0">
                 <a:solidFill>
                   <a:srgbClr val="111827"/>
@@ -8470,6 +10309,7 @@
           <a:lstStyle xmlns:a="http://schemas.openxmlformats.org/drawingml/2006/main"/>
           <a:p xmlns:a="http://schemas.openxmlformats.org/drawingml/2006/main">
             <a:pPr algn="l">
+              <a:buNone/>
               <a:defRPr sz="1200" b="1" i="0">
                 <a:solidFill>
                   <a:srgbClr val="087B73"/>
@@ -8520,6 +10360,7 @@
           <a:lstStyle xmlns:a="http://schemas.openxmlformats.org/drawingml/2006/main"/>
           <a:p xmlns:a="http://schemas.openxmlformats.org/drawingml/2006/main">
             <a:pPr algn="l">
+              <a:buNone/>
               <a:defRPr sz="1200" b="0" i="0">
                 <a:solidFill>
                   <a:srgbClr val="111827"/>
@@ -8570,6 +10411,7 @@
           <a:lstStyle xmlns:a="http://schemas.openxmlformats.org/drawingml/2006/main"/>
           <a:p xmlns:a="http://schemas.openxmlformats.org/drawingml/2006/main">
             <a:pPr algn="l">
+              <a:buNone/>
               <a:defRPr sz="1200" b="1" i="0">
                 <a:solidFill>
                   <a:srgbClr val="087B73"/>
@@ -8620,6 +10462,7 @@
           <a:lstStyle xmlns:a="http://schemas.openxmlformats.org/drawingml/2006/main"/>
           <a:p xmlns:a="http://schemas.openxmlformats.org/drawingml/2006/main">
             <a:pPr algn="l">
+              <a:buNone/>
               <a:defRPr sz="1200" b="0" i="0">
                 <a:solidFill>
                   <a:srgbClr val="111827"/>
@@ -8670,6 +10513,7 @@
           <a:lstStyle xmlns:a="http://schemas.openxmlformats.org/drawingml/2006/main"/>
           <a:p xmlns:a="http://schemas.openxmlformats.org/drawingml/2006/main">
             <a:pPr algn="l">
+              <a:buNone/>
               <a:defRPr sz="1200" b="1" i="0">
                 <a:solidFill>
                   <a:srgbClr val="087B73"/>
@@ -8720,6 +10564,7 @@
           <a:lstStyle xmlns:a="http://schemas.openxmlformats.org/drawingml/2006/main"/>
           <a:p xmlns:a="http://schemas.openxmlformats.org/drawingml/2006/main">
             <a:pPr algn="l">
+              <a:buNone/>
               <a:defRPr sz="1200" b="0" i="0">
                 <a:solidFill>
                   <a:srgbClr val="111827"/>
@@ -8770,6 +10615,7 @@
           <a:lstStyle xmlns:a="http://schemas.openxmlformats.org/drawingml/2006/main"/>
           <a:p xmlns:a="http://schemas.openxmlformats.org/drawingml/2006/main">
             <a:pPr algn="l">
+              <a:buNone/>
               <a:defRPr sz="1200" b="1" i="0">
                 <a:solidFill>
                   <a:srgbClr val="087B73"/>
@@ -8820,6 +10666,7 @@
           <a:lstStyle xmlns:a="http://schemas.openxmlformats.org/drawingml/2006/main"/>
           <a:p xmlns:a="http://schemas.openxmlformats.org/drawingml/2006/main">
             <a:pPr algn="l">
+              <a:buNone/>
               <a:defRPr sz="1200" b="0" i="0">
                 <a:solidFill>
                   <a:srgbClr val="111827"/>
@@ -8905,6 +10752,7 @@
           <a:lstStyle xmlns:a="http://schemas.openxmlformats.org/drawingml/2006/main"/>
           <a:p xmlns:a="http://schemas.openxmlformats.org/drawingml/2006/main">
             <a:pPr algn="l">
+              <a:buNone/>
               <a:defRPr sz="1800" b="1" i="0">
                 <a:solidFill>
                   <a:srgbClr val="111827"/>
@@ -8955,6 +10803,7 @@
           <a:lstStyle xmlns:a="http://schemas.openxmlformats.org/drawingml/2006/main"/>
           <a:p xmlns:a="http://schemas.openxmlformats.org/drawingml/2006/main">
             <a:pPr algn="l">
+              <a:buNone/>
               <a:defRPr sz="1200" b="1" i="0">
                 <a:solidFill>
                   <a:srgbClr val="087B73"/>
@@ -9005,6 +10854,7 @@
           <a:lstStyle xmlns:a="http://schemas.openxmlformats.org/drawingml/2006/main"/>
           <a:p xmlns:a="http://schemas.openxmlformats.org/drawingml/2006/main">
             <a:pPr algn="l">
+              <a:buNone/>
               <a:defRPr sz="1200" b="0" i="0">
                 <a:solidFill>
                   <a:srgbClr val="111827"/>
@@ -9055,6 +10905,7 @@
           <a:lstStyle xmlns:a="http://schemas.openxmlformats.org/drawingml/2006/main"/>
           <a:p xmlns:a="http://schemas.openxmlformats.org/drawingml/2006/main">
             <a:pPr algn="l">
+              <a:buNone/>
               <a:defRPr sz="1200" b="1" i="0">
                 <a:solidFill>
                   <a:srgbClr val="087B73"/>
@@ -9105,6 +10956,7 @@
           <a:lstStyle xmlns:a="http://schemas.openxmlformats.org/drawingml/2006/main"/>
           <a:p xmlns:a="http://schemas.openxmlformats.org/drawingml/2006/main">
             <a:pPr algn="l">
+              <a:buNone/>
               <a:defRPr sz="1200" b="0" i="0">
                 <a:solidFill>
                   <a:srgbClr val="111827"/>
@@ -9155,6 +11007,7 @@
           <a:lstStyle xmlns:a="http://schemas.openxmlformats.org/drawingml/2006/main"/>
           <a:p xmlns:a="http://schemas.openxmlformats.org/drawingml/2006/main">
             <a:pPr algn="l">
+              <a:buNone/>
               <a:defRPr sz="1200" b="1" i="0">
                 <a:solidFill>
                   <a:srgbClr val="087B73"/>
@@ -9205,6 +11058,7 @@
           <a:lstStyle xmlns:a="http://schemas.openxmlformats.org/drawingml/2006/main"/>
           <a:p xmlns:a="http://schemas.openxmlformats.org/drawingml/2006/main">
             <a:pPr algn="l">
+              <a:buNone/>
               <a:defRPr sz="1200" b="0" i="0">
                 <a:solidFill>
                   <a:srgbClr val="111827"/>
@@ -9255,6 +11109,7 @@
           <a:lstStyle xmlns:a="http://schemas.openxmlformats.org/drawingml/2006/main"/>
           <a:p xmlns:a="http://schemas.openxmlformats.org/drawingml/2006/main">
             <a:pPr algn="l">
+              <a:buNone/>
               <a:defRPr sz="1200" b="1" i="0">
                 <a:solidFill>
                   <a:srgbClr val="087B73"/>
@@ -9305,6 +11160,7 @@
           <a:lstStyle xmlns:a="http://schemas.openxmlformats.org/drawingml/2006/main"/>
           <a:p xmlns:a="http://schemas.openxmlformats.org/drawingml/2006/main">
             <a:pPr algn="l">
+              <a:buNone/>
               <a:defRPr sz="1200" b="0" i="0">
                 <a:solidFill>
                   <a:srgbClr val="111827"/>
@@ -9390,6 +11246,7 @@
           <a:lstStyle xmlns:a="http://schemas.openxmlformats.org/drawingml/2006/main"/>
           <a:p xmlns:a="http://schemas.openxmlformats.org/drawingml/2006/main">
             <a:pPr algn="ctr">
+              <a:buNone/>
               <a:defRPr sz="1500" b="1" i="0">
                 <a:solidFill>
                   <a:srgbClr val="FFFFFF"/>
@@ -9469,6 +11326,7 @@
           <a:lstStyle xmlns:a="http://schemas.openxmlformats.org/drawingml/2006/main"/>
           <a:p xmlns:a="http://schemas.openxmlformats.org/drawingml/2006/main">
             <a:pPr algn="l">
+              <a:buNone/>
               <a:defRPr sz="1200" b="1" i="0">
                 <a:solidFill>
                   <a:srgbClr val="087B73"/>
@@ -9519,6 +11377,7 @@
           <a:lstStyle xmlns:a="http://schemas.openxmlformats.org/drawingml/2006/main"/>
           <a:p xmlns:a="http://schemas.openxmlformats.org/drawingml/2006/main">
             <a:pPr algn="l">
+              <a:buNone/>
               <a:defRPr sz="2850" b="1" i="0">
                 <a:solidFill>
                   <a:srgbClr val="111827"/>
@@ -9569,6 +11428,7 @@
           <a:lstStyle xmlns:a="http://schemas.openxmlformats.org/drawingml/2006/main"/>
           <a:p xmlns:a="http://schemas.openxmlformats.org/drawingml/2006/main">
             <a:pPr algn="l">
+              <a:buNone/>
               <a:defRPr sz="1275" b="0" i="0">
                 <a:solidFill>
                   <a:srgbClr val="5F6F6C"/>
@@ -9687,6 +11547,7 @@
           <a:lstStyle xmlns:a="http://schemas.openxmlformats.org/drawingml/2006/main"/>
           <a:p xmlns:a="http://schemas.openxmlformats.org/drawingml/2006/main">
             <a:pPr algn="l">
+              <a:buNone/>
               <a:defRPr sz="1875" b="1" i="0">
                 <a:solidFill>
                   <a:srgbClr val="111827"/>
@@ -9737,6 +11598,7 @@
           <a:lstStyle xmlns:a="http://schemas.openxmlformats.org/drawingml/2006/main"/>
           <a:p xmlns:a="http://schemas.openxmlformats.org/drawingml/2006/main">
             <a:pPr algn="l">
+              <a:buNone/>
               <a:defRPr sz="1275" b="0" i="0">
                 <a:solidFill>
                   <a:srgbClr val="111827"/>
@@ -9787,6 +11649,7 @@
           <a:lstStyle xmlns:a="http://schemas.openxmlformats.org/drawingml/2006/main"/>
           <a:p xmlns:a="http://schemas.openxmlformats.org/drawingml/2006/main">
             <a:pPr algn="l">
+              <a:buNone/>
               <a:defRPr sz="1275" b="0" i="0">
                 <a:solidFill>
                   <a:srgbClr val="111827"/>
@@ -9837,6 +11700,7 @@
           <a:lstStyle xmlns:a="http://schemas.openxmlformats.org/drawingml/2006/main"/>
           <a:p xmlns:a="http://schemas.openxmlformats.org/drawingml/2006/main">
             <a:pPr algn="l">
+              <a:buNone/>
               <a:defRPr sz="1275" b="0" i="0">
                 <a:solidFill>
                   <a:srgbClr val="111827"/>
@@ -9887,6 +11751,7 @@
           <a:lstStyle xmlns:a="http://schemas.openxmlformats.org/drawingml/2006/main"/>
           <a:p xmlns:a="http://schemas.openxmlformats.org/drawingml/2006/main">
             <a:pPr algn="l">
+              <a:buNone/>
               <a:defRPr sz="1275" b="0" i="0">
                 <a:solidFill>
                   <a:srgbClr val="111827"/>
@@ -9937,6 +11802,7 @@
           <a:lstStyle xmlns:a="http://schemas.openxmlformats.org/drawingml/2006/main"/>
           <a:p xmlns:a="http://schemas.openxmlformats.org/drawingml/2006/main">
             <a:pPr algn="l">
+              <a:buNone/>
               <a:defRPr sz="1275" b="0" i="0">
                 <a:solidFill>
                   <a:srgbClr val="111827"/>
@@ -9987,6 +11853,7 @@
           <a:lstStyle xmlns:a="http://schemas.openxmlformats.org/drawingml/2006/main"/>
           <a:p xmlns:a="http://schemas.openxmlformats.org/drawingml/2006/main">
             <a:pPr algn="l">
+              <a:buNone/>
               <a:defRPr sz="1275" b="0" i="0">
                 <a:solidFill>
                   <a:srgbClr val="111827"/>
@@ -10037,6 +11904,7 @@
           <a:lstStyle xmlns:a="http://schemas.openxmlformats.org/drawingml/2006/main"/>
           <a:p xmlns:a="http://schemas.openxmlformats.org/drawingml/2006/main">
             <a:pPr algn="l">
+              <a:buNone/>
               <a:defRPr sz="1275" b="0" i="0">
                 <a:solidFill>
                   <a:srgbClr val="111827"/>
@@ -10087,6 +11955,7 @@
           <a:lstStyle xmlns:a="http://schemas.openxmlformats.org/drawingml/2006/main"/>
           <a:p xmlns:a="http://schemas.openxmlformats.org/drawingml/2006/main">
             <a:pPr algn="l">
+              <a:buNone/>
               <a:defRPr sz="1275" b="0" i="0">
                 <a:solidFill>
                   <a:srgbClr val="111827"/>
@@ -10137,6 +12006,7 @@
           <a:lstStyle xmlns:a="http://schemas.openxmlformats.org/drawingml/2006/main"/>
           <a:p xmlns:a="http://schemas.openxmlformats.org/drawingml/2006/main">
             <a:pPr algn="l">
+              <a:buNone/>
               <a:defRPr sz="1275" b="0" i="0">
                 <a:solidFill>
                   <a:srgbClr val="111827"/>
@@ -10187,6 +12057,7 @@
           <a:lstStyle xmlns:a="http://schemas.openxmlformats.org/drawingml/2006/main"/>
           <a:p xmlns:a="http://schemas.openxmlformats.org/drawingml/2006/main">
             <a:pPr algn="l">
+              <a:buNone/>
               <a:defRPr sz="1275" b="0" i="0">
                 <a:solidFill>
                   <a:srgbClr val="111827"/>
@@ -10272,6 +12143,7 @@
           <a:lstStyle xmlns:a="http://schemas.openxmlformats.org/drawingml/2006/main"/>
           <a:p xmlns:a="http://schemas.openxmlformats.org/drawingml/2006/main">
             <a:pPr algn="l">
+              <a:buNone/>
               <a:defRPr sz="1875" b="1" i="0">
                 <a:solidFill>
                   <a:srgbClr val="064E49"/>
@@ -10322,6 +12194,7 @@
           <a:lstStyle xmlns:a="http://schemas.openxmlformats.org/drawingml/2006/main"/>
           <a:p xmlns:a="http://schemas.openxmlformats.org/drawingml/2006/main">
             <a:pPr algn="l">
+              <a:buNone/>
               <a:defRPr sz="1425" b="0" i="0">
                 <a:solidFill>
                   <a:srgbClr val="111827"/>
@@ -10407,6 +12280,7 @@
           <a:lstStyle xmlns:a="http://schemas.openxmlformats.org/drawingml/2006/main"/>
           <a:p xmlns:a="http://schemas.openxmlformats.org/drawingml/2006/main">
             <a:pPr algn="l">
+              <a:buNone/>
               <a:defRPr sz="1875" b="1" i="0">
                 <a:solidFill>
                   <a:srgbClr val="111827"/>
@@ -10457,6 +12331,7 @@
           <a:lstStyle xmlns:a="http://schemas.openxmlformats.org/drawingml/2006/main"/>
           <a:p xmlns:a="http://schemas.openxmlformats.org/drawingml/2006/main">
             <a:pPr algn="l">
+              <a:buNone/>
               <a:defRPr sz="1275" b="1" i="0">
                 <a:solidFill>
                   <a:srgbClr val="087B73"/>
@@ -10507,6 +12382,7 @@
           <a:lstStyle xmlns:a="http://schemas.openxmlformats.org/drawingml/2006/main"/>
           <a:p xmlns:a="http://schemas.openxmlformats.org/drawingml/2006/main">
             <a:pPr algn="l">
+              <a:buNone/>
               <a:defRPr sz="1275" b="0" i="0">
                 <a:solidFill>
                   <a:srgbClr val="111827"/>
@@ -10557,6 +12433,7 @@
           <a:lstStyle xmlns:a="http://schemas.openxmlformats.org/drawingml/2006/main"/>
           <a:p xmlns:a="http://schemas.openxmlformats.org/drawingml/2006/main">
             <a:pPr algn="l">
+              <a:buNone/>
               <a:defRPr sz="1275" b="1" i="0">
                 <a:solidFill>
                   <a:srgbClr val="087B73"/>
@@ -10607,6 +12484,7 @@
           <a:lstStyle xmlns:a="http://schemas.openxmlformats.org/drawingml/2006/main"/>
           <a:p xmlns:a="http://schemas.openxmlformats.org/drawingml/2006/main">
             <a:pPr algn="l">
+              <a:buNone/>
               <a:defRPr sz="1275" b="0" i="0">
                 <a:solidFill>
                   <a:srgbClr val="111827"/>
@@ -10657,6 +12535,7 @@
           <a:lstStyle xmlns:a="http://schemas.openxmlformats.org/drawingml/2006/main"/>
           <a:p xmlns:a="http://schemas.openxmlformats.org/drawingml/2006/main">
             <a:pPr algn="l">
+              <a:buNone/>
               <a:defRPr sz="1275" b="1" i="0">
                 <a:solidFill>
                   <a:srgbClr val="087B73"/>
@@ -10707,6 +12586,7 @@
           <a:lstStyle xmlns:a="http://schemas.openxmlformats.org/drawingml/2006/main"/>
           <a:p xmlns:a="http://schemas.openxmlformats.org/drawingml/2006/main">
             <a:pPr algn="l">
+              <a:buNone/>
               <a:defRPr sz="1275" b="0" i="0">
                 <a:solidFill>
                   <a:srgbClr val="111827"/>
@@ -10786,6 +12666,7 @@
           <a:lstStyle xmlns:a="http://schemas.openxmlformats.org/drawingml/2006/main"/>
           <a:p xmlns:a="http://schemas.openxmlformats.org/drawingml/2006/main">
             <a:pPr algn="l">
+              <a:buNone/>
               <a:defRPr sz="1200" b="1" i="0">
                 <a:solidFill>
                   <a:srgbClr val="087B73"/>
@@ -10836,6 +12717,7 @@
           <a:lstStyle xmlns:a="http://schemas.openxmlformats.org/drawingml/2006/main"/>
           <a:p xmlns:a="http://schemas.openxmlformats.org/drawingml/2006/main">
             <a:pPr algn="l">
+              <a:buNone/>
               <a:defRPr sz="2850" b="1" i="0">
                 <a:solidFill>
                   <a:srgbClr val="111827"/>
@@ -10886,6 +12768,7 @@
           <a:lstStyle xmlns:a="http://schemas.openxmlformats.org/drawingml/2006/main"/>
           <a:p xmlns:a="http://schemas.openxmlformats.org/drawingml/2006/main">
             <a:pPr algn="l">
+              <a:buNone/>
               <a:defRPr sz="1275" b="0" i="0">
                 <a:solidFill>
                   <a:srgbClr val="5F6F6C"/>
@@ -11037,6 +12920,7 @@
           <a:lstStyle xmlns:a="http://schemas.openxmlformats.org/drawingml/2006/main"/>
           <a:p xmlns:a="http://schemas.openxmlformats.org/drawingml/2006/main">
             <a:pPr algn="ctr">
+              <a:buNone/>
               <a:defRPr sz="1350" b="1" i="0">
                 <a:solidFill>
                   <a:srgbClr val="FFFFFF"/>
@@ -11087,6 +12971,7 @@
           <a:lstStyle xmlns:a="http://schemas.openxmlformats.org/drawingml/2006/main"/>
           <a:p xmlns:a="http://schemas.openxmlformats.org/drawingml/2006/main">
             <a:pPr algn="l">
+              <a:buNone/>
               <a:defRPr sz="1425" b="1" i="0">
                 <a:solidFill>
                   <a:srgbClr val="111827"/>
@@ -11137,6 +13022,7 @@
           <a:lstStyle xmlns:a="http://schemas.openxmlformats.org/drawingml/2006/main"/>
           <a:p xmlns:a="http://schemas.openxmlformats.org/drawingml/2006/main">
             <a:pPr algn="l">
+              <a:buNone/>
               <a:defRPr sz="1125" b="0" i="0">
                 <a:solidFill>
                   <a:srgbClr val="5F6F6C"/>
@@ -11255,6 +13141,7 @@
           <a:lstStyle xmlns:a="http://schemas.openxmlformats.org/drawingml/2006/main"/>
           <a:p xmlns:a="http://schemas.openxmlformats.org/drawingml/2006/main">
             <a:pPr algn="ctr">
+              <a:buNone/>
               <a:defRPr sz="1350" b="1" i="0">
                 <a:solidFill>
                   <a:srgbClr val="FFFFFF"/>
@@ -11305,6 +13192,7 @@
           <a:lstStyle xmlns:a="http://schemas.openxmlformats.org/drawingml/2006/main"/>
           <a:p xmlns:a="http://schemas.openxmlformats.org/drawingml/2006/main">
             <a:pPr algn="l">
+              <a:buNone/>
               <a:defRPr sz="1425" b="1" i="0">
                 <a:solidFill>
                   <a:srgbClr val="111827"/>
@@ -11355,6 +13243,7 @@
           <a:lstStyle xmlns:a="http://schemas.openxmlformats.org/drawingml/2006/main"/>
           <a:p xmlns:a="http://schemas.openxmlformats.org/drawingml/2006/main">
             <a:pPr algn="l">
+              <a:buNone/>
               <a:defRPr sz="1125" b="0" i="0">
                 <a:solidFill>
                   <a:srgbClr val="5F6F6C"/>
@@ -11473,6 +13362,7 @@
           <a:lstStyle xmlns:a="http://schemas.openxmlformats.org/drawingml/2006/main"/>
           <a:p xmlns:a="http://schemas.openxmlformats.org/drawingml/2006/main">
             <a:pPr algn="ctr">
+              <a:buNone/>
               <a:defRPr sz="1350" b="1" i="0">
                 <a:solidFill>
                   <a:srgbClr val="FFFFFF"/>
@@ -11523,6 +13413,7 @@
           <a:lstStyle xmlns:a="http://schemas.openxmlformats.org/drawingml/2006/main"/>
           <a:p xmlns:a="http://schemas.openxmlformats.org/drawingml/2006/main">
             <a:pPr algn="l">
+              <a:buNone/>
               <a:defRPr sz="1425" b="1" i="0">
                 <a:solidFill>
                   <a:srgbClr val="111827"/>
@@ -11573,6 +13464,7 @@
           <a:lstStyle xmlns:a="http://schemas.openxmlformats.org/drawingml/2006/main"/>
           <a:p xmlns:a="http://schemas.openxmlformats.org/drawingml/2006/main">
             <a:pPr algn="l">
+              <a:buNone/>
               <a:defRPr sz="1125" b="0" i="0">
                 <a:solidFill>
                   <a:srgbClr val="5F6F6C"/>
@@ -11658,6 +13550,7 @@
           <a:lstStyle xmlns:a="http://schemas.openxmlformats.org/drawingml/2006/main"/>
           <a:p xmlns:a="http://schemas.openxmlformats.org/drawingml/2006/main">
             <a:pPr algn="l">
+              <a:buNone/>
               <a:defRPr sz="1875" b="1" i="0">
                 <a:solidFill>
                   <a:srgbClr val="111827"/>
@@ -11708,6 +13601,7 @@
           <a:lstStyle xmlns:a="http://schemas.openxmlformats.org/drawingml/2006/main"/>
           <a:p xmlns:a="http://schemas.openxmlformats.org/drawingml/2006/main">
             <a:pPr algn="l">
+              <a:buNone/>
               <a:defRPr sz="1425" b="0" i="0">
                 <a:solidFill>
                   <a:srgbClr val="111827"/>
@@ -11826,6 +13720,7 @@
           <a:lstStyle xmlns:a="http://schemas.openxmlformats.org/drawingml/2006/main"/>
           <a:p xmlns:a="http://schemas.openxmlformats.org/drawingml/2006/main">
             <a:pPr algn="l">
+              <a:buNone/>
               <a:defRPr sz="975" b="1" i="0">
                 <a:solidFill>
                   <a:srgbClr val="5F6F6C"/>
@@ -11876,6 +13771,7 @@
           <a:lstStyle xmlns:a="http://schemas.openxmlformats.org/drawingml/2006/main"/>
           <a:p xmlns:a="http://schemas.openxmlformats.org/drawingml/2006/main">
             <a:pPr algn="l">
+              <a:buNone/>
               <a:defRPr sz="2550" b="1" i="0">
                 <a:solidFill>
                   <a:srgbClr val="111827"/>
@@ -11994,6 +13890,7 @@
           <a:lstStyle xmlns:a="http://schemas.openxmlformats.org/drawingml/2006/main"/>
           <a:p xmlns:a="http://schemas.openxmlformats.org/drawingml/2006/main">
             <a:pPr algn="l">
+              <a:buNone/>
               <a:defRPr sz="975" b="1" i="0">
                 <a:solidFill>
                   <a:srgbClr val="5F6F6C"/>
@@ -12044,6 +13941,7 @@
           <a:lstStyle xmlns:a="http://schemas.openxmlformats.org/drawingml/2006/main"/>
           <a:p xmlns:a="http://schemas.openxmlformats.org/drawingml/2006/main">
             <a:pPr algn="l">
+              <a:buNone/>
               <a:defRPr sz="2550" b="1" i="0">
                 <a:solidFill>
                   <a:srgbClr val="111827"/>
@@ -12162,6 +14060,7 @@
           <a:lstStyle xmlns:a="http://schemas.openxmlformats.org/drawingml/2006/main"/>
           <a:p xmlns:a="http://schemas.openxmlformats.org/drawingml/2006/main">
             <a:pPr algn="l">
+              <a:buNone/>
               <a:defRPr sz="975" b="1" i="0">
                 <a:solidFill>
                   <a:srgbClr val="5F6F6C"/>
@@ -12212,6 +14111,7 @@
           <a:lstStyle xmlns:a="http://schemas.openxmlformats.org/drawingml/2006/main"/>
           <a:p xmlns:a="http://schemas.openxmlformats.org/drawingml/2006/main">
             <a:pPr algn="l">
+              <a:buNone/>
               <a:defRPr sz="2550" b="1" i="0">
                 <a:solidFill>
                   <a:srgbClr val="111827"/>
@@ -12330,6 +14230,7 @@
           <a:lstStyle xmlns:a="http://schemas.openxmlformats.org/drawingml/2006/main"/>
           <a:p xmlns:a="http://schemas.openxmlformats.org/drawingml/2006/main">
             <a:pPr algn="l">
+              <a:buNone/>
               <a:defRPr sz="975" b="1" i="0">
                 <a:solidFill>
                   <a:srgbClr val="5F6F6C"/>
@@ -12380,6 +14281,7 @@
           <a:lstStyle xmlns:a="http://schemas.openxmlformats.org/drawingml/2006/main"/>
           <a:p xmlns:a="http://schemas.openxmlformats.org/drawingml/2006/main">
             <a:pPr algn="l">
+              <a:buNone/>
               <a:defRPr sz="2550" b="1" i="0">
                 <a:solidFill>
                   <a:srgbClr val="111827"/>
@@ -12459,6 +14361,7 @@
           <a:lstStyle xmlns:a="http://schemas.openxmlformats.org/drawingml/2006/main"/>
           <a:p xmlns:a="http://schemas.openxmlformats.org/drawingml/2006/main">
             <a:pPr algn="l">
+              <a:buNone/>
               <a:defRPr sz="1200" b="1" i="0">
                 <a:solidFill>
                   <a:srgbClr val="087B73"/>
@@ -12509,6 +14412,7 @@
           <a:lstStyle xmlns:a="http://schemas.openxmlformats.org/drawingml/2006/main"/>
           <a:p xmlns:a="http://schemas.openxmlformats.org/drawingml/2006/main">
             <a:pPr algn="l">
+              <a:buNone/>
               <a:defRPr sz="2850" b="1" i="0">
                 <a:solidFill>
                   <a:srgbClr val="111827"/>
@@ -12559,6 +14463,7 @@
           <a:lstStyle xmlns:a="http://schemas.openxmlformats.org/drawingml/2006/main"/>
           <a:p xmlns:a="http://schemas.openxmlformats.org/drawingml/2006/main">
             <a:pPr algn="l">
+              <a:buNone/>
               <a:defRPr sz="1275" b="0" i="0">
                 <a:solidFill>
                   <a:srgbClr val="5F6F6C"/>
@@ -12710,6 +14615,7 @@
           <a:lstStyle xmlns:a="http://schemas.openxmlformats.org/drawingml/2006/main"/>
           <a:p xmlns:a="http://schemas.openxmlformats.org/drawingml/2006/main">
             <a:pPr algn="l">
+              <a:buNone/>
               <a:defRPr sz="975" b="1" i="0">
                 <a:solidFill>
                   <a:srgbClr val="5F6F6C"/>
@@ -12760,6 +14666,7 @@
           <a:lstStyle xmlns:a="http://schemas.openxmlformats.org/drawingml/2006/main"/>
           <a:p xmlns:a="http://schemas.openxmlformats.org/drawingml/2006/main">
             <a:pPr algn="l">
+              <a:buNone/>
               <a:defRPr sz="2550" b="1" i="0">
                 <a:solidFill>
                   <a:srgbClr val="111827"/>
@@ -12878,6 +14785,7 @@
           <a:lstStyle xmlns:a="http://schemas.openxmlformats.org/drawingml/2006/main"/>
           <a:p xmlns:a="http://schemas.openxmlformats.org/drawingml/2006/main">
             <a:pPr algn="l">
+              <a:buNone/>
               <a:defRPr sz="975" b="1" i="0">
                 <a:solidFill>
                   <a:srgbClr val="5F6F6C"/>
@@ -12928,6 +14836,7 @@
           <a:lstStyle xmlns:a="http://schemas.openxmlformats.org/drawingml/2006/main"/>
           <a:p xmlns:a="http://schemas.openxmlformats.org/drawingml/2006/main">
             <a:pPr algn="l">
+              <a:buNone/>
               <a:defRPr sz="2550" b="1" i="0">
                 <a:solidFill>
                   <a:srgbClr val="111827"/>
@@ -13046,6 +14955,7 @@
           <a:lstStyle xmlns:a="http://schemas.openxmlformats.org/drawingml/2006/main"/>
           <a:p xmlns:a="http://schemas.openxmlformats.org/drawingml/2006/main">
             <a:pPr algn="l">
+              <a:buNone/>
               <a:defRPr sz="975" b="1" i="0">
                 <a:solidFill>
                   <a:srgbClr val="5F6F6C"/>
@@ -13096,6 +15006,7 @@
           <a:lstStyle xmlns:a="http://schemas.openxmlformats.org/drawingml/2006/main"/>
           <a:p xmlns:a="http://schemas.openxmlformats.org/drawingml/2006/main">
             <a:pPr algn="l">
+              <a:buNone/>
               <a:defRPr sz="2550" b="1" i="0">
                 <a:solidFill>
                   <a:srgbClr val="111827"/>
@@ -13214,6 +15125,7 @@
           <a:lstStyle xmlns:a="http://schemas.openxmlformats.org/drawingml/2006/main"/>
           <a:p xmlns:a="http://schemas.openxmlformats.org/drawingml/2006/main">
             <a:pPr algn="l">
+              <a:buNone/>
               <a:defRPr sz="975" b="1" i="0">
                 <a:solidFill>
                   <a:srgbClr val="5F6F6C"/>
@@ -13264,6 +15176,7 @@
           <a:lstStyle xmlns:a="http://schemas.openxmlformats.org/drawingml/2006/main"/>
           <a:p xmlns:a="http://schemas.openxmlformats.org/drawingml/2006/main">
             <a:pPr algn="l">
+              <a:buNone/>
               <a:defRPr sz="2550" b="1" i="0">
                 <a:solidFill>
                   <a:srgbClr val="111827"/>
@@ -13349,6 +15262,7 @@
           <a:lstStyle xmlns:a="http://schemas.openxmlformats.org/drawingml/2006/main"/>
           <a:p xmlns:a="http://schemas.openxmlformats.org/drawingml/2006/main">
             <a:pPr algn="l">
+              <a:buNone/>
               <a:defRPr sz="1875" b="1" i="0">
                 <a:solidFill>
                   <a:srgbClr val="111827"/>
@@ -13399,6 +15313,7 @@
           <a:lstStyle xmlns:a="http://schemas.openxmlformats.org/drawingml/2006/main"/>
           <a:p xmlns:a="http://schemas.openxmlformats.org/drawingml/2006/main">
             <a:pPr algn="l">
+              <a:buNone/>
               <a:defRPr sz="1275" b="1" i="0">
                 <a:solidFill>
                   <a:srgbClr val="087B73"/>
@@ -13449,6 +15364,7 @@
           <a:lstStyle xmlns:a="http://schemas.openxmlformats.org/drawingml/2006/main"/>
           <a:p xmlns:a="http://schemas.openxmlformats.org/drawingml/2006/main">
             <a:pPr algn="l">
+              <a:buNone/>
               <a:defRPr sz="1275" b="0" i="0">
                 <a:solidFill>
                   <a:srgbClr val="111827"/>
@@ -13499,6 +15415,7 @@
           <a:lstStyle xmlns:a="http://schemas.openxmlformats.org/drawingml/2006/main"/>
           <a:p xmlns:a="http://schemas.openxmlformats.org/drawingml/2006/main">
             <a:pPr algn="l">
+              <a:buNone/>
               <a:defRPr sz="1275" b="1" i="0">
                 <a:solidFill>
                   <a:srgbClr val="087B73"/>
@@ -13549,6 +15466,7 @@
           <a:lstStyle xmlns:a="http://schemas.openxmlformats.org/drawingml/2006/main"/>
           <a:p xmlns:a="http://schemas.openxmlformats.org/drawingml/2006/main">
             <a:pPr algn="l">
+              <a:buNone/>
               <a:defRPr sz="1275" b="0" i="0">
                 <a:solidFill>
                   <a:srgbClr val="111827"/>
@@ -13599,6 +15517,7 @@
           <a:lstStyle xmlns:a="http://schemas.openxmlformats.org/drawingml/2006/main"/>
           <a:p xmlns:a="http://schemas.openxmlformats.org/drawingml/2006/main">
             <a:pPr algn="l">
+              <a:buNone/>
               <a:defRPr sz="1275" b="1" i="0">
                 <a:solidFill>
                   <a:srgbClr val="087B73"/>
@@ -13649,6 +15568,7 @@
           <a:lstStyle xmlns:a="http://schemas.openxmlformats.org/drawingml/2006/main"/>
           <a:p xmlns:a="http://schemas.openxmlformats.org/drawingml/2006/main">
             <a:pPr algn="l">
+              <a:buNone/>
               <a:defRPr sz="1275" b="0" i="0">
                 <a:solidFill>
                   <a:srgbClr val="111827"/>
@@ -13734,6 +15654,7 @@
           <a:lstStyle xmlns:a="http://schemas.openxmlformats.org/drawingml/2006/main"/>
           <a:p xmlns:a="http://schemas.openxmlformats.org/drawingml/2006/main">
             <a:pPr algn="l">
+              <a:buNone/>
               <a:defRPr sz="1875" b="1" i="0">
                 <a:solidFill>
                   <a:srgbClr val="064E49"/>
@@ -13784,6 +15705,7 @@
           <a:lstStyle xmlns:a="http://schemas.openxmlformats.org/drawingml/2006/main"/>
           <a:p xmlns:a="http://schemas.openxmlformats.org/drawingml/2006/main">
             <a:pPr algn="l">
+              <a:buNone/>
               <a:defRPr sz="1425" b="0" i="0">
                 <a:solidFill>
                   <a:srgbClr val="111827"/>
@@ -13869,6 +15791,7 @@
           <a:lstStyle xmlns:a="http://schemas.openxmlformats.org/drawingml/2006/main"/>
           <a:p xmlns:a="http://schemas.openxmlformats.org/drawingml/2006/main">
             <a:pPr algn="l">
+              <a:buNone/>
               <a:defRPr sz="1275" b="1" i="0">
                 <a:solidFill>
                   <a:srgbClr val="064E49"/>
@@ -13919,6 +15842,7 @@
           <a:lstStyle xmlns:a="http://schemas.openxmlformats.org/drawingml/2006/main"/>
           <a:p xmlns:a="http://schemas.openxmlformats.org/drawingml/2006/main">
             <a:pPr algn="l">
+              <a:buNone/>
               <a:defRPr sz="1125" b="0" i="0">
                 <a:solidFill>
                   <a:srgbClr val="111827"/>
@@ -13969,6 +15893,7 @@
           <a:lstStyle xmlns:a="http://schemas.openxmlformats.org/drawingml/2006/main"/>
           <a:p xmlns:a="http://schemas.openxmlformats.org/drawingml/2006/main">
             <a:pPr algn="l">
+              <a:buNone/>
               <a:defRPr sz="1125" b="0" i="0">
                 <a:solidFill>
                   <a:srgbClr val="111827"/>
@@ -14019,6 +15944,7 @@
           <a:lstStyle xmlns:a="http://schemas.openxmlformats.org/drawingml/2006/main"/>
           <a:p xmlns:a="http://schemas.openxmlformats.org/drawingml/2006/main">
             <a:pPr algn="l">
+              <a:buNone/>
               <a:defRPr sz="1125" b="1" i="0">
                 <a:solidFill>
                   <a:srgbClr val="064E49"/>
@@ -14098,6 +16024,7 @@
           <a:lstStyle xmlns:a="http://schemas.openxmlformats.org/drawingml/2006/main"/>
           <a:p xmlns:a="http://schemas.openxmlformats.org/drawingml/2006/main">
             <a:pPr algn="l">
+              <a:buNone/>
               <a:defRPr sz="1200" b="1" i="0">
                 <a:solidFill>
                   <a:srgbClr val="087B73"/>
@@ -14148,6 +16075,7 @@
           <a:lstStyle xmlns:a="http://schemas.openxmlformats.org/drawingml/2006/main"/>
           <a:p xmlns:a="http://schemas.openxmlformats.org/drawingml/2006/main">
             <a:pPr algn="l">
+              <a:buNone/>
               <a:defRPr sz="2850" b="1" i="0">
                 <a:solidFill>
                   <a:srgbClr val="111827"/>
@@ -14198,6 +16126,7 @@
           <a:lstStyle xmlns:a="http://schemas.openxmlformats.org/drawingml/2006/main"/>
           <a:p xmlns:a="http://schemas.openxmlformats.org/drawingml/2006/main">
             <a:pPr algn="l">
+              <a:buNone/>
               <a:defRPr sz="1275" b="0" i="0">
                 <a:solidFill>
                   <a:srgbClr val="5F6F6C"/>
@@ -14250,14 +16179,14 @@
       </p:sp>
       <p:pic>
         <p:nvPicPr>
-          <p:cNvPr id="22" name=""/>
+          <p:cNvPr id="23" name=""/>
           <p:cNvPicPr>
             <a:picLocks xmlns:a="http://schemas.openxmlformats.org/drawingml/2006/main" noChangeAspect="1"/>
           </p:cNvPicPr>
           <p:nvPr/>
         </p:nvPicPr>
         <p:blipFill>
-          <a:blip xmlns:r="http://schemas.openxmlformats.org/officeDocument/2006/relationships" xmlns:a="http://schemas.openxmlformats.org/drawingml/2006/main" r:embed="Ra902ee664d654bf9"/>
+          <a:blip xmlns:r="http://schemas.openxmlformats.org/officeDocument/2006/relationships" xmlns:a="http://schemas.openxmlformats.org/drawingml/2006/main" r:embed="R3d83dbc3a45945f1"/>
           <a:stretch xmlns:a="http://schemas.openxmlformats.org/drawingml/2006/main"/>
         </p:blipFill>
         <p:spPr>
@@ -14266,9 +16195,7 @@
             <a:ext cx="4813069" cy="3676650"/>
           </a:xfrm>
           <a:prstGeom xmlns:a="http://schemas.openxmlformats.org/drawingml/2006/main" prst="roundRect">
-            <a:avLst>
-              <a:gd name="adj" fmla="val 2073"/>
-            </a:avLst>
+            <a:avLst/>
           </a:prstGeom>
         </p:spPr>
       </p:pic>
@@ -14340,6 +16267,7 @@
           <a:lstStyle xmlns:a="http://schemas.openxmlformats.org/drawingml/2006/main"/>
           <a:p xmlns:a="http://schemas.openxmlformats.org/drawingml/2006/main">
             <a:pPr algn="l">
+              <a:buNone/>
               <a:defRPr sz="1950" b="1" i="0">
                 <a:solidFill>
                   <a:srgbClr val="111827"/>
@@ -14390,6 +16318,7 @@
           <a:lstStyle xmlns:a="http://schemas.openxmlformats.org/drawingml/2006/main"/>
           <a:p xmlns:a="http://schemas.openxmlformats.org/drawingml/2006/main">
             <a:pPr algn="l">
+              <a:buNone/>
               <a:defRPr sz="1350" b="1" i="0">
                 <a:solidFill>
                   <a:srgbClr val="087B73"/>
@@ -14440,6 +16369,7 @@
           <a:lstStyle xmlns:a="http://schemas.openxmlformats.org/drawingml/2006/main"/>
           <a:p xmlns:a="http://schemas.openxmlformats.org/drawingml/2006/main">
             <a:pPr algn="l">
+              <a:buNone/>
               <a:defRPr sz="1350" b="0" i="0">
                 <a:solidFill>
                   <a:srgbClr val="111827"/>
@@ -14490,6 +16420,7 @@
           <a:lstStyle xmlns:a="http://schemas.openxmlformats.org/drawingml/2006/main"/>
           <a:p xmlns:a="http://schemas.openxmlformats.org/drawingml/2006/main">
             <a:pPr algn="l">
+              <a:buNone/>
               <a:defRPr sz="1350" b="1" i="0">
                 <a:solidFill>
                   <a:srgbClr val="087B73"/>
@@ -14540,6 +16471,7 @@
           <a:lstStyle xmlns:a="http://schemas.openxmlformats.org/drawingml/2006/main"/>
           <a:p xmlns:a="http://schemas.openxmlformats.org/drawingml/2006/main">
             <a:pPr algn="l">
+              <a:buNone/>
               <a:defRPr sz="1350" b="0" i="0">
                 <a:solidFill>
                   <a:srgbClr val="111827"/>
@@ -14590,6 +16522,7 @@
           <a:lstStyle xmlns:a="http://schemas.openxmlformats.org/drawingml/2006/main"/>
           <a:p xmlns:a="http://schemas.openxmlformats.org/drawingml/2006/main">
             <a:pPr algn="l">
+              <a:buNone/>
               <a:defRPr sz="1350" b="1" i="0">
                 <a:solidFill>
                   <a:srgbClr val="087B73"/>
@@ -14640,6 +16573,7 @@
           <a:lstStyle xmlns:a="http://schemas.openxmlformats.org/drawingml/2006/main"/>
           <a:p xmlns:a="http://schemas.openxmlformats.org/drawingml/2006/main">
             <a:pPr algn="l">
+              <a:buNone/>
               <a:defRPr sz="1350" b="0" i="0">
                 <a:solidFill>
                   <a:srgbClr val="111827"/>
@@ -14690,6 +16624,7 @@
           <a:lstStyle xmlns:a="http://schemas.openxmlformats.org/drawingml/2006/main"/>
           <a:p xmlns:a="http://schemas.openxmlformats.org/drawingml/2006/main">
             <a:pPr algn="l">
+              <a:buNone/>
               <a:defRPr sz="1350" b="1" i="0">
                 <a:solidFill>
                   <a:srgbClr val="087B73"/>
@@ -14740,6 +16675,7 @@
           <a:lstStyle xmlns:a="http://schemas.openxmlformats.org/drawingml/2006/main"/>
           <a:p xmlns:a="http://schemas.openxmlformats.org/drawingml/2006/main">
             <a:pPr algn="l">
+              <a:buNone/>
               <a:defRPr sz="1350" b="0" i="0">
                 <a:solidFill>
                   <a:srgbClr val="111827"/>
@@ -14790,6 +16726,7 @@
           <a:lstStyle xmlns:a="http://schemas.openxmlformats.org/drawingml/2006/main"/>
           <a:p xmlns:a="http://schemas.openxmlformats.org/drawingml/2006/main">
             <a:pPr algn="l">
+              <a:buNone/>
               <a:defRPr sz="1350" b="1" i="0">
                 <a:solidFill>
                   <a:srgbClr val="087B73"/>
@@ -14840,6 +16777,7 @@
           <a:lstStyle xmlns:a="http://schemas.openxmlformats.org/drawingml/2006/main"/>
           <a:p xmlns:a="http://schemas.openxmlformats.org/drawingml/2006/main">
             <a:pPr algn="l">
+              <a:buNone/>
               <a:defRPr sz="1350" b="0" i="0">
                 <a:solidFill>
                   <a:srgbClr val="111827"/>
@@ -14919,6 +16857,7 @@
           <a:lstStyle xmlns:a="http://schemas.openxmlformats.org/drawingml/2006/main"/>
           <a:p xmlns:a="http://schemas.openxmlformats.org/drawingml/2006/main">
             <a:pPr algn="l">
+              <a:buNone/>
               <a:defRPr sz="1200" b="1" i="0">
                 <a:solidFill>
                   <a:srgbClr val="087B73"/>
@@ -14969,6 +16908,7 @@
           <a:lstStyle xmlns:a="http://schemas.openxmlformats.org/drawingml/2006/main"/>
           <a:p xmlns:a="http://schemas.openxmlformats.org/drawingml/2006/main">
             <a:pPr algn="l">
+              <a:buNone/>
               <a:defRPr sz="2850" b="1" i="0">
                 <a:solidFill>
                   <a:srgbClr val="111827"/>
@@ -15019,6 +16959,7 @@
           <a:lstStyle xmlns:a="http://schemas.openxmlformats.org/drawingml/2006/main"/>
           <a:p xmlns:a="http://schemas.openxmlformats.org/drawingml/2006/main">
             <a:pPr algn="l">
+              <a:buNone/>
               <a:defRPr sz="1275" b="0" i="0">
                 <a:solidFill>
                   <a:srgbClr val="5F6F6C"/>
@@ -15071,14 +17012,14 @@
       </p:sp>
       <p:pic>
         <p:nvPicPr>
-          <p:cNvPr id="29" name=""/>
+          <p:cNvPr id="30" name=""/>
           <p:cNvPicPr>
             <a:picLocks xmlns:a="http://schemas.openxmlformats.org/drawingml/2006/main" noChangeAspect="1"/>
           </p:cNvPicPr>
           <p:nvPr/>
         </p:nvPicPr>
         <p:blipFill>
-          <a:blip xmlns:r="http://schemas.openxmlformats.org/officeDocument/2006/relationships" xmlns:a="http://schemas.openxmlformats.org/drawingml/2006/main" r:embed="Ra40c0ab3e4714428"/>
+          <a:blip xmlns:r="http://schemas.openxmlformats.org/officeDocument/2006/relationships" xmlns:a="http://schemas.openxmlformats.org/drawingml/2006/main" r:embed="R8ecd9aa875544a4a"/>
           <a:stretch xmlns:a="http://schemas.openxmlformats.org/drawingml/2006/main"/>
         </p:blipFill>
         <p:spPr>
@@ -15087,9 +17028,7 @@
             <a:ext cx="4862945" cy="3714750"/>
           </a:xfrm>
           <a:prstGeom xmlns:a="http://schemas.openxmlformats.org/drawingml/2006/main" prst="roundRect">
-            <a:avLst>
-              <a:gd name="adj" fmla="val 2051"/>
-            </a:avLst>
+            <a:avLst/>
           </a:prstGeom>
         </p:spPr>
       </p:pic>
@@ -15161,6 +17100,7 @@
           <a:lstStyle xmlns:a="http://schemas.openxmlformats.org/drawingml/2006/main"/>
           <a:p xmlns:a="http://schemas.openxmlformats.org/drawingml/2006/main">
             <a:pPr algn="l">
+              <a:buNone/>
               <a:defRPr sz="1950" b="1" i="0">
                 <a:solidFill>
                   <a:srgbClr val="111827"/>
@@ -15279,6 +17219,7 @@
           <a:lstStyle xmlns:a="http://schemas.openxmlformats.org/drawingml/2006/main"/>
           <a:p xmlns:a="http://schemas.openxmlformats.org/drawingml/2006/main">
             <a:pPr algn="l">
+              <a:buNone/>
               <a:defRPr sz="975" b="1" i="0">
                 <a:solidFill>
                   <a:srgbClr val="5F6F6C"/>
@@ -15329,6 +17270,7 @@
           <a:lstStyle xmlns:a="http://schemas.openxmlformats.org/drawingml/2006/main"/>
           <a:p xmlns:a="http://schemas.openxmlformats.org/drawingml/2006/main">
             <a:pPr algn="l">
+              <a:buNone/>
               <a:defRPr sz="2550" b="1" i="0">
                 <a:solidFill>
                   <a:srgbClr val="111827"/>
@@ -15447,6 +17389,7 @@
           <a:lstStyle xmlns:a="http://schemas.openxmlformats.org/drawingml/2006/main"/>
           <a:p xmlns:a="http://schemas.openxmlformats.org/drawingml/2006/main">
             <a:pPr algn="l">
+              <a:buNone/>
               <a:defRPr sz="975" b="1" i="0">
                 <a:solidFill>
                   <a:srgbClr val="5F6F6C"/>
@@ -15497,6 +17440,7 @@
           <a:lstStyle xmlns:a="http://schemas.openxmlformats.org/drawingml/2006/main"/>
           <a:p xmlns:a="http://schemas.openxmlformats.org/drawingml/2006/main">
             <a:pPr algn="l">
+              <a:buNone/>
               <a:defRPr sz="2550" b="1" i="0">
                 <a:solidFill>
                   <a:srgbClr val="111827"/>
@@ -15615,6 +17559,7 @@
           <a:lstStyle xmlns:a="http://schemas.openxmlformats.org/drawingml/2006/main"/>
           <a:p xmlns:a="http://schemas.openxmlformats.org/drawingml/2006/main">
             <a:pPr algn="l">
+              <a:buNone/>
               <a:defRPr sz="975" b="1" i="0">
                 <a:solidFill>
                   <a:srgbClr val="5F6F6C"/>
@@ -15665,6 +17610,7 @@
           <a:lstStyle xmlns:a="http://schemas.openxmlformats.org/drawingml/2006/main"/>
           <a:p xmlns:a="http://schemas.openxmlformats.org/drawingml/2006/main">
             <a:pPr algn="l">
+              <a:buNone/>
               <a:defRPr sz="2550" b="1" i="0">
                 <a:solidFill>
                   <a:srgbClr val="111827"/>
@@ -15783,6 +17729,7 @@
           <a:lstStyle xmlns:a="http://schemas.openxmlformats.org/drawingml/2006/main"/>
           <a:p xmlns:a="http://schemas.openxmlformats.org/drawingml/2006/main">
             <a:pPr algn="l">
+              <a:buNone/>
               <a:defRPr sz="975" b="1" i="0">
                 <a:solidFill>
                   <a:srgbClr val="5F6F6C"/>
@@ -15833,6 +17780,7 @@
           <a:lstStyle xmlns:a="http://schemas.openxmlformats.org/drawingml/2006/main"/>
           <a:p xmlns:a="http://schemas.openxmlformats.org/drawingml/2006/main">
             <a:pPr algn="l">
+              <a:buNone/>
               <a:defRPr sz="2550" b="1" i="0">
                 <a:solidFill>
                   <a:srgbClr val="111827"/>
@@ -15883,6 +17831,7 @@
           <a:lstStyle xmlns:a="http://schemas.openxmlformats.org/drawingml/2006/main"/>
           <a:p xmlns:a="http://schemas.openxmlformats.org/drawingml/2006/main">
             <a:pPr algn="l">
+              <a:buNone/>
               <a:defRPr sz="1275" b="0" i="0">
                 <a:solidFill>
                   <a:srgbClr val="5F6F6C"/>
@@ -15962,6 +17911,7 @@
           <a:lstStyle xmlns:a="http://schemas.openxmlformats.org/drawingml/2006/main"/>
           <a:p xmlns:a="http://schemas.openxmlformats.org/drawingml/2006/main">
             <a:pPr algn="l">
+              <a:buNone/>
               <a:defRPr sz="1200" b="1" i="0">
                 <a:solidFill>
                   <a:srgbClr val="087B73"/>
@@ -16012,6 +17962,7 @@
           <a:lstStyle xmlns:a="http://schemas.openxmlformats.org/drawingml/2006/main"/>
           <a:p xmlns:a="http://schemas.openxmlformats.org/drawingml/2006/main">
             <a:pPr algn="l">
+              <a:buNone/>
               <a:defRPr sz="2850" b="1" i="0">
                 <a:solidFill>
                   <a:srgbClr val="111827"/>
@@ -16062,6 +18013,7 @@
           <a:lstStyle xmlns:a="http://schemas.openxmlformats.org/drawingml/2006/main"/>
           <a:p xmlns:a="http://schemas.openxmlformats.org/drawingml/2006/main">
             <a:pPr algn="l">
+              <a:buNone/>
               <a:defRPr sz="1275" b="0" i="0">
                 <a:solidFill>
                   <a:srgbClr val="5F6F6C"/>
@@ -16180,6 +18132,7 @@
           <a:lstStyle xmlns:a="http://schemas.openxmlformats.org/drawingml/2006/main"/>
           <a:p xmlns:a="http://schemas.openxmlformats.org/drawingml/2006/main">
             <a:pPr algn="l">
+              <a:buNone/>
               <a:defRPr sz="1875" b="1" i="0">
                 <a:solidFill>
                   <a:srgbClr val="111827"/>
@@ -16230,6 +18183,7 @@
           <a:lstStyle xmlns:a="http://schemas.openxmlformats.org/drawingml/2006/main"/>
           <a:p xmlns:a="http://schemas.openxmlformats.org/drawingml/2006/main">
             <a:pPr algn="l">
+              <a:buNone/>
               <a:defRPr sz="1575" b="0" i="0">
                 <a:solidFill>
                   <a:srgbClr val="111827"/>
@@ -16313,6 +18267,7 @@
           <a:lstStyle xmlns:a="http://schemas.openxmlformats.org/drawingml/2006/main"/>
           <a:p xmlns:a="http://schemas.openxmlformats.org/drawingml/2006/main">
             <a:pPr algn="l">
+              <a:buNone/>
               <a:defRPr sz="1350" b="1" i="0">
                 <a:solidFill>
                   <a:srgbClr val="087B73"/>
@@ -16363,6 +18318,7 @@
           <a:lstStyle xmlns:a="http://schemas.openxmlformats.org/drawingml/2006/main"/>
           <a:p xmlns:a="http://schemas.openxmlformats.org/drawingml/2006/main">
             <a:pPr algn="l">
+              <a:buNone/>
               <a:defRPr sz="1350" b="0" i="0">
                 <a:solidFill>
                   <a:srgbClr val="111827"/>
@@ -16413,6 +18369,7 @@
           <a:lstStyle xmlns:a="http://schemas.openxmlformats.org/drawingml/2006/main"/>
           <a:p xmlns:a="http://schemas.openxmlformats.org/drawingml/2006/main">
             <a:pPr algn="l">
+              <a:buNone/>
               <a:defRPr sz="1350" b="1" i="0">
                 <a:solidFill>
                   <a:srgbClr val="087B73"/>
@@ -16463,6 +18420,7 @@
           <a:lstStyle xmlns:a="http://schemas.openxmlformats.org/drawingml/2006/main"/>
           <a:p xmlns:a="http://schemas.openxmlformats.org/drawingml/2006/main">
             <a:pPr algn="l">
+              <a:buNone/>
               <a:defRPr sz="1350" b="0" i="0">
                 <a:solidFill>
                   <a:srgbClr val="111827"/>
@@ -16513,6 +18471,7 @@
           <a:lstStyle xmlns:a="http://schemas.openxmlformats.org/drawingml/2006/main"/>
           <a:p xmlns:a="http://schemas.openxmlformats.org/drawingml/2006/main">
             <a:pPr algn="l">
+              <a:buNone/>
               <a:defRPr sz="1350" b="1" i="0">
                 <a:solidFill>
                   <a:srgbClr val="087B73"/>
@@ -16563,6 +18522,7 @@
           <a:lstStyle xmlns:a="http://schemas.openxmlformats.org/drawingml/2006/main"/>
           <a:p xmlns:a="http://schemas.openxmlformats.org/drawingml/2006/main">
             <a:pPr algn="l">
+              <a:buNone/>
               <a:defRPr sz="1350" b="0" i="0">
                 <a:solidFill>
                   <a:srgbClr val="111827"/>
@@ -16648,6 +18608,7 @@
           <a:lstStyle xmlns:a="http://schemas.openxmlformats.org/drawingml/2006/main"/>
           <a:p xmlns:a="http://schemas.openxmlformats.org/drawingml/2006/main">
             <a:pPr algn="l">
+              <a:buNone/>
               <a:defRPr sz="1875" b="1" i="0">
                 <a:solidFill>
                   <a:srgbClr val="064E49"/>
@@ -16698,6 +18659,7 @@
           <a:lstStyle xmlns:a="http://schemas.openxmlformats.org/drawingml/2006/main"/>
           <a:p xmlns:a="http://schemas.openxmlformats.org/drawingml/2006/main">
             <a:pPr algn="l">
+              <a:buNone/>
               <a:defRPr sz="1575" b="0" i="0">
                 <a:solidFill>
                   <a:srgbClr val="111827"/>
@@ -16748,6 +18710,7 @@
           <a:lstStyle xmlns:a="http://schemas.openxmlformats.org/drawingml/2006/main"/>
           <a:p xmlns:a="http://schemas.openxmlformats.org/drawingml/2006/main">
             <a:pPr algn="l">
+              <a:buNone/>
               <a:defRPr sz="1575" b="1" i="0">
                 <a:solidFill>
                   <a:srgbClr val="064E49"/>
